--- a/project_reports/10APR_Progress.pptx
+++ b/project_reports/10APR_Progress.pptx
@@ -5,72 +5,71 @@
     <p:sldMasterId id="2147483661" r:id="rId4"/>
   </p:sldMasterIdLst>
   <p:notesMasterIdLst>
-    <p:notesMasterId r:id="rId30"/>
+    <p:notesMasterId r:id="rId29"/>
   </p:notesMasterIdLst>
   <p:handoutMasterIdLst>
-    <p:handoutMasterId r:id="rId31"/>
+    <p:handoutMasterId r:id="rId30"/>
   </p:handoutMasterIdLst>
   <p:sldIdLst>
     <p:sldId id="408" r:id="rId5"/>
     <p:sldId id="407" r:id="rId6"/>
     <p:sldId id="429" r:id="rId7"/>
     <p:sldId id="431" r:id="rId8"/>
-    <p:sldId id="432" r:id="rId9"/>
-    <p:sldId id="440" r:id="rId10"/>
-    <p:sldId id="443" r:id="rId11"/>
-    <p:sldId id="434" r:id="rId12"/>
-    <p:sldId id="435" r:id="rId13"/>
-    <p:sldId id="436" r:id="rId14"/>
-    <p:sldId id="437" r:id="rId15"/>
-    <p:sldId id="446" r:id="rId16"/>
-    <p:sldId id="444" r:id="rId17"/>
-    <p:sldId id="445" r:id="rId18"/>
-    <p:sldId id="441" r:id="rId19"/>
-    <p:sldId id="438" r:id="rId20"/>
-    <p:sldId id="439" r:id="rId21"/>
-    <p:sldId id="430" r:id="rId22"/>
-    <p:sldId id="273" r:id="rId23"/>
-    <p:sldId id="442" r:id="rId24"/>
-    <p:sldId id="275" r:id="rId25"/>
-    <p:sldId id="276" r:id="rId26"/>
-    <p:sldId id="277" r:id="rId27"/>
-    <p:sldId id="279" r:id="rId28"/>
-    <p:sldId id="281" r:id="rId29"/>
+    <p:sldId id="440" r:id="rId9"/>
+    <p:sldId id="443" r:id="rId10"/>
+    <p:sldId id="434" r:id="rId11"/>
+    <p:sldId id="435" r:id="rId12"/>
+    <p:sldId id="436" r:id="rId13"/>
+    <p:sldId id="437" r:id="rId14"/>
+    <p:sldId id="446" r:id="rId15"/>
+    <p:sldId id="444" r:id="rId16"/>
+    <p:sldId id="445" r:id="rId17"/>
+    <p:sldId id="441" r:id="rId18"/>
+    <p:sldId id="438" r:id="rId19"/>
+    <p:sldId id="439" r:id="rId20"/>
+    <p:sldId id="430" r:id="rId21"/>
+    <p:sldId id="273" r:id="rId22"/>
+    <p:sldId id="442" r:id="rId23"/>
+    <p:sldId id="275" r:id="rId24"/>
+    <p:sldId id="276" r:id="rId25"/>
+    <p:sldId id="277" r:id="rId26"/>
+    <p:sldId id="279" r:id="rId27"/>
+    <p:sldId id="281" r:id="rId28"/>
   </p:sldIdLst>
   <p:sldSz cx="12192000" cy="6858000"/>
   <p:notesSz cx="9296400" cy="7010400"/>
   <p:embeddedFontLst>
     <p:embeddedFont>
       <p:font typeface="Cambria Math" panose="02040503050406030204" pitchFamily="18" charset="0"/>
-      <p:regular r:id="rId32"/>
+      <p:regular r:id="rId31"/>
     </p:embeddedFont>
     <p:embeddedFont>
       <p:font typeface="Merriweather" pitchFamily="2" charset="77"/>
-      <p:regular r:id="rId33"/>
-      <p:bold r:id="rId34"/>
-      <p:italic r:id="rId35"/>
-      <p:boldItalic r:id="rId36"/>
+      <p:regular r:id="rId32"/>
+      <p:bold r:id="rId33"/>
+      <p:italic r:id="rId34"/>
+      <p:boldItalic r:id="rId35"/>
     </p:embeddedFont>
     <p:embeddedFont>
       <p:font typeface="PT serif" panose="020A0603040505020204" pitchFamily="18" charset="77"/>
-      <p:regular r:id="rId37"/>
-      <p:bold r:id="rId38"/>
-      <p:italic r:id="rId39"/>
-      <p:boldItalic r:id="rId40"/>
+      <p:regular r:id="rId36"/>
+      <p:bold r:id="rId37"/>
+      <p:italic r:id="rId38"/>
+      <p:boldItalic r:id="rId39"/>
     </p:embeddedFont>
     <p:embeddedFont>
       <p:font typeface="Roboto" panose="02000000000000000000" pitchFamily="2" charset="0"/>
-      <p:regular r:id="rId41"/>
-      <p:bold r:id="rId42"/>
-      <p:italic r:id="rId43"/>
-      <p:boldItalic r:id="rId44"/>
+      <p:regular r:id="rId40"/>
+      <p:bold r:id="rId41"/>
+      <p:italic r:id="rId42"/>
+      <p:boldItalic r:id="rId43"/>
     </p:embeddedFont>
     <p:embeddedFont>
       <p:font typeface="Source sans 3" panose="020B0303030403020204" pitchFamily="34" charset="0"/>
-      <p:regular r:id="rId45"/>
-      <p:bold r:id="rId46"/>
-      <p:italic r:id="rId47"/>
-      <p:boldItalic r:id="rId48"/>
+      <p:regular r:id="rId44"/>
+      <p:bold r:id="rId45"/>
+      <p:italic r:id="rId46"/>
+      <p:boldItalic r:id="rId47"/>
     </p:embeddedFont>
   </p:embeddedFontLst>
   <p:defaultTextStyle>
@@ -884,316 +883,6 @@
         <p:cNvPr id="1" name="">
           <a:extLst>
             <a:ext uri="{FF2B5EF4-FFF2-40B4-BE49-F238E27FC236}">
-              <a16:creationId xmlns:a16="http://schemas.microsoft.com/office/drawing/2014/main" id="{EB376FB7-E1E1-DF26-DD42-A6914910E8E4}"/>
-            </a:ext>
-          </a:extLst>
-        </p:cNvPr>
-        <p:cNvGrpSpPr/>
-        <p:nvPr/>
-      </p:nvGrpSpPr>
-      <p:grpSpPr>
-        <a:xfrm>
-          <a:off x="0" y="0"/>
-          <a:ext cx="0" cy="0"/>
-          <a:chOff x="0" y="0"/>
-          <a:chExt cx="0" cy="0"/>
-        </a:xfrm>
-      </p:grpSpPr>
-      <p:sp>
-        <p:nvSpPr>
-          <p:cNvPr id="2" name="Slide Image Placeholder 1">
-            <a:extLst>
-              <a:ext uri="{FF2B5EF4-FFF2-40B4-BE49-F238E27FC236}">
-                <a16:creationId xmlns:a16="http://schemas.microsoft.com/office/drawing/2014/main" id="{C85697AD-0E16-C69C-3838-FDE2DCF9CA5B}"/>
-              </a:ext>
-            </a:extLst>
-          </p:cNvPr>
-          <p:cNvSpPr>
-            <a:spLocks noGrp="1" noRot="1" noChangeAspect="1"/>
-          </p:cNvSpPr>
-          <p:nvPr>
-            <p:ph type="sldImg"/>
-          </p:nvPr>
-        </p:nvSpPr>
-        <p:spPr/>
-      </p:sp>
-      <p:sp>
-        <p:nvSpPr>
-          <p:cNvPr id="3" name="Notes Placeholder 2">
-            <a:extLst>
-              <a:ext uri="{FF2B5EF4-FFF2-40B4-BE49-F238E27FC236}">
-                <a16:creationId xmlns:a16="http://schemas.microsoft.com/office/drawing/2014/main" id="{00C9A24C-0EA7-83F2-3028-7B89A1FC2C52}"/>
-              </a:ext>
-            </a:extLst>
-          </p:cNvPr>
-          <p:cNvSpPr>
-            <a:spLocks noGrp="1"/>
-          </p:cNvSpPr>
-          <p:nvPr>
-            <p:ph type="body" idx="1"/>
-          </p:nvPr>
-        </p:nvSpPr>
-        <p:spPr/>
-        <p:txBody>
-          <a:bodyPr/>
-          <a:lstStyle/>
-          <a:p>
-            <a:r>
-              <a:rPr lang="en-US" b="1" dirty="0"/>
-              <a:t>1. The "Anchor" (Historical vs. Forecast)</a:t>
-            </a:r>
-          </a:p>
-          <a:p>
-            <a:r>
-              <a:rPr lang="en-US" b="1" dirty="0"/>
-              <a:t>The Black Line (2014–2023):</a:t>
-            </a:r>
-            <a:r>
-              <a:rPr lang="en-US" dirty="0"/>
-              <a:t> This represents </a:t>
-            </a:r>
-            <a:r>
-              <a:rPr lang="en-US" b="1" dirty="0"/>
-              <a:t>Observed Data</a:t>
-            </a:r>
-            <a:r>
-              <a:rPr lang="en-US" dirty="0"/>
-              <a:t>. It establishes the baseline trend of population decline that the models are "learning" from.</a:t>
-            </a:r>
-          </a:p>
-          <a:p>
-            <a:r>
-              <a:rPr lang="en-US" b="1" dirty="0"/>
-              <a:t>The Red Dashed Line (Current: 2023):</a:t>
-            </a:r>
-            <a:r>
-              <a:rPr lang="en-US" dirty="0"/>
-              <a:t> This is the </a:t>
-            </a:r>
-            <a:r>
-              <a:rPr lang="en-US" b="1" dirty="0"/>
-              <a:t>Pivot Point</a:t>
-            </a:r>
-            <a:r>
-              <a:rPr lang="en-US" dirty="0"/>
-              <a:t>. Everything to the left is fact; everything to the right is a probabilistic projection based on Phase 6 modeling.</a:t>
-            </a:r>
-          </a:p>
-          <a:p>
-            <a:endParaRPr lang="en-US" dirty="0"/>
-          </a:p>
-          <a:p>
-            <a:r>
-              <a:rPr lang="en-US" b="1" dirty="0"/>
-              <a:t>2. The "Median" (The Expected Path)</a:t>
-            </a:r>
-          </a:p>
-          <a:p>
-            <a:r>
-              <a:rPr lang="en-US" dirty="0"/>
-              <a:t>The center line represents the </a:t>
-            </a:r>
-            <a:r>
-              <a:rPr lang="en-US" b="1" dirty="0"/>
-              <a:t>P50 (Median) Forecast</a:t>
-            </a:r>
-            <a:r>
-              <a:rPr lang="en-US" dirty="0"/>
-              <a:t>.</a:t>
-            </a:r>
-          </a:p>
-          <a:p>
-            <a:r>
-              <a:rPr lang="en-US" b="1" dirty="0"/>
-              <a:t>The Insight:</a:t>
-            </a:r>
-            <a:r>
-              <a:rPr lang="en-US" dirty="0"/>
-              <a:t> Our analysis suggests that the most likely outcome is a continued, linear decline, bringing the population toward the </a:t>
-            </a:r>
-            <a:r>
-              <a:rPr lang="en-US" b="1" dirty="0"/>
-              <a:t>3.0M mark by 2030</a:t>
-            </a:r>
-            <a:r>
-              <a:rPr lang="en-US" dirty="0"/>
-              <a:t>.</a:t>
-            </a:r>
-          </a:p>
-          <a:p>
-            <a:endParaRPr lang="en-US" dirty="0"/>
-          </a:p>
-          <a:p>
-            <a:r>
-              <a:rPr lang="en-US" b="1" dirty="0"/>
-              <a:t>3. Understanding the "Fan" (The Probability Bands)</a:t>
-            </a:r>
-          </a:p>
-          <a:p>
-            <a:r>
-              <a:rPr lang="en-US" dirty="0"/>
-              <a:t>Instead of giving a single "guess," the fan shows a range of possible futures:</a:t>
-            </a:r>
-          </a:p>
-          <a:p>
-            <a:r>
-              <a:rPr lang="en-US" b="1" dirty="0"/>
-              <a:t>The Core (Central Bands):</a:t>
-            </a:r>
-            <a:r>
-              <a:rPr lang="en-US" dirty="0"/>
-              <a:t> The green and teal areas represent the </a:t>
-            </a:r>
-            <a:r>
-              <a:rPr lang="en-US" b="1" dirty="0"/>
-              <a:t>50% probability interval</a:t>
-            </a:r>
-            <a:r>
-              <a:rPr lang="en-US" dirty="0"/>
-              <a:t>. If current structural conditions remain stable, the population will almost certainly land within this range.</a:t>
-            </a:r>
-          </a:p>
-          <a:p>
-            <a:r>
-              <a:rPr lang="en-US" b="1" dirty="0"/>
-              <a:t>The Tails (Outer Bands):</a:t>
-            </a:r>
-            <a:r>
-              <a:rPr lang="en-US" dirty="0"/>
-              <a:t> The dark purple and light orange areas represent </a:t>
-            </a:r>
-            <a:r>
-              <a:rPr lang="en-US" b="1" dirty="0"/>
-              <a:t>extreme scenarios</a:t>
-            </a:r>
-            <a:r>
-              <a:rPr lang="en-US" dirty="0"/>
-              <a:t> (Tail Risks).</a:t>
-            </a:r>
-          </a:p>
-          <a:p>
-            <a:pPr lvl="1"/>
-            <a:r>
-              <a:rPr lang="en-US" b="1" dirty="0"/>
-              <a:t>Upper Tail (Orange):</a:t>
-            </a:r>
-            <a:r>
-              <a:rPr lang="en-US" dirty="0"/>
-              <a:t> Represents a "Favorable" scenario where decline slows significantly (e.g., due to economic stabilization or migration shifts).</a:t>
-            </a:r>
-          </a:p>
-          <a:p>
-            <a:pPr lvl="1"/>
-            <a:r>
-              <a:rPr lang="en-US" b="1" dirty="0"/>
-              <a:t>Lower Tail (Dark Purple):</a:t>
-            </a:r>
-            <a:r>
-              <a:rPr lang="en-US" dirty="0"/>
-              <a:t> Represents an "Adverse" scenario where decline accelerates (e.g., due to external shocks or deepening structural vulnerability).</a:t>
-            </a:r>
-          </a:p>
-          <a:p>
-            <a:pPr lvl="1"/>
-            <a:endParaRPr lang="en-US" dirty="0"/>
-          </a:p>
-          <a:p>
-            <a:r>
-              <a:rPr lang="en-US" b="1" dirty="0"/>
-              <a:t>4. Key Takeaway for Policy</a:t>
-            </a:r>
-          </a:p>
-          <a:p>
-            <a:r>
-              <a:rPr lang="en-US" b="1" dirty="0"/>
-              <a:t>Systemic Persistence:</a:t>
-            </a:r>
-            <a:r>
-              <a:rPr lang="en-US" dirty="0"/>
-              <a:t> Even in the most "optimistic" scenario (the top of the fan), the island does not return to growth by 2030.</a:t>
-            </a:r>
-          </a:p>
-          <a:p>
-            <a:r>
-              <a:rPr lang="en-US" b="1" dirty="0"/>
-              <a:t>Widening Uncertainty:</a:t>
-            </a:r>
-            <a:r>
-              <a:rPr lang="en-US" dirty="0"/>
-              <a:t> The "width" of the fan at 2030 illustrates that while we are certain about the </a:t>
-            </a:r>
-            <a:r>
-              <a:rPr lang="en-US" i="1" dirty="0"/>
-              <a:t>direction</a:t>
-            </a:r>
-            <a:r>
-              <a:rPr lang="en-US" dirty="0"/>
-              <a:t> of the trend, the </a:t>
-            </a:r>
-            <a:r>
-              <a:rPr lang="en-US" i="1" dirty="0"/>
-              <a:t>magnitude</a:t>
-            </a:r>
-            <a:r>
-              <a:rPr lang="en-US" dirty="0"/>
-              <a:t> of the loss is subject to high volatility, requiring flexible regional planning.</a:t>
-            </a:r>
-          </a:p>
-          <a:p>
-            <a:endParaRPr lang="en-US" dirty="0"/>
-          </a:p>
-        </p:txBody>
-      </p:sp>
-      <p:sp>
-        <p:nvSpPr>
-          <p:cNvPr id="4" name="Slide Number Placeholder 3">
-            <a:extLst>
-              <a:ext uri="{FF2B5EF4-FFF2-40B4-BE49-F238E27FC236}">
-                <a16:creationId xmlns:a16="http://schemas.microsoft.com/office/drawing/2014/main" id="{2B1F1F4F-300D-524D-88DA-F56D106F648B}"/>
-              </a:ext>
-            </a:extLst>
-          </p:cNvPr>
-          <p:cNvSpPr>
-            <a:spLocks noGrp="1"/>
-          </p:cNvSpPr>
-          <p:nvPr>
-            <p:ph type="sldNum" sz="quarter" idx="5"/>
-          </p:nvPr>
-        </p:nvSpPr>
-        <p:spPr/>
-        <p:txBody>
-          <a:bodyPr/>
-          <a:lstStyle/>
-          <a:p>
-            <a:fld id="{5068C1A6-6C9C-C342-8E0F-AE9AC9AFD13B}" type="slidenum">
-              <a:rPr lang="en-US" smtClean="0"/>
-              <a:t>12</a:t>
-            </a:fld>
-            <a:endParaRPr lang="en-US" dirty="0"/>
-          </a:p>
-        </p:txBody>
-      </p:sp>
-    </p:spTree>
-    <p:extLst>
-      <p:ext uri="{BB962C8B-B14F-4D97-AF65-F5344CB8AC3E}">
-        <p14:creationId xmlns:p14="http://schemas.microsoft.com/office/powerpoint/2010/main" val="4055531301"/>
-      </p:ext>
-    </p:extLst>
-  </p:cSld>
-  <p:clrMapOvr>
-    <a:masterClrMapping/>
-  </p:clrMapOvr>
-</p:notes>
-</file>
-
-<file path=ppt/notesSlides/notesSlide11.xml><?xml version="1.0" encoding="utf-8"?>
-<p:notes xmlns:a="http://schemas.openxmlformats.org/drawingml/2006/main" xmlns:r="http://schemas.openxmlformats.org/officeDocument/2006/relationships" xmlns:p="http://schemas.openxmlformats.org/presentationml/2006/main">
-  <p:cSld>
-    <p:spTree>
-      <p:nvGrpSpPr>
-        <p:cNvPr id="1" name="">
-          <a:extLst>
-            <a:ext uri="{FF2B5EF4-FFF2-40B4-BE49-F238E27FC236}">
               <a16:creationId xmlns:a16="http://schemas.microsoft.com/office/drawing/2014/main" id="{C070C211-7FD4-82EB-FB58-FE463015F9AA}"/>
             </a:ext>
           </a:extLst>
@@ -1477,7 +1166,7 @@
           <a:p>
             <a:fld id="{5068C1A6-6C9C-C342-8E0F-AE9AC9AFD13B}" type="slidenum">
               <a:rPr lang="en-US" smtClean="0"/>
-              <a:t>13</a:t>
+              <a:t>12</a:t>
             </a:fld>
             <a:endParaRPr lang="en-US" dirty="0"/>
           </a:p>
@@ -1496,7 +1185,7 @@
 </p:notes>
 </file>
 
-<file path=ppt/notesSlides/notesSlide12.xml><?xml version="1.0" encoding="utf-8"?>
+<file path=ppt/notesSlides/notesSlide11.xml><?xml version="1.0" encoding="utf-8"?>
 <p:notes xmlns:a="http://schemas.openxmlformats.org/drawingml/2006/main" xmlns:r="http://schemas.openxmlformats.org/officeDocument/2006/relationships" xmlns:p="http://schemas.openxmlformats.org/presentationml/2006/main">
   <p:cSld>
     <p:spTree>
@@ -1558,208 +1247,6 @@
           <a:bodyPr/>
           <a:lstStyle/>
           <a:p>
-            <a:r>
-              <a:rPr lang="en-US" b="1" dirty="0"/>
-              <a:t>1. The "Anchor" (Historical vs. Forecast)</a:t>
-            </a:r>
-          </a:p>
-          <a:p>
-            <a:r>
-              <a:rPr lang="en-US" b="1" dirty="0"/>
-              <a:t>The Black Line (2014–2023):</a:t>
-            </a:r>
-            <a:r>
-              <a:rPr lang="en-US" dirty="0"/>
-              <a:t> This represents </a:t>
-            </a:r>
-            <a:r>
-              <a:rPr lang="en-US" b="1" dirty="0"/>
-              <a:t>Observed Data</a:t>
-            </a:r>
-            <a:r>
-              <a:rPr lang="en-US" dirty="0"/>
-              <a:t>. It establishes the baseline trend of population decline that the models are "learning" from.</a:t>
-            </a:r>
-          </a:p>
-          <a:p>
-            <a:r>
-              <a:rPr lang="en-US" b="1" dirty="0"/>
-              <a:t>The Red Dashed Line (Current: 2023):</a:t>
-            </a:r>
-            <a:r>
-              <a:rPr lang="en-US" dirty="0"/>
-              <a:t> This is the </a:t>
-            </a:r>
-            <a:r>
-              <a:rPr lang="en-US" b="1" dirty="0"/>
-              <a:t>Pivot Point</a:t>
-            </a:r>
-            <a:r>
-              <a:rPr lang="en-US" dirty="0"/>
-              <a:t>. Everything to the left is fact; everything to the right is a probabilistic projection based on Phase 6 modeling.</a:t>
-            </a:r>
-          </a:p>
-          <a:p>
-            <a:endParaRPr lang="en-US" dirty="0"/>
-          </a:p>
-          <a:p>
-            <a:r>
-              <a:rPr lang="en-US" b="1" dirty="0"/>
-              <a:t>2. The "Median" (The Expected Path)</a:t>
-            </a:r>
-          </a:p>
-          <a:p>
-            <a:r>
-              <a:rPr lang="en-US" dirty="0"/>
-              <a:t>The center line represents the </a:t>
-            </a:r>
-            <a:r>
-              <a:rPr lang="en-US" b="1" dirty="0"/>
-              <a:t>P50 (Median) Forecast</a:t>
-            </a:r>
-            <a:r>
-              <a:rPr lang="en-US" dirty="0"/>
-              <a:t>.</a:t>
-            </a:r>
-          </a:p>
-          <a:p>
-            <a:r>
-              <a:rPr lang="en-US" b="1" dirty="0"/>
-              <a:t>The Insight:</a:t>
-            </a:r>
-            <a:r>
-              <a:rPr lang="en-US" dirty="0"/>
-              <a:t> Our analysis suggests that the most likely outcome is a continued, linear decline, bringing the population toward the </a:t>
-            </a:r>
-            <a:r>
-              <a:rPr lang="en-US" b="1" dirty="0"/>
-              <a:t>3.0M mark by 2030</a:t>
-            </a:r>
-            <a:r>
-              <a:rPr lang="en-US" dirty="0"/>
-              <a:t>.</a:t>
-            </a:r>
-          </a:p>
-          <a:p>
-            <a:endParaRPr lang="en-US" dirty="0"/>
-          </a:p>
-          <a:p>
-            <a:r>
-              <a:rPr lang="en-US" b="1" dirty="0"/>
-              <a:t>3. Understanding the "Fan" (The Probability Bands)</a:t>
-            </a:r>
-          </a:p>
-          <a:p>
-            <a:r>
-              <a:rPr lang="en-US" dirty="0"/>
-              <a:t>Instead of giving a single "guess," the fan shows a range of possible futures:</a:t>
-            </a:r>
-          </a:p>
-          <a:p>
-            <a:r>
-              <a:rPr lang="en-US" b="1" dirty="0"/>
-              <a:t>The Core (Central Bands):</a:t>
-            </a:r>
-            <a:r>
-              <a:rPr lang="en-US" dirty="0"/>
-              <a:t> The green and teal areas represent the </a:t>
-            </a:r>
-            <a:r>
-              <a:rPr lang="en-US" b="1" dirty="0"/>
-              <a:t>50% probability interval</a:t>
-            </a:r>
-            <a:r>
-              <a:rPr lang="en-US" dirty="0"/>
-              <a:t>. If current structural conditions remain stable, the population will almost certainly land within this range.</a:t>
-            </a:r>
-          </a:p>
-          <a:p>
-            <a:r>
-              <a:rPr lang="en-US" b="1" dirty="0"/>
-              <a:t>The Tails (Outer Bands):</a:t>
-            </a:r>
-            <a:r>
-              <a:rPr lang="en-US" dirty="0"/>
-              <a:t> The dark purple and light orange areas represent </a:t>
-            </a:r>
-            <a:r>
-              <a:rPr lang="en-US" b="1" dirty="0"/>
-              <a:t>extreme scenarios</a:t>
-            </a:r>
-            <a:r>
-              <a:rPr lang="en-US" dirty="0"/>
-              <a:t> (Tail Risks).</a:t>
-            </a:r>
-          </a:p>
-          <a:p>
-            <a:pPr lvl="1"/>
-            <a:r>
-              <a:rPr lang="en-US" b="1" dirty="0"/>
-              <a:t>Upper Tail (Orange):</a:t>
-            </a:r>
-            <a:r>
-              <a:rPr lang="en-US" dirty="0"/>
-              <a:t> Represents a "Favorable" scenario where decline slows significantly (e.g., due to economic stabilization or migration shifts).</a:t>
-            </a:r>
-          </a:p>
-          <a:p>
-            <a:pPr lvl="1"/>
-            <a:r>
-              <a:rPr lang="en-US" b="1" dirty="0"/>
-              <a:t>Lower Tail (Dark Purple):</a:t>
-            </a:r>
-            <a:r>
-              <a:rPr lang="en-US" dirty="0"/>
-              <a:t> Represents an "Adverse" scenario where decline accelerates (e.g., due to external shocks or deepening structural vulnerability).</a:t>
-            </a:r>
-          </a:p>
-          <a:p>
-            <a:pPr lvl="1"/>
-            <a:endParaRPr lang="en-US" dirty="0"/>
-          </a:p>
-          <a:p>
-            <a:r>
-              <a:rPr lang="en-US" b="1" dirty="0"/>
-              <a:t>4. Key Takeaway for Policy</a:t>
-            </a:r>
-          </a:p>
-          <a:p>
-            <a:r>
-              <a:rPr lang="en-US" b="1" dirty="0"/>
-              <a:t>Systemic Persistence:</a:t>
-            </a:r>
-            <a:r>
-              <a:rPr lang="en-US" dirty="0"/>
-              <a:t> Even in the most "optimistic" scenario (the top of the fan), the island does not return to growth by 2030.</a:t>
-            </a:r>
-          </a:p>
-          <a:p>
-            <a:r>
-              <a:rPr lang="en-US" b="1" dirty="0"/>
-              <a:t>Widening Uncertainty:</a:t>
-            </a:r>
-            <a:r>
-              <a:rPr lang="en-US" dirty="0"/>
-              <a:t> The "width" of the fan at 2030 illustrates that while we are certain about the </a:t>
-            </a:r>
-            <a:r>
-              <a:rPr lang="en-US" i="1" dirty="0"/>
-              <a:t>direction</a:t>
-            </a:r>
-            <a:r>
-              <a:rPr lang="en-US" dirty="0"/>
-              <a:t> of the trend, the </a:t>
-            </a:r>
-            <a:r>
-              <a:rPr lang="en-US" i="1" dirty="0"/>
-              <a:t>magnitude</a:t>
-            </a:r>
-            <a:r>
-              <a:rPr lang="en-US" dirty="0"/>
-              <a:t> of the loss is subject to high volatility, requiring flexible regional planning.</a:t>
-            </a:r>
-          </a:p>
-          <a:p>
             <a:endParaRPr lang="en-US" dirty="0"/>
           </a:p>
         </p:txBody>
@@ -1787,7 +1274,7 @@
           <a:p>
             <a:fld id="{5068C1A6-6C9C-C342-8E0F-AE9AC9AFD13B}" type="slidenum">
               <a:rPr lang="en-US" smtClean="0"/>
-              <a:t>14</a:t>
+              <a:t>13</a:t>
             </a:fld>
             <a:endParaRPr lang="en-US" dirty="0"/>
           </a:p>
@@ -1806,7 +1293,7 @@
 </p:notes>
 </file>
 
-<file path=ppt/notesSlides/notesSlide13.xml><?xml version="1.0" encoding="utf-8"?>
+<file path=ppt/notesSlides/notesSlide12.xml><?xml version="1.0" encoding="utf-8"?>
 <p:notes xmlns:a="http://schemas.openxmlformats.org/drawingml/2006/main" xmlns:r="http://schemas.openxmlformats.org/officeDocument/2006/relationships" xmlns:p="http://schemas.openxmlformats.org/presentationml/2006/main">
   <p:cSld>
     <p:spTree>
@@ -1895,7 +1382,7 @@
           <a:p>
             <a:fld id="{5068C1A6-6C9C-C342-8E0F-AE9AC9AFD13B}" type="slidenum">
               <a:rPr lang="en-US" smtClean="0"/>
-              <a:t>17</a:t>
+              <a:t>16</a:t>
             </a:fld>
             <a:endParaRPr lang="en-US" dirty="0"/>
           </a:p>
@@ -1914,7 +1401,7 @@
 </p:notes>
 </file>
 
-<file path=ppt/notesSlides/notesSlide14.xml><?xml version="1.0" encoding="utf-8"?>
+<file path=ppt/notesSlides/notesSlide13.xml><?xml version="1.0" encoding="utf-8"?>
 <p:notes xmlns:a="http://schemas.openxmlformats.org/drawingml/2006/main" xmlns:r="http://schemas.openxmlformats.org/officeDocument/2006/relationships" xmlns:p="http://schemas.openxmlformats.org/presentationml/2006/main" showMasterSp="0" showMasterPhAnim="0">
   <p:cSld>
     <p:spTree>
@@ -2496,7 +1983,7 @@
 </p:notes>
 </file>
 
-<file path=ppt/notesSlides/notesSlide15.xml><?xml version="1.0" encoding="utf-8"?>
+<file path=ppt/notesSlides/notesSlide14.xml><?xml version="1.0" encoding="utf-8"?>
 <p:notes xmlns:a="http://schemas.openxmlformats.org/drawingml/2006/main" xmlns:r="http://schemas.openxmlformats.org/officeDocument/2006/relationships" xmlns:p="http://schemas.openxmlformats.org/presentationml/2006/main" showMasterSp="0" showMasterPhAnim="0">
   <p:cSld>
     <p:spTree>
@@ -2623,7 +2110,7 @@
 </p:notes>
 </file>
 
-<file path=ppt/notesSlides/notesSlide16.xml><?xml version="1.0" encoding="utf-8"?>
+<file path=ppt/notesSlides/notesSlide15.xml><?xml version="1.0" encoding="utf-8"?>
 <p:notes xmlns:a="http://schemas.openxmlformats.org/drawingml/2006/main" xmlns:r="http://schemas.openxmlformats.org/officeDocument/2006/relationships" xmlns:p="http://schemas.openxmlformats.org/presentationml/2006/main" showMasterSp="0" showMasterPhAnim="0">
   <p:cSld>
     <p:spTree>
@@ -2750,7 +2237,7 @@
 </p:notes>
 </file>
 
-<file path=ppt/notesSlides/notesSlide17.xml><?xml version="1.0" encoding="utf-8"?>
+<file path=ppt/notesSlides/notesSlide16.xml><?xml version="1.0" encoding="utf-8"?>
 <p:notes xmlns:a="http://schemas.openxmlformats.org/drawingml/2006/main" xmlns:r="http://schemas.openxmlformats.org/officeDocument/2006/relationships" xmlns:p="http://schemas.openxmlformats.org/presentationml/2006/main" showMasterSp="0" showMasterPhAnim="0">
   <p:cSld>
     <p:spTree>
@@ -2877,7 +2364,7 @@
 </p:notes>
 </file>
 
-<file path=ppt/notesSlides/notesSlide18.xml><?xml version="1.0" encoding="utf-8"?>
+<file path=ppt/notesSlides/notesSlide17.xml><?xml version="1.0" encoding="utf-8"?>
 <p:notes xmlns:a="http://schemas.openxmlformats.org/drawingml/2006/main" xmlns:r="http://schemas.openxmlformats.org/officeDocument/2006/relationships" xmlns:p="http://schemas.openxmlformats.org/presentationml/2006/main" showMasterSp="0" showMasterPhAnim="0">
   <p:cSld>
     <p:spTree>
@@ -3004,7 +2491,7 @@
 </p:notes>
 </file>
 
-<file path=ppt/notesSlides/notesSlide19.xml><?xml version="1.0" encoding="utf-8"?>
+<file path=ppt/notesSlides/notesSlide18.xml><?xml version="1.0" encoding="utf-8"?>
 <p:notes xmlns:a="http://schemas.openxmlformats.org/drawingml/2006/main" xmlns:r="http://schemas.openxmlformats.org/officeDocument/2006/relationships" xmlns:p="http://schemas.openxmlformats.org/presentationml/2006/main" showMasterSp="0" showMasterPhAnim="0">
   <p:cSld>
     <p:spTree>
@@ -3122,6 +2609,133 @@
     <p:extLst>
       <p:ext uri="{BB962C8B-B14F-4D97-AF65-F5344CB8AC3E}">
         <p14:creationId xmlns:p14="http://schemas.microsoft.com/office/powerpoint/2010/main" val="1415475390"/>
+      </p:ext>
+    </p:extLst>
+  </p:cSld>
+  <p:clrMapOvr>
+    <a:masterClrMapping/>
+  </p:clrMapOvr>
+</p:notes>
+</file>
+
+<file path=ppt/notesSlides/notesSlide19.xml><?xml version="1.0" encoding="utf-8"?>
+<p:notes xmlns:a="http://schemas.openxmlformats.org/drawingml/2006/main" xmlns:r="http://schemas.openxmlformats.org/officeDocument/2006/relationships" xmlns:p="http://schemas.openxmlformats.org/presentationml/2006/main" showMasterSp="0" showMasterPhAnim="0">
+  <p:cSld>
+    <p:spTree>
+      <p:nvGrpSpPr>
+        <p:cNvPr id="1" name="Shape 105">
+          <a:extLst>
+            <a:ext uri="{FF2B5EF4-FFF2-40B4-BE49-F238E27FC236}">
+              <a16:creationId xmlns:a16="http://schemas.microsoft.com/office/drawing/2014/main" id="{2274DD90-9961-D207-A4E2-6FC07233BB0F}"/>
+            </a:ext>
+          </a:extLst>
+        </p:cNvPr>
+        <p:cNvGrpSpPr/>
+        <p:nvPr/>
+      </p:nvGrpSpPr>
+      <p:grpSpPr>
+        <a:xfrm>
+          <a:off x="0" y="0"/>
+          <a:ext cx="0" cy="0"/>
+          <a:chOff x="0" y="0"/>
+          <a:chExt cx="0" cy="0"/>
+        </a:xfrm>
+      </p:grpSpPr>
+      <p:sp>
+        <p:nvSpPr>
+          <p:cNvPr id="106" name="Google Shape;106;p3:notes">
+            <a:extLst>
+              <a:ext uri="{FF2B5EF4-FFF2-40B4-BE49-F238E27FC236}">
+                <a16:creationId xmlns:a16="http://schemas.microsoft.com/office/drawing/2014/main" id="{2AA0AA85-9557-D61C-B1B3-28FA88F81ECB}"/>
+              </a:ext>
+            </a:extLst>
+          </p:cNvPr>
+          <p:cNvSpPr txBox="1">
+            <a:spLocks noGrp="1"/>
+          </p:cNvSpPr>
+          <p:nvPr>
+            <p:ph type="body" idx="1"/>
+          </p:nvPr>
+        </p:nvSpPr>
+        <p:spPr>
+          <a:xfrm>
+            <a:off x="685800" y="4343400"/>
+            <a:ext cx="5486400" cy="4114800"/>
+          </a:xfrm>
+          <a:prstGeom prst="rect">
+            <a:avLst/>
+          </a:prstGeom>
+        </p:spPr>
+        <p:txBody>
+          <a:bodyPr spcFirstLastPara="1" wrap="square" lIns="91425" tIns="91425" rIns="91425" bIns="91425" anchor="t" anchorCtr="0">
+            <a:noAutofit/>
+          </a:bodyPr>
+          <a:lstStyle/>
+          <a:p>
+            <a:pPr marL="0" lvl="0" indent="0" algn="l" rtl="0">
+              <a:spcBef>
+                <a:spcPts val="0"/>
+              </a:spcBef>
+              <a:spcAft>
+                <a:spcPts val="0"/>
+              </a:spcAft>
+              <a:buNone/>
+            </a:pPr>
+            <a:endParaRPr dirty="0"/>
+          </a:p>
+        </p:txBody>
+      </p:sp>
+      <p:sp>
+        <p:nvSpPr>
+          <p:cNvPr id="107" name="Google Shape;107;p3:notes">
+            <a:extLst>
+              <a:ext uri="{FF2B5EF4-FFF2-40B4-BE49-F238E27FC236}">
+                <a16:creationId xmlns:a16="http://schemas.microsoft.com/office/drawing/2014/main" id="{0E1129C9-F9FF-DEF6-7CDE-AD1526986B42}"/>
+              </a:ext>
+            </a:extLst>
+          </p:cNvPr>
+          <p:cNvSpPr>
+            <a:spLocks noGrp="1" noRot="1" noChangeAspect="1"/>
+          </p:cNvSpPr>
+          <p:nvPr>
+            <p:ph type="sldImg" idx="2"/>
+          </p:nvPr>
+        </p:nvSpPr>
+        <p:spPr>
+          <a:xfrm>
+            <a:off x="381000" y="685800"/>
+            <a:ext cx="6096000" cy="3429000"/>
+          </a:xfrm>
+          <a:custGeom>
+            <a:avLst/>
+            <a:gdLst/>
+            <a:ahLst/>
+            <a:cxnLst/>
+            <a:rect l="l" t="t" r="r" b="b"/>
+            <a:pathLst>
+              <a:path w="120000" h="120000" extrusionOk="0">
+                <a:moveTo>
+                  <a:pt x="0" y="0"/>
+                </a:moveTo>
+                <a:lnTo>
+                  <a:pt x="120000" y="0"/>
+                </a:lnTo>
+                <a:lnTo>
+                  <a:pt x="120000" y="120000"/>
+                </a:lnTo>
+                <a:lnTo>
+                  <a:pt x="0" y="120000"/>
+                </a:lnTo>
+                <a:close/>
+              </a:path>
+            </a:pathLst>
+          </a:custGeom>
+        </p:spPr>
+      </p:sp>
+    </p:spTree>
+    <p:extLst>
+      <p:ext uri="{BB962C8B-B14F-4D97-AF65-F5344CB8AC3E}">
+        <p14:creationId xmlns:p14="http://schemas.microsoft.com/office/powerpoint/2010/main" val="3840059795"/>
       </p:ext>
     </p:extLst>
   </p:cSld>
@@ -3422,133 +3036,6 @@
 </p:notes>
 </file>
 
-<file path=ppt/notesSlides/notesSlide20.xml><?xml version="1.0" encoding="utf-8"?>
-<p:notes xmlns:a="http://schemas.openxmlformats.org/drawingml/2006/main" xmlns:r="http://schemas.openxmlformats.org/officeDocument/2006/relationships" xmlns:p="http://schemas.openxmlformats.org/presentationml/2006/main" showMasterSp="0" showMasterPhAnim="0">
-  <p:cSld>
-    <p:spTree>
-      <p:nvGrpSpPr>
-        <p:cNvPr id="1" name="Shape 105">
-          <a:extLst>
-            <a:ext uri="{FF2B5EF4-FFF2-40B4-BE49-F238E27FC236}">
-              <a16:creationId xmlns:a16="http://schemas.microsoft.com/office/drawing/2014/main" id="{2274DD90-9961-D207-A4E2-6FC07233BB0F}"/>
-            </a:ext>
-          </a:extLst>
-        </p:cNvPr>
-        <p:cNvGrpSpPr/>
-        <p:nvPr/>
-      </p:nvGrpSpPr>
-      <p:grpSpPr>
-        <a:xfrm>
-          <a:off x="0" y="0"/>
-          <a:ext cx="0" cy="0"/>
-          <a:chOff x="0" y="0"/>
-          <a:chExt cx="0" cy="0"/>
-        </a:xfrm>
-      </p:grpSpPr>
-      <p:sp>
-        <p:nvSpPr>
-          <p:cNvPr id="106" name="Google Shape;106;p3:notes">
-            <a:extLst>
-              <a:ext uri="{FF2B5EF4-FFF2-40B4-BE49-F238E27FC236}">
-                <a16:creationId xmlns:a16="http://schemas.microsoft.com/office/drawing/2014/main" id="{2AA0AA85-9557-D61C-B1B3-28FA88F81ECB}"/>
-              </a:ext>
-            </a:extLst>
-          </p:cNvPr>
-          <p:cNvSpPr txBox="1">
-            <a:spLocks noGrp="1"/>
-          </p:cNvSpPr>
-          <p:nvPr>
-            <p:ph type="body" idx="1"/>
-          </p:nvPr>
-        </p:nvSpPr>
-        <p:spPr>
-          <a:xfrm>
-            <a:off x="685800" y="4343400"/>
-            <a:ext cx="5486400" cy="4114800"/>
-          </a:xfrm>
-          <a:prstGeom prst="rect">
-            <a:avLst/>
-          </a:prstGeom>
-        </p:spPr>
-        <p:txBody>
-          <a:bodyPr spcFirstLastPara="1" wrap="square" lIns="91425" tIns="91425" rIns="91425" bIns="91425" anchor="t" anchorCtr="0">
-            <a:noAutofit/>
-          </a:bodyPr>
-          <a:lstStyle/>
-          <a:p>
-            <a:pPr marL="0" lvl="0" indent="0" algn="l" rtl="0">
-              <a:spcBef>
-                <a:spcPts val="0"/>
-              </a:spcBef>
-              <a:spcAft>
-                <a:spcPts val="0"/>
-              </a:spcAft>
-              <a:buNone/>
-            </a:pPr>
-            <a:endParaRPr dirty="0"/>
-          </a:p>
-        </p:txBody>
-      </p:sp>
-      <p:sp>
-        <p:nvSpPr>
-          <p:cNvPr id="107" name="Google Shape;107;p3:notes">
-            <a:extLst>
-              <a:ext uri="{FF2B5EF4-FFF2-40B4-BE49-F238E27FC236}">
-                <a16:creationId xmlns:a16="http://schemas.microsoft.com/office/drawing/2014/main" id="{0E1129C9-F9FF-DEF6-7CDE-AD1526986B42}"/>
-              </a:ext>
-            </a:extLst>
-          </p:cNvPr>
-          <p:cNvSpPr>
-            <a:spLocks noGrp="1" noRot="1" noChangeAspect="1"/>
-          </p:cNvSpPr>
-          <p:nvPr>
-            <p:ph type="sldImg" idx="2"/>
-          </p:nvPr>
-        </p:nvSpPr>
-        <p:spPr>
-          <a:xfrm>
-            <a:off x="381000" y="685800"/>
-            <a:ext cx="6096000" cy="3429000"/>
-          </a:xfrm>
-          <a:custGeom>
-            <a:avLst/>
-            <a:gdLst/>
-            <a:ahLst/>
-            <a:cxnLst/>
-            <a:rect l="l" t="t" r="r" b="b"/>
-            <a:pathLst>
-              <a:path w="120000" h="120000" extrusionOk="0">
-                <a:moveTo>
-                  <a:pt x="0" y="0"/>
-                </a:moveTo>
-                <a:lnTo>
-                  <a:pt x="120000" y="0"/>
-                </a:lnTo>
-                <a:lnTo>
-                  <a:pt x="120000" y="120000"/>
-                </a:lnTo>
-                <a:lnTo>
-                  <a:pt x="0" y="120000"/>
-                </a:lnTo>
-                <a:close/>
-              </a:path>
-            </a:pathLst>
-          </a:custGeom>
-        </p:spPr>
-      </p:sp>
-    </p:spTree>
-    <p:extLst>
-      <p:ext uri="{BB962C8B-B14F-4D97-AF65-F5344CB8AC3E}">
-        <p14:creationId xmlns:p14="http://schemas.microsoft.com/office/powerpoint/2010/main" val="3840059795"/>
-      </p:ext>
-    </p:extLst>
-  </p:cSld>
-  <p:clrMapOvr>
-    <a:masterClrMapping/>
-  </p:clrMapOvr>
-</p:notes>
-</file>
-
 <file path=ppt/notesSlides/notesSlide3.xml><?xml version="1.0" encoding="utf-8"?>
 <p:notes xmlns:a="http://schemas.openxmlformats.org/drawingml/2006/main" xmlns:r="http://schemas.openxmlformats.org/officeDocument/2006/relationships" xmlns:p="http://schemas.openxmlformats.org/presentationml/2006/main">
   <p:cSld>
@@ -3681,48 +3168,304 @@
           <a:lstStyle/>
           <a:p>
             <a:r>
+              <a:rPr lang="en-US" dirty="0"/>
+              <a:t>I used SHAP to understand what the model is actually learning. What I found is that the model is dominated by past population trends and structural variables, while disaster effects are inconsistent. This explains why short-term prediction is difficult, but structural patterns still emerge.</a:t>
+            </a:r>
+          </a:p>
+          <a:p>
+            <a:endParaRPr lang="en-US" dirty="0"/>
+          </a:p>
+          <a:p>
+            <a:r>
+              <a:rPr lang="en-US" dirty="0"/>
+              <a:t>SHAP shows consistent drivers </a:t>
+            </a:r>
+          </a:p>
+          <a:p>
+            <a:r>
+              <a:rPr lang="en-US" dirty="0"/>
+              <a:t>3-year target improves signal </a:t>
+            </a:r>
+          </a:p>
+          <a:p>
+            <a:r>
+              <a:rPr lang="en-US" dirty="0"/>
+              <a:t>spatial patterns are clear</a:t>
+            </a:r>
+          </a:p>
+          <a:p>
+            <a:endParaRPr lang="en-US" dirty="0"/>
+          </a:p>
+          <a:p>
+            <a:endParaRPr lang="en-US" dirty="0"/>
+          </a:p>
+          <a:p>
+            <a:endParaRPr lang="en-US" dirty="0"/>
+          </a:p>
+          <a:p>
+            <a:r>
+              <a:rPr lang="en-US" dirty="0"/>
+              <a:t>These two plots work together to explain both </a:t>
+            </a:r>
+            <a:r>
               <a:rPr lang="en-US" b="1" dirty="0"/>
-              <a:t>R² = How well does my model explain the data?</a:t>
-            </a:r>
-          </a:p>
-          <a:p>
-            <a:r>
-              <a:rPr lang="en-US" dirty="0"/>
-              <a:t>More specifically:</a:t>
-            </a:r>
-          </a:p>
-          <a:p>
+              <a:t>what drives population change</a:t>
+            </a:r>
+            <a:r>
+              <a:rPr lang="en-US" dirty="0"/>
+              <a:t> and </a:t>
+            </a:r>
             <a:r>
               <a:rPr lang="en-US" b="1" dirty="0"/>
-              <a:t>R² measures how much of the variation in the outcome (population change) the model can explain</a:t>
+              <a:t>when those drivers matter</a:t>
+            </a:r>
+            <a:r>
+              <a:rPr lang="en-US" dirty="0"/>
+              <a:t>.</a:t>
+            </a:r>
+          </a:p>
+          <a:p>
+            <a:r>
+              <a:rPr lang="en-US" dirty="0"/>
+              <a:t>On the right, the SHAP plot identifies the most important variables overall. We see that seismic activity, regional differences, and lagged population change are key drivers, which tells us that population dynamics are strongly influenced by structural conditions and persistence over time.</a:t>
+            </a:r>
+          </a:p>
+          <a:p>
+            <a:r>
+              <a:rPr lang="en-US" dirty="0"/>
+              <a:t>However, SHAP alone doesn’t tell us </a:t>
+            </a:r>
+            <a:r>
+              <a:rPr lang="en-US" i="1" dirty="0"/>
+              <a:t>when</a:t>
+            </a:r>
+            <a:r>
+              <a:rPr lang="en-US" dirty="0"/>
+              <a:t> these effects occur. That’s where the lead–lag analysis on the left comes in.</a:t>
+            </a:r>
+          </a:p>
+          <a:p>
+            <a:r>
+              <a:rPr lang="en-US" dirty="0"/>
+              <a:t>This plot shows that hurricane exposure is actually the most influential variable — but only at a one-year lag. In other words, the impact of hurricanes on population change is delayed, likely reflecting migration and recovery processes rather than immediate responses.</a:t>
+            </a:r>
+          </a:p>
+          <a:p>
+            <a:r>
+              <a:rPr lang="en-US" dirty="0"/>
+              <a:t>Seismic activity, by contrast, shows both immediate and short-term effects, while structural variables like vulnerability and income remain consistently important across time.</a:t>
+            </a:r>
+          </a:p>
+          <a:p>
+            <a:r>
+              <a:rPr lang="en-US" dirty="0"/>
+              <a:t>So together, these plots show that population change in Puerto Rico is not just driven by structural factors, but also by </a:t>
+            </a:r>
+            <a:r>
+              <a:rPr lang="en-US" b="1" dirty="0"/>
+              <a:t>delayed responses to shocks</a:t>
+            </a:r>
+            <a:r>
+              <a:rPr lang="en-US" dirty="0"/>
+              <a:t>, highlighting that timing plays a critical role in understanding demographic change.</a:t>
+            </a:r>
+          </a:p>
+          <a:p>
+            <a:endParaRPr lang="en-US" dirty="0"/>
+          </a:p>
+          <a:p>
+            <a:endParaRPr lang="en-US" dirty="0"/>
+          </a:p>
+          <a:p>
+            <a:endParaRPr lang="en-US" dirty="0"/>
+          </a:p>
+          <a:p>
+            <a:endParaRPr lang="en-US" dirty="0"/>
+          </a:p>
+          <a:p>
+            <a:endParaRPr lang="en-US" dirty="0"/>
+          </a:p>
+          <a:p>
+            <a:r>
+              <a:rPr lang="en-US" dirty="0"/>
+              <a:t>Those features were chosen because they capture </a:t>
+            </a:r>
+            <a:r>
+              <a:rPr lang="en-US" b="1" dirty="0"/>
+              <a:t>four fundamental mechanisms of population change</a:t>
+            </a:r>
+            <a:r>
+              <a:rPr lang="en-US" dirty="0"/>
+              <a:t>:</a:t>
+            </a:r>
+          </a:p>
+          <a:p>
+            <a:r>
+              <a:rPr lang="en-US" b="1" dirty="0"/>
+              <a:t>Persistence (momentum)</a:t>
+            </a:r>
+            <a:r>
+              <a:rPr lang="en-US" dirty="0"/>
+              <a:t> </a:t>
+            </a:r>
+          </a:p>
+          <a:p>
+            <a:r>
+              <a:rPr lang="en-US" b="1" dirty="0"/>
+              <a:t>Vulnerability (who is exposed)</a:t>
+            </a:r>
+            <a:r>
+              <a:rPr lang="en-US" dirty="0"/>
+              <a:t> </a:t>
+            </a:r>
+          </a:p>
+          <a:p>
+            <a:r>
+              <a:rPr lang="en-US" b="1" dirty="0"/>
+              <a:t>Shocks (what happens)</a:t>
+            </a:r>
+            <a:r>
+              <a:rPr lang="en-US" dirty="0"/>
+              <a:t> </a:t>
+            </a:r>
+          </a:p>
+          <a:p>
+            <a:r>
+              <a:rPr lang="en-US" b="1" dirty="0"/>
+              <a:t>Structure (where it happens)</a:t>
             </a:r>
           </a:p>
           <a:p>
             <a:endParaRPr lang="en-US" b="1" dirty="0"/>
           </a:p>
           <a:p>
+            <a:endParaRPr lang="en-US" b="1" dirty="0"/>
+          </a:p>
+          <a:p>
+            <a:r>
+              <a:rPr lang="en-US" dirty="0"/>
+              <a:t>The feature set is not random — it is </a:t>
+            </a:r>
+            <a:r>
+              <a:rPr lang="en-US" b="1" dirty="0"/>
+              <a:t>theory-driven + data-driven</a:t>
+            </a:r>
+            <a:r>
+              <a:rPr lang="en-US" dirty="0"/>
+              <a:t>.</a:t>
+            </a:r>
+          </a:p>
+          <a:p>
             <a:endParaRPr lang="en-US" dirty="0"/>
           </a:p>
           <a:p>
+            <a:endParaRPr lang="en-US" dirty="0"/>
+          </a:p>
+          <a:p>
+            <a:endParaRPr lang="en-US" dirty="0"/>
+          </a:p>
+          <a:p>
             <a:r>
               <a:rPr lang="en-US" b="1" dirty="0"/>
-              <a:t>The problem is very hard, p</a:t>
-            </a:r>
-            <a:r>
-              <a:rPr lang="en-US" dirty="0"/>
-              <a:t>opulation change is </a:t>
-            </a:r>
+              <a:t>Features:</a:t>
+            </a:r>
+          </a:p>
+          <a:p>
+            <a:pPr lvl="1"/>
+            <a:r>
+              <a:rPr lang="en-US" sz="1200" kern="1200" dirty="0">
+                <a:solidFill>
+                  <a:schemeClr val="tx1"/>
+                </a:solidFill>
+                <a:latin typeface="+mn-lt"/>
+                <a:ea typeface="+mn-ea"/>
+                <a:cs typeface="+mn-cs"/>
+              </a:rPr>
+              <a:t>lag_pop_change_1</a:t>
+            </a:r>
+            <a:r>
+              <a:rPr lang="en-US" dirty="0"/>
+              <a:t> </a:t>
+            </a:r>
+          </a:p>
+          <a:p>
+            <a:pPr lvl="1"/>
+            <a:r>
+              <a:rPr lang="en-US" sz="1200" kern="1200" dirty="0">
+                <a:solidFill>
+                  <a:schemeClr val="tx1"/>
+                </a:solidFill>
+                <a:latin typeface="+mn-lt"/>
+                <a:ea typeface="+mn-ea"/>
+                <a:cs typeface="+mn-cs"/>
+              </a:rPr>
+              <a:t>lag_pop_change_2</a:t>
+            </a:r>
+            <a:r>
+              <a:rPr lang="en-US" dirty="0"/>
+              <a:t> </a:t>
+            </a:r>
+          </a:p>
+          <a:p>
             <a:r>
               <a:rPr lang="en-US" b="1" dirty="0"/>
-              <a:t>noisy</a:t>
-            </a:r>
-            <a:r>
-              <a:rPr lang="en-US" dirty="0"/>
-              <a:t> and driven by </a:t>
-            </a:r>
+              <a:t>Why? </a:t>
+            </a:r>
+            <a:r>
+              <a:rPr lang="en-US" dirty="0"/>
+              <a:t>Population doesn’t change randomly, it follows trends.</a:t>
+            </a:r>
+          </a:p>
+          <a:p>
+            <a:r>
+              <a:rPr lang="en-US" dirty="0"/>
+              <a:t>decline → tends to continue declining </a:t>
+            </a:r>
+          </a:p>
+          <a:p>
+            <a:r>
+              <a:rPr lang="en-US" dirty="0"/>
+              <a:t>growth → tends to continue growing </a:t>
+            </a:r>
+          </a:p>
+          <a:p>
             <a:r>
               <a:rPr lang="en-US" b="1" dirty="0"/>
-              <a:t>unpredictable shocks</a:t>
+              <a:t>Interpretation: </a:t>
+            </a:r>
+            <a:r>
+              <a:rPr lang="en-US" dirty="0"/>
+              <a:t>These variables capture </a:t>
+            </a:r>
+            <a:r>
+              <a:rPr lang="en-US" b="1" dirty="0"/>
+              <a:t>momentum and path dependence</a:t>
+            </a:r>
+          </a:p>
+          <a:p>
+            <a:endParaRPr lang="en-US" b="1" dirty="0"/>
+          </a:p>
+          <a:p>
+            <a:endParaRPr lang="en-US" b="1" dirty="0"/>
+          </a:p>
+          <a:p>
+            <a:r>
+              <a:rPr lang="en-US" b="1" dirty="0"/>
+              <a:t>Feature:</a:t>
+            </a:r>
+          </a:p>
+          <a:p>
+            <a:pPr lvl="1"/>
+            <a:r>
+              <a:rPr lang="en-US" sz="1200" kern="1200" dirty="0">
+                <a:solidFill>
+                  <a:schemeClr val="tx1"/>
+                </a:solidFill>
+                <a:latin typeface="+mn-lt"/>
+                <a:ea typeface="+mn-ea"/>
+                <a:cs typeface="+mn-cs"/>
+              </a:rPr>
+              <a:t>svi_pca_1</a:t>
             </a:r>
             <a:r>
               <a:rPr lang="en-US" dirty="0"/>
@@ -3730,9 +3473,309 @@
             </a:r>
           </a:p>
           <a:p>
+            <a:r>
+              <a:rPr lang="en-US" b="1" dirty="0"/>
+              <a:t>Why? </a:t>
+            </a:r>
+            <a:r>
+              <a:rPr lang="en-US" dirty="0"/>
+              <a:t>Not all municipalities respond the same way to shocks.</a:t>
+            </a:r>
+          </a:p>
+          <a:p>
+            <a:r>
+              <a:rPr lang="en-US" dirty="0"/>
+              <a:t>SVI captures:</a:t>
+            </a:r>
+          </a:p>
+          <a:p>
             <a:pPr lvl="1"/>
             <a:r>
               <a:rPr lang="en-US" dirty="0"/>
+              <a:t>poverty </a:t>
+            </a:r>
+          </a:p>
+          <a:p>
+            <a:pPr lvl="1"/>
+            <a:r>
+              <a:rPr lang="en-US" dirty="0"/>
+              <a:t>age structure </a:t>
+            </a:r>
+          </a:p>
+          <a:p>
+            <a:pPr lvl="1"/>
+            <a:r>
+              <a:rPr lang="en-US" dirty="0"/>
+              <a:t>housing conditions </a:t>
+            </a:r>
+          </a:p>
+          <a:p>
+            <a:pPr lvl="1"/>
+            <a:r>
+              <a:rPr lang="en-US" dirty="0"/>
+              <a:t>social disadvantage </a:t>
+            </a:r>
+          </a:p>
+          <a:p>
+            <a:r>
+              <a:rPr lang="en-US" b="1" dirty="0"/>
+              <a:t>Interpretation: </a:t>
+            </a:r>
+            <a:r>
+              <a:rPr lang="en-US" dirty="0"/>
+              <a:t>This measures </a:t>
+            </a:r>
+            <a:r>
+              <a:rPr lang="en-US" b="1" dirty="0"/>
+              <a:t>baseline resilience vs vulnerability</a:t>
+            </a:r>
+            <a:endParaRPr lang="en-US" dirty="0"/>
+          </a:p>
+          <a:p>
+            <a:endParaRPr lang="en-US" dirty="0"/>
+          </a:p>
+          <a:p>
+            <a:r>
+              <a:rPr lang="en-US" b="1" dirty="0"/>
+              <a:t>Features:</a:t>
+            </a:r>
+          </a:p>
+          <a:p>
+            <a:pPr lvl="1"/>
+            <a:r>
+              <a:rPr lang="en-US" sz="1200" kern="1200" dirty="0">
+                <a:solidFill>
+                  <a:schemeClr val="tx1"/>
+                </a:solidFill>
+                <a:latin typeface="+mn-lt"/>
+                <a:ea typeface="+mn-ea"/>
+                <a:cs typeface="+mn-cs"/>
+              </a:rPr>
+              <a:t>wind_3yr_sum</a:t>
+            </a:r>
+            <a:r>
+              <a:rPr lang="en-US" dirty="0"/>
+              <a:t> (hurricanes) </a:t>
+            </a:r>
+          </a:p>
+          <a:p>
+            <a:pPr lvl="1"/>
+            <a:r>
+              <a:rPr lang="en-US" sz="1200" kern="1200" dirty="0">
+                <a:solidFill>
+                  <a:schemeClr val="tx1"/>
+                </a:solidFill>
+                <a:latin typeface="+mn-lt"/>
+                <a:ea typeface="+mn-ea"/>
+                <a:cs typeface="+mn-cs"/>
+              </a:rPr>
+              <a:t>seismic_3yr_sum</a:t>
+            </a:r>
+            <a:r>
+              <a:rPr lang="en-US" dirty="0"/>
+              <a:t> (earthquakes) </a:t>
+            </a:r>
+          </a:p>
+          <a:p>
+            <a:r>
+              <a:rPr lang="en-US" b="1" dirty="0"/>
+              <a:t>Why? </a:t>
+            </a:r>
+            <a:r>
+              <a:rPr lang="en-US" dirty="0"/>
+              <a:t>Puerto Rico’s population is heavily influenced by disasters.</a:t>
+            </a:r>
+          </a:p>
+          <a:p>
+            <a:r>
+              <a:rPr lang="en-US" dirty="0"/>
+              <a:t>But not just events — you used:</a:t>
+            </a:r>
+          </a:p>
+          <a:p>
+            <a:r>
+              <a:rPr lang="en-US" b="1" dirty="0"/>
+              <a:t>3-year rolling exposure</a:t>
+            </a:r>
+            <a:r>
+              <a:rPr lang="en-US" dirty="0"/>
+              <a:t> </a:t>
+            </a:r>
+          </a:p>
+          <a:p>
+            <a:r>
+              <a:rPr lang="en-US" dirty="0"/>
+              <a:t>This is VERY important because it captures </a:t>
+            </a:r>
+            <a:r>
+              <a:rPr lang="en-US" b="1" dirty="0"/>
+              <a:t>cumulative stress</a:t>
+            </a:r>
+            <a:r>
+              <a:rPr lang="en-US" dirty="0"/>
+              <a:t>, not just single events</a:t>
+            </a:r>
+          </a:p>
+          <a:p>
+            <a:endParaRPr lang="en-US" dirty="0"/>
+          </a:p>
+          <a:p>
+            <a:endParaRPr lang="en-US" dirty="0"/>
+          </a:p>
+          <a:p>
+            <a:r>
+              <a:rPr lang="en-US" b="1" dirty="0"/>
+              <a:t>Features:</a:t>
+            </a:r>
+          </a:p>
+          <a:p>
+            <a:pPr lvl="1"/>
+            <a:r>
+              <a:rPr lang="en-US" sz="1200" kern="1200" dirty="0">
+                <a:solidFill>
+                  <a:schemeClr val="tx1"/>
+                </a:solidFill>
+                <a:latin typeface="+mn-lt"/>
+                <a:ea typeface="+mn-ea"/>
+                <a:cs typeface="+mn-cs"/>
+              </a:rPr>
+              <a:t>wind_3yr_x_svi</a:t>
+            </a:r>
+            <a:r>
+              <a:rPr lang="en-US" dirty="0"/>
+              <a:t> </a:t>
+            </a:r>
+          </a:p>
+          <a:p>
+            <a:pPr lvl="1"/>
+            <a:r>
+              <a:rPr lang="en-US" sz="1200" kern="1200" dirty="0">
+                <a:solidFill>
+                  <a:schemeClr val="tx1"/>
+                </a:solidFill>
+                <a:latin typeface="+mn-lt"/>
+                <a:ea typeface="+mn-ea"/>
+                <a:cs typeface="+mn-cs"/>
+              </a:rPr>
+              <a:t>seismic_3yr_x_svi</a:t>
+            </a:r>
+            <a:r>
+              <a:rPr lang="en-US" dirty="0"/>
+              <a:t> </a:t>
+            </a:r>
+          </a:p>
+          <a:p>
+            <a:r>
+              <a:rPr lang="en-US" b="1" dirty="0"/>
+              <a:t>Why? </a:t>
+            </a:r>
+            <a:r>
+              <a:rPr lang="en-US" dirty="0"/>
+              <a:t>Disasters don’t affect everyone equally.</a:t>
+            </a:r>
+          </a:p>
+          <a:p>
+            <a:r>
+              <a:rPr lang="en-US" dirty="0"/>
+              <a:t>Example:</a:t>
+            </a:r>
+          </a:p>
+          <a:p>
+            <a:pPr lvl="1"/>
+            <a:r>
+              <a:rPr lang="en-US" dirty="0"/>
+              <a:t>high-SVI area + hurricane → bigger impact </a:t>
+            </a:r>
+          </a:p>
+          <a:p>
+            <a:pPr lvl="1"/>
+            <a:r>
+              <a:rPr lang="en-US" dirty="0"/>
+              <a:t>low-SVI area + hurricane → smaller impact </a:t>
+            </a:r>
+          </a:p>
+          <a:p>
+            <a:r>
+              <a:rPr lang="en-US" b="1" dirty="0"/>
+              <a:t>Interpretation: </a:t>
+            </a:r>
+            <a:r>
+              <a:rPr lang="en-US" dirty="0"/>
+              <a:t>These features capture </a:t>
+            </a:r>
+            <a:r>
+              <a:rPr lang="en-US" b="1" dirty="0"/>
+              <a:t>heterogeneous effects</a:t>
+            </a:r>
+            <a:endParaRPr lang="en-US" dirty="0"/>
+          </a:p>
+          <a:p>
+            <a:endParaRPr lang="en-US" dirty="0"/>
+          </a:p>
+          <a:p>
+            <a:endParaRPr lang="en-US" dirty="0"/>
+          </a:p>
+          <a:p>
+            <a:r>
+              <a:rPr lang="en-US" b="1" dirty="0"/>
+              <a:t>Features: </a:t>
+            </a:r>
+            <a:r>
+              <a:rPr lang="en-US" dirty="0"/>
+              <a:t>Economic Structure</a:t>
+            </a:r>
+            <a:endParaRPr lang="en-US" b="1" dirty="0"/>
+          </a:p>
+          <a:p>
+            <a:pPr lvl="1"/>
+            <a:r>
+              <a:rPr lang="en-US" sz="1200" kern="1200" dirty="0" err="1">
+                <a:solidFill>
+                  <a:schemeClr val="tx1"/>
+                </a:solidFill>
+                <a:latin typeface="+mn-lt"/>
+                <a:ea typeface="+mn-ea"/>
+                <a:cs typeface="+mn-cs"/>
+              </a:rPr>
+              <a:t>income_growth</a:t>
+            </a:r>
+            <a:r>
+              <a:rPr lang="en-US" dirty="0"/>
+              <a:t> </a:t>
+            </a:r>
+          </a:p>
+          <a:p>
+            <a:pPr lvl="1"/>
+            <a:r>
+              <a:rPr lang="en-US" sz="1200" kern="1200" dirty="0" err="1">
+                <a:solidFill>
+                  <a:schemeClr val="tx1"/>
+                </a:solidFill>
+                <a:latin typeface="+mn-lt"/>
+                <a:ea typeface="+mn-ea"/>
+                <a:cs typeface="+mn-cs"/>
+              </a:rPr>
+              <a:t>establishment_growth</a:t>
+            </a:r>
+            <a:r>
+              <a:rPr lang="en-US" dirty="0"/>
+              <a:t> </a:t>
+            </a:r>
+          </a:p>
+          <a:p>
+            <a:r>
+              <a:rPr lang="en-US" b="1" dirty="0"/>
+              <a:t>Why? </a:t>
+            </a:r>
+            <a:r>
+              <a:rPr lang="en-US" dirty="0"/>
+              <a:t>Economic conditions influence:</a:t>
+            </a:r>
+          </a:p>
+          <a:p>
+            <a:pPr lvl="1"/>
+            <a:r>
+              <a:rPr lang="en-US" dirty="0"/>
               <a:t>migration </a:t>
             </a:r>
           </a:p>
@@ -3740,24 +3783,298 @@
             <a:pPr lvl="1"/>
             <a:r>
               <a:rPr lang="en-US" dirty="0"/>
-              <a:t>disasters </a:t>
+              <a:t>opportunity </a:t>
+            </a:r>
+          </a:p>
+          <a:p>
+            <a:r>
+              <a:rPr lang="en-US" dirty="0"/>
+              <a:t>	resilience </a:t>
+            </a:r>
+          </a:p>
+          <a:p>
+            <a:r>
+              <a:rPr lang="en-US" b="1" dirty="0"/>
+              <a:t>Interpretation: </a:t>
+            </a:r>
+            <a:r>
+              <a:rPr lang="en-US" dirty="0"/>
+              <a:t>These are </a:t>
+            </a:r>
+            <a:r>
+              <a:rPr lang="en-US" b="1" dirty="0"/>
+              <a:t>slow-moving structural drivers</a:t>
+            </a:r>
+          </a:p>
+          <a:p>
+            <a:endParaRPr lang="en-US" b="1" dirty="0"/>
+          </a:p>
+          <a:p>
+            <a:r>
+              <a:rPr lang="en-US" b="1" dirty="0"/>
+              <a:t>Feature: </a:t>
+            </a:r>
+            <a:r>
+              <a:rPr lang="en-US" dirty="0"/>
+              <a:t>Social Conditions</a:t>
+            </a:r>
+            <a:endParaRPr lang="en-US" b="1" dirty="0"/>
+          </a:p>
+          <a:p>
+            <a:r>
+              <a:rPr lang="en-US" sz="1200" kern="1200" dirty="0" err="1">
+                <a:solidFill>
+                  <a:schemeClr val="tx1"/>
+                </a:solidFill>
+                <a:latin typeface="+mn-lt"/>
+                <a:ea typeface="+mn-ea"/>
+                <a:cs typeface="+mn-cs"/>
+              </a:rPr>
+              <a:t>lag_total_crime_rate</a:t>
+            </a:r>
+            <a:r>
+              <a:rPr lang="en-US" dirty="0"/>
+              <a:t> </a:t>
+            </a:r>
+          </a:p>
+          <a:p>
+            <a:r>
+              <a:rPr lang="en-US" b="1" dirty="0"/>
+              <a:t>Why? </a:t>
+            </a:r>
+            <a:r>
+              <a:rPr lang="en-US" dirty="0"/>
+              <a:t>Crime affects:</a:t>
             </a:r>
           </a:p>
           <a:p>
             <a:pPr lvl="1"/>
             <a:r>
               <a:rPr lang="en-US" dirty="0"/>
+              <a:t>out-migration </a:t>
+            </a:r>
+          </a:p>
+          <a:p>
+            <a:pPr lvl="1"/>
+            <a:r>
+              <a:rPr lang="en-US" dirty="0"/>
+              <a:t>quality of life </a:t>
+            </a:r>
+          </a:p>
+          <a:p>
+            <a:r>
+              <a:rPr lang="en-US" dirty="0"/>
+              <a:t>And you used </a:t>
+            </a:r>
+            <a:r>
+              <a:rPr lang="en-US" b="1" dirty="0"/>
+              <a:t>lagged crime</a:t>
+            </a:r>
+            <a:r>
+              <a:rPr lang="en-US" dirty="0"/>
+              <a:t> → correct direction of causality</a:t>
+            </a:r>
+          </a:p>
+          <a:p>
+            <a:endParaRPr lang="en-US" dirty="0"/>
+          </a:p>
+          <a:p>
+            <a:endParaRPr lang="en-US" dirty="0"/>
+          </a:p>
+          <a:p>
+            <a:r>
+              <a:rPr lang="en-US" b="1" dirty="0"/>
+              <a:t>Features: </a:t>
+            </a:r>
+            <a:r>
+              <a:rPr lang="en-US" dirty="0"/>
+              <a:t>Spatial Structure</a:t>
+            </a:r>
+            <a:endParaRPr lang="en-US" b="1" dirty="0"/>
+          </a:p>
+          <a:p>
+            <a:pPr lvl="1"/>
+            <a:r>
+              <a:rPr lang="en-US" sz="1200" kern="1200" dirty="0">
+                <a:solidFill>
+                  <a:schemeClr val="tx1"/>
+                </a:solidFill>
+                <a:latin typeface="+mn-lt"/>
+                <a:ea typeface="+mn-ea"/>
+                <a:cs typeface="+mn-cs"/>
+              </a:rPr>
+              <a:t>region</a:t>
+            </a:r>
+            <a:r>
+              <a:rPr lang="en-US" dirty="0"/>
+              <a:t> </a:t>
+            </a:r>
+          </a:p>
+          <a:p>
+            <a:pPr lvl="1"/>
+            <a:r>
+              <a:rPr lang="en-US" sz="1200" kern="1200" dirty="0">
+                <a:solidFill>
+                  <a:schemeClr val="tx1"/>
+                </a:solidFill>
+                <a:latin typeface="+mn-lt"/>
+                <a:ea typeface="+mn-ea"/>
+                <a:cs typeface="+mn-cs"/>
+              </a:rPr>
+              <a:t>municipio</a:t>
+            </a:r>
+            <a:r>
+              <a:rPr lang="en-US" dirty="0"/>
+              <a:t> </a:t>
+            </a:r>
+          </a:p>
+          <a:p>
+            <a:r>
+              <a:rPr lang="en-US" b="1" dirty="0"/>
+              <a:t>Why? </a:t>
+            </a:r>
+            <a:r>
+              <a:rPr lang="en-US" dirty="0"/>
+              <a:t>Geography matters:</a:t>
+            </a:r>
+          </a:p>
+          <a:p>
+            <a:r>
+              <a:rPr lang="en-US" dirty="0"/>
+              <a:t>South ≠ Metro ≠ West </a:t>
+            </a:r>
+          </a:p>
+          <a:p>
+            <a:r>
+              <a:rPr lang="en-US" dirty="0"/>
+              <a:t>each has different: </a:t>
+            </a:r>
+          </a:p>
+          <a:p>
+            <a:pPr lvl="1"/>
+            <a:r>
+              <a:rPr lang="en-US" dirty="0"/>
+              <a:t>economy </a:t>
+            </a:r>
+          </a:p>
+          <a:p>
+            <a:pPr lvl="1"/>
+            <a:r>
+              <a:rPr lang="en-US" dirty="0"/>
+              <a:t>exposure </a:t>
+            </a:r>
+          </a:p>
+          <a:p>
+            <a:pPr lvl="1"/>
+            <a:r>
+              <a:rPr lang="en-US" dirty="0"/>
+              <a:t>demographics </a:t>
+            </a:r>
+          </a:p>
+          <a:p>
+            <a:r>
+              <a:rPr lang="en-US" b="1" dirty="0"/>
+              <a:t>Interpretation: </a:t>
+            </a:r>
+            <a:r>
+              <a:rPr lang="en-US" dirty="0"/>
+              <a:t>These capture </a:t>
+            </a:r>
+            <a:r>
+              <a:rPr lang="en-US" b="1" dirty="0"/>
+              <a:t>unobserved spatial differences</a:t>
+            </a:r>
+          </a:p>
+          <a:p>
+            <a:endParaRPr lang="en-US" b="1" dirty="0"/>
+          </a:p>
+          <a:p>
+            <a:r>
+              <a:rPr lang="en-US" b="1" dirty="0"/>
+              <a:t>Feature: </a:t>
+            </a:r>
+            <a:r>
+              <a:rPr lang="en-US" dirty="0"/>
+              <a:t>Time Trend</a:t>
+            </a:r>
+            <a:endParaRPr lang="en-US" b="1" dirty="0"/>
+          </a:p>
+          <a:p>
+            <a:r>
+              <a:rPr lang="en-US" sz="1200" kern="1200" dirty="0">
+                <a:solidFill>
+                  <a:schemeClr val="tx1"/>
+                </a:solidFill>
+                <a:latin typeface="+mn-lt"/>
+                <a:ea typeface="+mn-ea"/>
+                <a:cs typeface="+mn-cs"/>
+              </a:rPr>
+              <a:t>year</a:t>
+            </a:r>
+            <a:r>
+              <a:rPr lang="en-US" dirty="0"/>
+              <a:t> </a:t>
+            </a:r>
+          </a:p>
+          <a:p>
+            <a:r>
+              <a:rPr lang="en-US" b="1" dirty="0"/>
+              <a:t>Why? </a:t>
+            </a:r>
+            <a:r>
+              <a:rPr lang="en-US" dirty="0"/>
+              <a:t>Captures:</a:t>
+            </a:r>
+          </a:p>
+          <a:p>
+            <a:pPr lvl="1"/>
+            <a:r>
+              <a:rPr lang="en-US" dirty="0"/>
+              <a:t>macro trends </a:t>
+            </a:r>
+          </a:p>
+          <a:p>
+            <a:pPr lvl="1"/>
+            <a:r>
+              <a:rPr lang="en-US" dirty="0"/>
               <a:t>policy changes </a:t>
             </a:r>
           </a:p>
           <a:p>
-            <a:br>
-              <a:rPr lang="en-US" dirty="0"/>
-            </a:br>
-            <a:r>
-              <a:rPr lang="en-US" dirty="0"/>
-              <a:t>Prediction is possible with the right model</a:t>
-            </a:r>
+            <a:r>
+              <a:rPr lang="en-US" dirty="0"/>
+              <a:t>          overall island trajectory</a:t>
+            </a:r>
+          </a:p>
+          <a:p>
+            <a:endParaRPr lang="en-US" dirty="0"/>
+          </a:p>
+          <a:p>
+            <a:endParaRPr lang="en-US" dirty="0"/>
+          </a:p>
+          <a:p>
+            <a:r>
+              <a:rPr lang="en-US" dirty="0"/>
+              <a:t>The feature set was designed to capture the key mechanisms driving population change: temporal persistence, vulnerability, external shocks, and structural differences.</a:t>
+            </a:r>
+          </a:p>
+          <a:p>
+            <a:r>
+              <a:rPr lang="en-US" dirty="0"/>
+              <a:t>Lagged population variables capture momentum, SVI captures baseline vulnerability, disaster exposure variables represent external shocks, and interaction terms allow these shocks to vary by vulnerability.</a:t>
+            </a:r>
+          </a:p>
+          <a:p>
+            <a:r>
+              <a:rPr lang="en-US" dirty="0"/>
+              <a:t>Economic and social variables capture longer-term structural conditions, while regional indicators account for spatial heterogeneity. Together, this creates a balanced and interpretable model.</a:t>
+            </a:r>
+          </a:p>
+          <a:p>
+            <a:endParaRPr lang="en-US" dirty="0"/>
+          </a:p>
+          <a:p>
+            <a:endParaRPr lang="en-US" dirty="0"/>
           </a:p>
           <a:p>
             <a:endParaRPr lang="en-US" dirty="0"/>
@@ -3796,7 +4113,7 @@
     </p:spTree>
     <p:extLst>
       <p:ext uri="{BB962C8B-B14F-4D97-AF65-F5344CB8AC3E}">
-        <p14:creationId xmlns:p14="http://schemas.microsoft.com/office/powerpoint/2010/main" val="3589803887"/>
+        <p14:creationId xmlns:p14="http://schemas.microsoft.com/office/powerpoint/2010/main" val="3120430603"/>
       </p:ext>
     </p:extLst>
   </p:cSld>
@@ -3807,1006 +4124,6 @@
 </file>
 
 <file path=ppt/notesSlides/notesSlide5.xml><?xml version="1.0" encoding="utf-8"?>
-<p:notes xmlns:a="http://schemas.openxmlformats.org/drawingml/2006/main" xmlns:r="http://schemas.openxmlformats.org/officeDocument/2006/relationships" xmlns:p="http://schemas.openxmlformats.org/presentationml/2006/main">
-  <p:cSld>
-    <p:spTree>
-      <p:nvGrpSpPr>
-        <p:cNvPr id="1" name=""/>
-        <p:cNvGrpSpPr/>
-        <p:nvPr/>
-      </p:nvGrpSpPr>
-      <p:grpSpPr>
-        <a:xfrm>
-          <a:off x="0" y="0"/>
-          <a:ext cx="0" cy="0"/>
-          <a:chOff x="0" y="0"/>
-          <a:chExt cx="0" cy="0"/>
-        </a:xfrm>
-      </p:grpSpPr>
-      <p:sp>
-        <p:nvSpPr>
-          <p:cNvPr id="2" name="Slide Image Placeholder 1"/>
-          <p:cNvSpPr>
-            <a:spLocks noGrp="1" noRot="1" noChangeAspect="1"/>
-          </p:cNvSpPr>
-          <p:nvPr>
-            <p:ph type="sldImg"/>
-          </p:nvPr>
-        </p:nvSpPr>
-        <p:spPr/>
-      </p:sp>
-      <p:sp>
-        <p:nvSpPr>
-          <p:cNvPr id="3" name="Notes Placeholder 2"/>
-          <p:cNvSpPr>
-            <a:spLocks noGrp="1"/>
-          </p:cNvSpPr>
-          <p:nvPr>
-            <p:ph type="body" idx="1"/>
-          </p:nvPr>
-        </p:nvSpPr>
-        <p:spPr/>
-        <p:txBody>
-          <a:bodyPr/>
-          <a:lstStyle/>
-          <a:p>
-            <a:r>
-              <a:rPr lang="en-US" dirty="0"/>
-              <a:t>I used SHAP to understand what the model is actually learning. What I found is that the model is dominated by past population trends and structural variables, while disaster effects are inconsistent. This explains why short-term prediction is difficult, but structural patterns still emerge.</a:t>
-            </a:r>
-          </a:p>
-          <a:p>
-            <a:endParaRPr lang="en-US" dirty="0"/>
-          </a:p>
-          <a:p>
-            <a:r>
-              <a:rPr lang="en-US" dirty="0"/>
-              <a:t>SHAP shows consistent drivers </a:t>
-            </a:r>
-          </a:p>
-          <a:p>
-            <a:r>
-              <a:rPr lang="en-US" dirty="0"/>
-              <a:t>3-year target improves signal </a:t>
-            </a:r>
-          </a:p>
-          <a:p>
-            <a:r>
-              <a:rPr lang="en-US" dirty="0"/>
-              <a:t>spatial patterns are clear</a:t>
-            </a:r>
-          </a:p>
-          <a:p>
-            <a:endParaRPr lang="en-US" dirty="0"/>
-          </a:p>
-          <a:p>
-            <a:endParaRPr lang="en-US" dirty="0"/>
-          </a:p>
-          <a:p>
-            <a:endParaRPr lang="en-US" dirty="0"/>
-          </a:p>
-          <a:p>
-            <a:r>
-              <a:rPr lang="en-US" dirty="0"/>
-              <a:t>These two plots work together to explain both </a:t>
-            </a:r>
-            <a:r>
-              <a:rPr lang="en-US" b="1" dirty="0"/>
-              <a:t>what drives population change</a:t>
-            </a:r>
-            <a:r>
-              <a:rPr lang="en-US" dirty="0"/>
-              <a:t> and </a:t>
-            </a:r>
-            <a:r>
-              <a:rPr lang="en-US" b="1" dirty="0"/>
-              <a:t>when those drivers matter</a:t>
-            </a:r>
-            <a:r>
-              <a:rPr lang="en-US" dirty="0"/>
-              <a:t>.</a:t>
-            </a:r>
-          </a:p>
-          <a:p>
-            <a:r>
-              <a:rPr lang="en-US" dirty="0"/>
-              <a:t>On the right, the SHAP plot identifies the most important variables overall. We see that seismic activity, regional differences, and lagged population change are key drivers, which tells us that population dynamics are strongly influenced by structural conditions and persistence over time.</a:t>
-            </a:r>
-          </a:p>
-          <a:p>
-            <a:r>
-              <a:rPr lang="en-US" dirty="0"/>
-              <a:t>However, SHAP alone doesn’t tell us </a:t>
-            </a:r>
-            <a:r>
-              <a:rPr lang="en-US" i="1" dirty="0"/>
-              <a:t>when</a:t>
-            </a:r>
-            <a:r>
-              <a:rPr lang="en-US" dirty="0"/>
-              <a:t> these effects occur. That’s where the lead–lag analysis on the left comes in.</a:t>
-            </a:r>
-          </a:p>
-          <a:p>
-            <a:r>
-              <a:rPr lang="en-US" dirty="0"/>
-              <a:t>This plot shows that hurricane exposure is actually the most influential variable — but only at a one-year lag. In other words, the impact of hurricanes on population change is delayed, likely reflecting migration and recovery processes rather than immediate responses.</a:t>
-            </a:r>
-          </a:p>
-          <a:p>
-            <a:r>
-              <a:rPr lang="en-US" dirty="0"/>
-              <a:t>Seismic activity, by contrast, shows both immediate and short-term effects, while structural variables like vulnerability and income remain consistently important across time.</a:t>
-            </a:r>
-          </a:p>
-          <a:p>
-            <a:r>
-              <a:rPr lang="en-US" dirty="0"/>
-              <a:t>So together, these plots show that population change in Puerto Rico is not just driven by structural factors, but also by </a:t>
-            </a:r>
-            <a:r>
-              <a:rPr lang="en-US" b="1" dirty="0"/>
-              <a:t>delayed responses to shocks</a:t>
-            </a:r>
-            <a:r>
-              <a:rPr lang="en-US" dirty="0"/>
-              <a:t>, highlighting that timing plays a critical role in understanding demographic change.</a:t>
-            </a:r>
-          </a:p>
-          <a:p>
-            <a:endParaRPr lang="en-US" dirty="0"/>
-          </a:p>
-          <a:p>
-            <a:endParaRPr lang="en-US" dirty="0"/>
-          </a:p>
-          <a:p>
-            <a:endParaRPr lang="en-US" dirty="0"/>
-          </a:p>
-          <a:p>
-            <a:endParaRPr lang="en-US" dirty="0"/>
-          </a:p>
-          <a:p>
-            <a:endParaRPr lang="en-US" dirty="0"/>
-          </a:p>
-          <a:p>
-            <a:r>
-              <a:rPr lang="en-US" dirty="0"/>
-              <a:t>Those features were chosen because they capture </a:t>
-            </a:r>
-            <a:r>
-              <a:rPr lang="en-US" b="1" dirty="0"/>
-              <a:t>four fundamental mechanisms of population change</a:t>
-            </a:r>
-            <a:r>
-              <a:rPr lang="en-US" dirty="0"/>
-              <a:t>:</a:t>
-            </a:r>
-          </a:p>
-          <a:p>
-            <a:r>
-              <a:rPr lang="en-US" b="1" dirty="0"/>
-              <a:t>Persistence (momentum)</a:t>
-            </a:r>
-            <a:r>
-              <a:rPr lang="en-US" dirty="0"/>
-              <a:t> </a:t>
-            </a:r>
-          </a:p>
-          <a:p>
-            <a:r>
-              <a:rPr lang="en-US" b="1" dirty="0"/>
-              <a:t>Vulnerability (who is exposed)</a:t>
-            </a:r>
-            <a:r>
-              <a:rPr lang="en-US" dirty="0"/>
-              <a:t> </a:t>
-            </a:r>
-          </a:p>
-          <a:p>
-            <a:r>
-              <a:rPr lang="en-US" b="1" dirty="0"/>
-              <a:t>Shocks (what happens)</a:t>
-            </a:r>
-            <a:r>
-              <a:rPr lang="en-US" dirty="0"/>
-              <a:t> </a:t>
-            </a:r>
-          </a:p>
-          <a:p>
-            <a:r>
-              <a:rPr lang="en-US" b="1" dirty="0"/>
-              <a:t>Structure (where it happens)</a:t>
-            </a:r>
-          </a:p>
-          <a:p>
-            <a:endParaRPr lang="en-US" b="1" dirty="0"/>
-          </a:p>
-          <a:p>
-            <a:endParaRPr lang="en-US" b="1" dirty="0"/>
-          </a:p>
-          <a:p>
-            <a:r>
-              <a:rPr lang="en-US" dirty="0"/>
-              <a:t>The feature set is not random — it is </a:t>
-            </a:r>
-            <a:r>
-              <a:rPr lang="en-US" b="1" dirty="0"/>
-              <a:t>theory-driven + data-driven</a:t>
-            </a:r>
-            <a:r>
-              <a:rPr lang="en-US" dirty="0"/>
-              <a:t>.</a:t>
-            </a:r>
-          </a:p>
-          <a:p>
-            <a:endParaRPr lang="en-US" dirty="0"/>
-          </a:p>
-          <a:p>
-            <a:endParaRPr lang="en-US" dirty="0"/>
-          </a:p>
-          <a:p>
-            <a:endParaRPr lang="en-US" dirty="0"/>
-          </a:p>
-          <a:p>
-            <a:r>
-              <a:rPr lang="en-US" b="1" dirty="0"/>
-              <a:t>Features:</a:t>
-            </a:r>
-          </a:p>
-          <a:p>
-            <a:pPr lvl="1"/>
-            <a:r>
-              <a:rPr lang="en-US" sz="1200" kern="1200" dirty="0">
-                <a:solidFill>
-                  <a:schemeClr val="tx1"/>
-                </a:solidFill>
-                <a:latin typeface="+mn-lt"/>
-                <a:ea typeface="+mn-ea"/>
-                <a:cs typeface="+mn-cs"/>
-              </a:rPr>
-              <a:t>lag_pop_change_1</a:t>
-            </a:r>
-            <a:r>
-              <a:rPr lang="en-US" dirty="0"/>
-              <a:t> </a:t>
-            </a:r>
-          </a:p>
-          <a:p>
-            <a:pPr lvl="1"/>
-            <a:r>
-              <a:rPr lang="en-US" sz="1200" kern="1200" dirty="0">
-                <a:solidFill>
-                  <a:schemeClr val="tx1"/>
-                </a:solidFill>
-                <a:latin typeface="+mn-lt"/>
-                <a:ea typeface="+mn-ea"/>
-                <a:cs typeface="+mn-cs"/>
-              </a:rPr>
-              <a:t>lag_pop_change_2</a:t>
-            </a:r>
-            <a:r>
-              <a:rPr lang="en-US" dirty="0"/>
-              <a:t> </a:t>
-            </a:r>
-          </a:p>
-          <a:p>
-            <a:r>
-              <a:rPr lang="en-US" b="1" dirty="0"/>
-              <a:t>Why? </a:t>
-            </a:r>
-            <a:r>
-              <a:rPr lang="en-US" dirty="0"/>
-              <a:t>Population doesn’t change randomly, it follows trends.</a:t>
-            </a:r>
-          </a:p>
-          <a:p>
-            <a:r>
-              <a:rPr lang="en-US" dirty="0"/>
-              <a:t>decline → tends to continue declining </a:t>
-            </a:r>
-          </a:p>
-          <a:p>
-            <a:r>
-              <a:rPr lang="en-US" dirty="0"/>
-              <a:t>growth → tends to continue growing </a:t>
-            </a:r>
-          </a:p>
-          <a:p>
-            <a:r>
-              <a:rPr lang="en-US" b="1" dirty="0"/>
-              <a:t>Interpretation: </a:t>
-            </a:r>
-            <a:r>
-              <a:rPr lang="en-US" dirty="0"/>
-              <a:t>These variables capture </a:t>
-            </a:r>
-            <a:r>
-              <a:rPr lang="en-US" b="1" dirty="0"/>
-              <a:t>momentum and path dependence</a:t>
-            </a:r>
-          </a:p>
-          <a:p>
-            <a:endParaRPr lang="en-US" b="1" dirty="0"/>
-          </a:p>
-          <a:p>
-            <a:endParaRPr lang="en-US" b="1" dirty="0"/>
-          </a:p>
-          <a:p>
-            <a:r>
-              <a:rPr lang="en-US" b="1" dirty="0"/>
-              <a:t>Feature:</a:t>
-            </a:r>
-          </a:p>
-          <a:p>
-            <a:pPr lvl="1"/>
-            <a:r>
-              <a:rPr lang="en-US" sz="1200" kern="1200" dirty="0">
-                <a:solidFill>
-                  <a:schemeClr val="tx1"/>
-                </a:solidFill>
-                <a:latin typeface="+mn-lt"/>
-                <a:ea typeface="+mn-ea"/>
-                <a:cs typeface="+mn-cs"/>
-              </a:rPr>
-              <a:t>svi_pca_1</a:t>
-            </a:r>
-            <a:r>
-              <a:rPr lang="en-US" dirty="0"/>
-              <a:t> </a:t>
-            </a:r>
-          </a:p>
-          <a:p>
-            <a:r>
-              <a:rPr lang="en-US" b="1" dirty="0"/>
-              <a:t>Why? </a:t>
-            </a:r>
-            <a:r>
-              <a:rPr lang="en-US" dirty="0"/>
-              <a:t>Not all municipalities respond the same way to shocks.</a:t>
-            </a:r>
-          </a:p>
-          <a:p>
-            <a:r>
-              <a:rPr lang="en-US" dirty="0"/>
-              <a:t>SVI captures:</a:t>
-            </a:r>
-          </a:p>
-          <a:p>
-            <a:pPr lvl="1"/>
-            <a:r>
-              <a:rPr lang="en-US" dirty="0"/>
-              <a:t>poverty </a:t>
-            </a:r>
-          </a:p>
-          <a:p>
-            <a:pPr lvl="1"/>
-            <a:r>
-              <a:rPr lang="en-US" dirty="0"/>
-              <a:t>age structure </a:t>
-            </a:r>
-          </a:p>
-          <a:p>
-            <a:pPr lvl="1"/>
-            <a:r>
-              <a:rPr lang="en-US" dirty="0"/>
-              <a:t>housing conditions </a:t>
-            </a:r>
-          </a:p>
-          <a:p>
-            <a:pPr lvl="1"/>
-            <a:r>
-              <a:rPr lang="en-US" dirty="0"/>
-              <a:t>social disadvantage </a:t>
-            </a:r>
-          </a:p>
-          <a:p>
-            <a:r>
-              <a:rPr lang="en-US" b="1" dirty="0"/>
-              <a:t>Interpretation: </a:t>
-            </a:r>
-            <a:r>
-              <a:rPr lang="en-US" dirty="0"/>
-              <a:t>This measures </a:t>
-            </a:r>
-            <a:r>
-              <a:rPr lang="en-US" b="1" dirty="0"/>
-              <a:t>baseline resilience vs vulnerability</a:t>
-            </a:r>
-            <a:endParaRPr lang="en-US" dirty="0"/>
-          </a:p>
-          <a:p>
-            <a:endParaRPr lang="en-US" dirty="0"/>
-          </a:p>
-          <a:p>
-            <a:r>
-              <a:rPr lang="en-US" b="1" dirty="0"/>
-              <a:t>Features:</a:t>
-            </a:r>
-          </a:p>
-          <a:p>
-            <a:pPr lvl="1"/>
-            <a:r>
-              <a:rPr lang="en-US" sz="1200" kern="1200" dirty="0">
-                <a:solidFill>
-                  <a:schemeClr val="tx1"/>
-                </a:solidFill>
-                <a:latin typeface="+mn-lt"/>
-                <a:ea typeface="+mn-ea"/>
-                <a:cs typeface="+mn-cs"/>
-              </a:rPr>
-              <a:t>wind_3yr_sum</a:t>
-            </a:r>
-            <a:r>
-              <a:rPr lang="en-US" dirty="0"/>
-              <a:t> (hurricanes) </a:t>
-            </a:r>
-          </a:p>
-          <a:p>
-            <a:pPr lvl="1"/>
-            <a:r>
-              <a:rPr lang="en-US" sz="1200" kern="1200" dirty="0">
-                <a:solidFill>
-                  <a:schemeClr val="tx1"/>
-                </a:solidFill>
-                <a:latin typeface="+mn-lt"/>
-                <a:ea typeface="+mn-ea"/>
-                <a:cs typeface="+mn-cs"/>
-              </a:rPr>
-              <a:t>seismic_3yr_sum</a:t>
-            </a:r>
-            <a:r>
-              <a:rPr lang="en-US" dirty="0"/>
-              <a:t> (earthquakes) </a:t>
-            </a:r>
-          </a:p>
-          <a:p>
-            <a:r>
-              <a:rPr lang="en-US" b="1" dirty="0"/>
-              <a:t>Why? </a:t>
-            </a:r>
-            <a:r>
-              <a:rPr lang="en-US" dirty="0"/>
-              <a:t>Puerto Rico’s population is heavily influenced by disasters.</a:t>
-            </a:r>
-          </a:p>
-          <a:p>
-            <a:r>
-              <a:rPr lang="en-US" dirty="0"/>
-              <a:t>But not just events — you used:</a:t>
-            </a:r>
-          </a:p>
-          <a:p>
-            <a:r>
-              <a:rPr lang="en-US" b="1" dirty="0"/>
-              <a:t>3-year rolling exposure</a:t>
-            </a:r>
-            <a:r>
-              <a:rPr lang="en-US" dirty="0"/>
-              <a:t> </a:t>
-            </a:r>
-          </a:p>
-          <a:p>
-            <a:r>
-              <a:rPr lang="en-US" dirty="0"/>
-              <a:t>This is VERY important because it captures </a:t>
-            </a:r>
-            <a:r>
-              <a:rPr lang="en-US" b="1" dirty="0"/>
-              <a:t>cumulative stress</a:t>
-            </a:r>
-            <a:r>
-              <a:rPr lang="en-US" dirty="0"/>
-              <a:t>, not just single events</a:t>
-            </a:r>
-          </a:p>
-          <a:p>
-            <a:endParaRPr lang="en-US" dirty="0"/>
-          </a:p>
-          <a:p>
-            <a:endParaRPr lang="en-US" dirty="0"/>
-          </a:p>
-          <a:p>
-            <a:r>
-              <a:rPr lang="en-US" b="1" dirty="0"/>
-              <a:t>Features:</a:t>
-            </a:r>
-          </a:p>
-          <a:p>
-            <a:pPr lvl="1"/>
-            <a:r>
-              <a:rPr lang="en-US" sz="1200" kern="1200" dirty="0">
-                <a:solidFill>
-                  <a:schemeClr val="tx1"/>
-                </a:solidFill>
-                <a:latin typeface="+mn-lt"/>
-                <a:ea typeface="+mn-ea"/>
-                <a:cs typeface="+mn-cs"/>
-              </a:rPr>
-              <a:t>wind_3yr_x_svi</a:t>
-            </a:r>
-            <a:r>
-              <a:rPr lang="en-US" dirty="0"/>
-              <a:t> </a:t>
-            </a:r>
-          </a:p>
-          <a:p>
-            <a:pPr lvl="1"/>
-            <a:r>
-              <a:rPr lang="en-US" sz="1200" kern="1200" dirty="0">
-                <a:solidFill>
-                  <a:schemeClr val="tx1"/>
-                </a:solidFill>
-                <a:latin typeface="+mn-lt"/>
-                <a:ea typeface="+mn-ea"/>
-                <a:cs typeface="+mn-cs"/>
-              </a:rPr>
-              <a:t>seismic_3yr_x_svi</a:t>
-            </a:r>
-            <a:r>
-              <a:rPr lang="en-US" dirty="0"/>
-              <a:t> </a:t>
-            </a:r>
-          </a:p>
-          <a:p>
-            <a:r>
-              <a:rPr lang="en-US" b="1" dirty="0"/>
-              <a:t>Why? </a:t>
-            </a:r>
-            <a:r>
-              <a:rPr lang="en-US" dirty="0"/>
-              <a:t>Disasters don’t affect everyone equally.</a:t>
-            </a:r>
-          </a:p>
-          <a:p>
-            <a:r>
-              <a:rPr lang="en-US" dirty="0"/>
-              <a:t>Example:</a:t>
-            </a:r>
-          </a:p>
-          <a:p>
-            <a:pPr lvl="1"/>
-            <a:r>
-              <a:rPr lang="en-US" dirty="0"/>
-              <a:t>high-SVI area + hurricane → bigger impact </a:t>
-            </a:r>
-          </a:p>
-          <a:p>
-            <a:pPr lvl="1"/>
-            <a:r>
-              <a:rPr lang="en-US" dirty="0"/>
-              <a:t>low-SVI area + hurricane → smaller impact </a:t>
-            </a:r>
-          </a:p>
-          <a:p>
-            <a:r>
-              <a:rPr lang="en-US" b="1" dirty="0"/>
-              <a:t>Interpretation: </a:t>
-            </a:r>
-            <a:r>
-              <a:rPr lang="en-US" dirty="0"/>
-              <a:t>These features capture </a:t>
-            </a:r>
-            <a:r>
-              <a:rPr lang="en-US" b="1" dirty="0"/>
-              <a:t>heterogeneous effects</a:t>
-            </a:r>
-            <a:endParaRPr lang="en-US" dirty="0"/>
-          </a:p>
-          <a:p>
-            <a:endParaRPr lang="en-US" dirty="0"/>
-          </a:p>
-          <a:p>
-            <a:endParaRPr lang="en-US" dirty="0"/>
-          </a:p>
-          <a:p>
-            <a:r>
-              <a:rPr lang="en-US" b="1" dirty="0"/>
-              <a:t>Features: </a:t>
-            </a:r>
-            <a:r>
-              <a:rPr lang="en-US" dirty="0"/>
-              <a:t>Economic Structure</a:t>
-            </a:r>
-            <a:endParaRPr lang="en-US" b="1" dirty="0"/>
-          </a:p>
-          <a:p>
-            <a:pPr lvl="1"/>
-            <a:r>
-              <a:rPr lang="en-US" sz="1200" kern="1200" dirty="0" err="1">
-                <a:solidFill>
-                  <a:schemeClr val="tx1"/>
-                </a:solidFill>
-                <a:latin typeface="+mn-lt"/>
-                <a:ea typeface="+mn-ea"/>
-                <a:cs typeface="+mn-cs"/>
-              </a:rPr>
-              <a:t>income_growth</a:t>
-            </a:r>
-            <a:r>
-              <a:rPr lang="en-US" dirty="0"/>
-              <a:t> </a:t>
-            </a:r>
-          </a:p>
-          <a:p>
-            <a:pPr lvl="1"/>
-            <a:r>
-              <a:rPr lang="en-US" sz="1200" kern="1200" dirty="0" err="1">
-                <a:solidFill>
-                  <a:schemeClr val="tx1"/>
-                </a:solidFill>
-                <a:latin typeface="+mn-lt"/>
-                <a:ea typeface="+mn-ea"/>
-                <a:cs typeface="+mn-cs"/>
-              </a:rPr>
-              <a:t>establishment_growth</a:t>
-            </a:r>
-            <a:r>
-              <a:rPr lang="en-US" dirty="0"/>
-              <a:t> </a:t>
-            </a:r>
-          </a:p>
-          <a:p>
-            <a:r>
-              <a:rPr lang="en-US" b="1" dirty="0"/>
-              <a:t>Why? </a:t>
-            </a:r>
-            <a:r>
-              <a:rPr lang="en-US" dirty="0"/>
-              <a:t>Economic conditions influence:</a:t>
-            </a:r>
-          </a:p>
-          <a:p>
-            <a:pPr lvl="1"/>
-            <a:r>
-              <a:rPr lang="en-US" dirty="0"/>
-              <a:t>migration </a:t>
-            </a:r>
-          </a:p>
-          <a:p>
-            <a:pPr lvl="1"/>
-            <a:r>
-              <a:rPr lang="en-US" dirty="0"/>
-              <a:t>opportunity </a:t>
-            </a:r>
-          </a:p>
-          <a:p>
-            <a:r>
-              <a:rPr lang="en-US" dirty="0"/>
-              <a:t>	resilience </a:t>
-            </a:r>
-          </a:p>
-          <a:p>
-            <a:r>
-              <a:rPr lang="en-US" b="1" dirty="0"/>
-              <a:t>Interpretation: </a:t>
-            </a:r>
-            <a:r>
-              <a:rPr lang="en-US" dirty="0"/>
-              <a:t>These are </a:t>
-            </a:r>
-            <a:r>
-              <a:rPr lang="en-US" b="1" dirty="0"/>
-              <a:t>slow-moving structural drivers</a:t>
-            </a:r>
-          </a:p>
-          <a:p>
-            <a:endParaRPr lang="en-US" b="1" dirty="0"/>
-          </a:p>
-          <a:p>
-            <a:r>
-              <a:rPr lang="en-US" b="1" dirty="0"/>
-              <a:t>Feature: </a:t>
-            </a:r>
-            <a:r>
-              <a:rPr lang="en-US" dirty="0"/>
-              <a:t>Social Conditions</a:t>
-            </a:r>
-            <a:endParaRPr lang="en-US" b="1" dirty="0"/>
-          </a:p>
-          <a:p>
-            <a:r>
-              <a:rPr lang="en-US" sz="1200" kern="1200" dirty="0" err="1">
-                <a:solidFill>
-                  <a:schemeClr val="tx1"/>
-                </a:solidFill>
-                <a:latin typeface="+mn-lt"/>
-                <a:ea typeface="+mn-ea"/>
-                <a:cs typeface="+mn-cs"/>
-              </a:rPr>
-              <a:t>lag_total_crime_rate</a:t>
-            </a:r>
-            <a:r>
-              <a:rPr lang="en-US" dirty="0"/>
-              <a:t> </a:t>
-            </a:r>
-          </a:p>
-          <a:p>
-            <a:r>
-              <a:rPr lang="en-US" b="1" dirty="0"/>
-              <a:t>Why? </a:t>
-            </a:r>
-            <a:r>
-              <a:rPr lang="en-US" dirty="0"/>
-              <a:t>Crime affects:</a:t>
-            </a:r>
-          </a:p>
-          <a:p>
-            <a:pPr lvl="1"/>
-            <a:r>
-              <a:rPr lang="en-US" dirty="0"/>
-              <a:t>out-migration </a:t>
-            </a:r>
-          </a:p>
-          <a:p>
-            <a:pPr lvl="1"/>
-            <a:r>
-              <a:rPr lang="en-US" dirty="0"/>
-              <a:t>quality of life </a:t>
-            </a:r>
-          </a:p>
-          <a:p>
-            <a:r>
-              <a:rPr lang="en-US" dirty="0"/>
-              <a:t>And you used </a:t>
-            </a:r>
-            <a:r>
-              <a:rPr lang="en-US" b="1" dirty="0"/>
-              <a:t>lagged crime</a:t>
-            </a:r>
-            <a:r>
-              <a:rPr lang="en-US" dirty="0"/>
-              <a:t> → correct direction of causality</a:t>
-            </a:r>
-          </a:p>
-          <a:p>
-            <a:endParaRPr lang="en-US" dirty="0"/>
-          </a:p>
-          <a:p>
-            <a:endParaRPr lang="en-US" dirty="0"/>
-          </a:p>
-          <a:p>
-            <a:r>
-              <a:rPr lang="en-US" b="1" dirty="0"/>
-              <a:t>Features: </a:t>
-            </a:r>
-            <a:r>
-              <a:rPr lang="en-US" dirty="0"/>
-              <a:t>Spatial Structure</a:t>
-            </a:r>
-            <a:endParaRPr lang="en-US" b="1" dirty="0"/>
-          </a:p>
-          <a:p>
-            <a:pPr lvl="1"/>
-            <a:r>
-              <a:rPr lang="en-US" sz="1200" kern="1200" dirty="0">
-                <a:solidFill>
-                  <a:schemeClr val="tx1"/>
-                </a:solidFill>
-                <a:latin typeface="+mn-lt"/>
-                <a:ea typeface="+mn-ea"/>
-                <a:cs typeface="+mn-cs"/>
-              </a:rPr>
-              <a:t>region</a:t>
-            </a:r>
-            <a:r>
-              <a:rPr lang="en-US" dirty="0"/>
-              <a:t> </a:t>
-            </a:r>
-          </a:p>
-          <a:p>
-            <a:pPr lvl="1"/>
-            <a:r>
-              <a:rPr lang="en-US" sz="1200" kern="1200" dirty="0">
-                <a:solidFill>
-                  <a:schemeClr val="tx1"/>
-                </a:solidFill>
-                <a:latin typeface="+mn-lt"/>
-                <a:ea typeface="+mn-ea"/>
-                <a:cs typeface="+mn-cs"/>
-              </a:rPr>
-              <a:t>municipio</a:t>
-            </a:r>
-            <a:r>
-              <a:rPr lang="en-US" dirty="0"/>
-              <a:t> </a:t>
-            </a:r>
-          </a:p>
-          <a:p>
-            <a:r>
-              <a:rPr lang="en-US" b="1" dirty="0"/>
-              <a:t>Why? </a:t>
-            </a:r>
-            <a:r>
-              <a:rPr lang="en-US" dirty="0"/>
-              <a:t>Geography matters:</a:t>
-            </a:r>
-          </a:p>
-          <a:p>
-            <a:r>
-              <a:rPr lang="en-US" dirty="0"/>
-              <a:t>South ≠ Metro ≠ West </a:t>
-            </a:r>
-          </a:p>
-          <a:p>
-            <a:r>
-              <a:rPr lang="en-US" dirty="0"/>
-              <a:t>each has different: </a:t>
-            </a:r>
-          </a:p>
-          <a:p>
-            <a:pPr lvl="1"/>
-            <a:r>
-              <a:rPr lang="en-US" dirty="0"/>
-              <a:t>economy </a:t>
-            </a:r>
-          </a:p>
-          <a:p>
-            <a:pPr lvl="1"/>
-            <a:r>
-              <a:rPr lang="en-US" dirty="0"/>
-              <a:t>exposure </a:t>
-            </a:r>
-          </a:p>
-          <a:p>
-            <a:pPr lvl="1"/>
-            <a:r>
-              <a:rPr lang="en-US" dirty="0"/>
-              <a:t>demographics </a:t>
-            </a:r>
-          </a:p>
-          <a:p>
-            <a:r>
-              <a:rPr lang="en-US" b="1" dirty="0"/>
-              <a:t>Interpretation: </a:t>
-            </a:r>
-            <a:r>
-              <a:rPr lang="en-US" dirty="0"/>
-              <a:t>These capture </a:t>
-            </a:r>
-            <a:r>
-              <a:rPr lang="en-US" b="1" dirty="0"/>
-              <a:t>unobserved spatial differences</a:t>
-            </a:r>
-          </a:p>
-          <a:p>
-            <a:endParaRPr lang="en-US" b="1" dirty="0"/>
-          </a:p>
-          <a:p>
-            <a:r>
-              <a:rPr lang="en-US" b="1" dirty="0"/>
-              <a:t>Feature: </a:t>
-            </a:r>
-            <a:r>
-              <a:rPr lang="en-US" dirty="0"/>
-              <a:t>Time Trend</a:t>
-            </a:r>
-            <a:endParaRPr lang="en-US" b="1" dirty="0"/>
-          </a:p>
-          <a:p>
-            <a:r>
-              <a:rPr lang="en-US" sz="1200" kern="1200" dirty="0">
-                <a:solidFill>
-                  <a:schemeClr val="tx1"/>
-                </a:solidFill>
-                <a:latin typeface="+mn-lt"/>
-                <a:ea typeface="+mn-ea"/>
-                <a:cs typeface="+mn-cs"/>
-              </a:rPr>
-              <a:t>year</a:t>
-            </a:r>
-            <a:r>
-              <a:rPr lang="en-US" dirty="0"/>
-              <a:t> </a:t>
-            </a:r>
-          </a:p>
-          <a:p>
-            <a:r>
-              <a:rPr lang="en-US" b="1" dirty="0"/>
-              <a:t>Why? </a:t>
-            </a:r>
-            <a:r>
-              <a:rPr lang="en-US" dirty="0"/>
-              <a:t>Captures:</a:t>
-            </a:r>
-          </a:p>
-          <a:p>
-            <a:pPr lvl="1"/>
-            <a:r>
-              <a:rPr lang="en-US" dirty="0"/>
-              <a:t>macro trends </a:t>
-            </a:r>
-          </a:p>
-          <a:p>
-            <a:pPr lvl="1"/>
-            <a:r>
-              <a:rPr lang="en-US" dirty="0"/>
-              <a:t>policy changes </a:t>
-            </a:r>
-          </a:p>
-          <a:p>
-            <a:r>
-              <a:rPr lang="en-US" dirty="0"/>
-              <a:t>          overall island trajectory</a:t>
-            </a:r>
-          </a:p>
-          <a:p>
-            <a:endParaRPr lang="en-US" dirty="0"/>
-          </a:p>
-          <a:p>
-            <a:endParaRPr lang="en-US" dirty="0"/>
-          </a:p>
-          <a:p>
-            <a:r>
-              <a:rPr lang="en-US" dirty="0"/>
-              <a:t>The feature set was designed to capture the key mechanisms driving population change: temporal persistence, vulnerability, external shocks, and structural differences.</a:t>
-            </a:r>
-          </a:p>
-          <a:p>
-            <a:r>
-              <a:rPr lang="en-US" dirty="0"/>
-              <a:t>Lagged population variables capture momentum, SVI captures baseline vulnerability, disaster exposure variables represent external shocks, and interaction terms allow these shocks to vary by vulnerability.</a:t>
-            </a:r>
-          </a:p>
-          <a:p>
-            <a:r>
-              <a:rPr lang="en-US" dirty="0"/>
-              <a:t>Economic and social variables capture longer-term structural conditions, while regional indicators account for spatial heterogeneity. Together, this creates a balanced and interpretable model.</a:t>
-            </a:r>
-          </a:p>
-          <a:p>
-            <a:endParaRPr lang="en-US" dirty="0"/>
-          </a:p>
-          <a:p>
-            <a:endParaRPr lang="en-US" dirty="0"/>
-          </a:p>
-          <a:p>
-            <a:endParaRPr lang="en-US" dirty="0"/>
-          </a:p>
-          <a:p>
-            <a:endParaRPr lang="en-US" dirty="0"/>
-          </a:p>
-          <a:p>
-            <a:endParaRPr lang="en-US" dirty="0"/>
-          </a:p>
-        </p:txBody>
-      </p:sp>
-      <p:sp>
-        <p:nvSpPr>
-          <p:cNvPr id="4" name="Slide Number Placeholder 3"/>
-          <p:cNvSpPr>
-            <a:spLocks noGrp="1"/>
-          </p:cNvSpPr>
-          <p:nvPr>
-            <p:ph type="sldNum" sz="quarter" idx="5"/>
-          </p:nvPr>
-        </p:nvSpPr>
-        <p:spPr/>
-        <p:txBody>
-          <a:bodyPr/>
-          <a:lstStyle/>
-          <a:p>
-            <a:fld id="{5068C1A6-6C9C-C342-8E0F-AE9AC9AFD13B}" type="slidenum">
-              <a:rPr lang="en-US" smtClean="0"/>
-              <a:t>5</a:t>
-            </a:fld>
-            <a:endParaRPr lang="en-US" dirty="0"/>
-          </a:p>
-        </p:txBody>
-      </p:sp>
-    </p:spTree>
-    <p:extLst>
-      <p:ext uri="{BB962C8B-B14F-4D97-AF65-F5344CB8AC3E}">
-        <p14:creationId xmlns:p14="http://schemas.microsoft.com/office/powerpoint/2010/main" val="3120430603"/>
-      </p:ext>
-    </p:extLst>
-  </p:cSld>
-  <p:clrMapOvr>
-    <a:masterClrMapping/>
-  </p:clrMapOvr>
-</p:notes>
-</file>
-
-<file path=ppt/notesSlides/notesSlide6.xml><?xml version="1.0" encoding="utf-8"?>
 <p:notes xmlns:a="http://schemas.openxmlformats.org/drawingml/2006/main" xmlns:r="http://schemas.openxmlformats.org/officeDocument/2006/relationships" xmlns:p="http://schemas.openxmlformats.org/presentationml/2006/main">
   <p:cSld>
     <p:spTree>
@@ -4996,7 +4313,7 @@
           <a:p>
             <a:fld id="{5068C1A6-6C9C-C342-8E0F-AE9AC9AFD13B}" type="slidenum">
               <a:rPr lang="en-US" smtClean="0"/>
-              <a:t>6</a:t>
+              <a:t>5</a:t>
             </a:fld>
             <a:endParaRPr lang="en-US" dirty="0"/>
           </a:p>
@@ -5006,6 +4323,185 @@
     <p:extLst>
       <p:ext uri="{BB962C8B-B14F-4D97-AF65-F5344CB8AC3E}">
         <p14:creationId xmlns:p14="http://schemas.microsoft.com/office/powerpoint/2010/main" val="2308053651"/>
+      </p:ext>
+    </p:extLst>
+  </p:cSld>
+  <p:clrMapOvr>
+    <a:masterClrMapping/>
+  </p:clrMapOvr>
+</p:notes>
+</file>
+
+<file path=ppt/notesSlides/notesSlide6.xml><?xml version="1.0" encoding="utf-8"?>
+<p:notes xmlns:a="http://schemas.openxmlformats.org/drawingml/2006/main" xmlns:r="http://schemas.openxmlformats.org/officeDocument/2006/relationships" xmlns:p="http://schemas.openxmlformats.org/presentationml/2006/main">
+  <p:cSld>
+    <p:spTree>
+      <p:nvGrpSpPr>
+        <p:cNvPr id="1" name=""/>
+        <p:cNvGrpSpPr/>
+        <p:nvPr/>
+      </p:nvGrpSpPr>
+      <p:grpSpPr>
+        <a:xfrm>
+          <a:off x="0" y="0"/>
+          <a:ext cx="0" cy="0"/>
+          <a:chOff x="0" y="0"/>
+          <a:chExt cx="0" cy="0"/>
+        </a:xfrm>
+      </p:grpSpPr>
+      <p:sp>
+        <p:nvSpPr>
+          <p:cNvPr id="2" name="Slide Image Placeholder 1"/>
+          <p:cNvSpPr>
+            <a:spLocks noGrp="1" noRot="1" noChangeAspect="1"/>
+          </p:cNvSpPr>
+          <p:nvPr>
+            <p:ph type="sldImg"/>
+          </p:nvPr>
+        </p:nvSpPr>
+        <p:spPr/>
+      </p:sp>
+      <p:sp>
+        <p:nvSpPr>
+          <p:cNvPr id="3" name="Notes Placeholder 2"/>
+          <p:cNvSpPr>
+            <a:spLocks noGrp="1"/>
+          </p:cNvSpPr>
+          <p:nvPr>
+            <p:ph type="body" idx="1"/>
+          </p:nvPr>
+        </p:nvSpPr>
+        <p:spPr/>
+        <p:txBody>
+          <a:bodyPr/>
+          <a:lstStyle/>
+          <a:p>
+            <a:r>
+              <a:rPr lang="en-US" dirty="0"/>
+              <a:t>In </a:t>
+            </a:r>
+            <a:r>
+              <a:rPr lang="en-US" b="1" dirty="0"/>
+              <a:t>Phase 5</a:t>
+            </a:r>
+            <a:r>
+              <a:rPr lang="en-US" dirty="0"/>
+              <a:t>, I used clustering to group municipios based on:</a:t>
+            </a:r>
+          </a:p>
+          <a:p>
+            <a:r>
+              <a:rPr lang="en-US" dirty="0"/>
+              <a:t>Economic conditions (income, employment) </a:t>
+            </a:r>
+          </a:p>
+          <a:p>
+            <a:r>
+              <a:rPr lang="en-US" dirty="0"/>
+              <a:t>Vulnerability (SVI, poverty, housing) </a:t>
+            </a:r>
+          </a:p>
+          <a:p>
+            <a:r>
+              <a:rPr lang="en-US" dirty="0"/>
+              <a:t>Demographics (age structure, etc.) </a:t>
+            </a:r>
+          </a:p>
+          <a:p>
+            <a:br>
+              <a:rPr lang="en-US" dirty="0"/>
+            </a:br>
+            <a:endParaRPr lang="en-US" dirty="0"/>
+          </a:p>
+          <a:p>
+            <a:r>
+              <a:rPr lang="en-US" b="1" dirty="0"/>
+              <a:t>Result:</a:t>
+            </a:r>
+          </a:p>
+          <a:p>
+            <a:r>
+              <a:rPr lang="en-US" dirty="0"/>
+              <a:t>I didn’t get random groups, but a </a:t>
+            </a:r>
+            <a:r>
+              <a:rPr lang="en-US" b="1" dirty="0"/>
+              <a:t>clear, repeatable patterns</a:t>
+            </a:r>
+          </a:p>
+          <a:p>
+            <a:endParaRPr lang="en-US" dirty="0"/>
+          </a:p>
+          <a:p>
+            <a:r>
+              <a:rPr lang="en-US" dirty="0"/>
+              <a:t>So instead of 78 completely unique municipios, I found:</a:t>
+            </a:r>
+          </a:p>
+          <a:p>
+            <a:r>
+              <a:rPr lang="en-US" dirty="0"/>
+              <a:t>A </a:t>
+            </a:r>
+            <a:r>
+              <a:rPr lang="en-US" b="1" dirty="0"/>
+              <a:t>small number of types</a:t>
+            </a:r>
+            <a:r>
+              <a:rPr lang="en-US" dirty="0"/>
+              <a:t>, like:</a:t>
+            </a:r>
+          </a:p>
+          <a:p>
+            <a:r>
+              <a:rPr lang="en-US" dirty="0"/>
+              <a:t>High vulnerability / declining areas </a:t>
+            </a:r>
+          </a:p>
+          <a:p>
+            <a:r>
+              <a:rPr lang="en-US" dirty="0"/>
+              <a:t>More stable / economically resilient areas </a:t>
+            </a:r>
+          </a:p>
+          <a:p>
+            <a:r>
+              <a:rPr lang="en-US" dirty="0"/>
+              <a:t>Intermediate or mixed regions</a:t>
+            </a:r>
+          </a:p>
+          <a:p>
+            <a:endParaRPr lang="en-US" dirty="0"/>
+          </a:p>
+        </p:txBody>
+      </p:sp>
+      <p:sp>
+        <p:nvSpPr>
+          <p:cNvPr id="4" name="Slide Number Placeholder 3"/>
+          <p:cNvSpPr>
+            <a:spLocks noGrp="1"/>
+          </p:cNvSpPr>
+          <p:nvPr>
+            <p:ph type="sldNum" sz="quarter" idx="5"/>
+          </p:nvPr>
+        </p:nvSpPr>
+        <p:spPr/>
+        <p:txBody>
+          <a:bodyPr/>
+          <a:lstStyle/>
+          <a:p>
+            <a:fld id="{5068C1A6-6C9C-C342-8E0F-AE9AC9AFD13B}" type="slidenum">
+              <a:rPr lang="en-US" smtClean="0"/>
+              <a:t>8</a:t>
+            </a:fld>
+            <a:endParaRPr lang="en-US" dirty="0"/>
+          </a:p>
+        </p:txBody>
+      </p:sp>
+    </p:spTree>
+    <p:extLst>
+      <p:ext uri="{BB962C8B-B14F-4D97-AF65-F5344CB8AC3E}">
+        <p14:creationId xmlns:p14="http://schemas.microsoft.com/office/powerpoint/2010/main" val="789598196"/>
       </p:ext>
     </p:extLst>
   </p:cSld>
@@ -5059,101 +4555,6 @@
           <a:bodyPr/>
           <a:lstStyle/>
           <a:p>
-            <a:r>
-              <a:rPr lang="en-US" dirty="0"/>
-              <a:t>In </a:t>
-            </a:r>
-            <a:r>
-              <a:rPr lang="en-US" b="1" dirty="0"/>
-              <a:t>Phase 5</a:t>
-            </a:r>
-            <a:r>
-              <a:rPr lang="en-US" dirty="0"/>
-              <a:t>, I used clustering to group municipios based on:</a:t>
-            </a:r>
-          </a:p>
-          <a:p>
-            <a:r>
-              <a:rPr lang="en-US" dirty="0"/>
-              <a:t>Economic conditions (income, employment) </a:t>
-            </a:r>
-          </a:p>
-          <a:p>
-            <a:r>
-              <a:rPr lang="en-US" dirty="0"/>
-              <a:t>Vulnerability (SVI, poverty, housing) </a:t>
-            </a:r>
-          </a:p>
-          <a:p>
-            <a:r>
-              <a:rPr lang="en-US" dirty="0"/>
-              <a:t>Demographics (age structure, etc.) </a:t>
-            </a:r>
-          </a:p>
-          <a:p>
-            <a:br>
-              <a:rPr lang="en-US" dirty="0"/>
-            </a:br>
-            <a:endParaRPr lang="en-US" dirty="0"/>
-          </a:p>
-          <a:p>
-            <a:r>
-              <a:rPr lang="en-US" b="1" dirty="0"/>
-              <a:t>Result:</a:t>
-            </a:r>
-          </a:p>
-          <a:p>
-            <a:r>
-              <a:rPr lang="en-US" dirty="0"/>
-              <a:t>I didn’t get random groups, but a </a:t>
-            </a:r>
-            <a:r>
-              <a:rPr lang="en-US" b="1" dirty="0"/>
-              <a:t>clear, repeatable patterns</a:t>
-            </a:r>
-          </a:p>
-          <a:p>
-            <a:endParaRPr lang="en-US" dirty="0"/>
-          </a:p>
-          <a:p>
-            <a:r>
-              <a:rPr lang="en-US" dirty="0"/>
-              <a:t>So instead of 78 completely unique municipios, I found:</a:t>
-            </a:r>
-          </a:p>
-          <a:p>
-            <a:r>
-              <a:rPr lang="en-US" dirty="0"/>
-              <a:t>A </a:t>
-            </a:r>
-            <a:r>
-              <a:rPr lang="en-US" b="1" dirty="0"/>
-              <a:t>small number of types</a:t>
-            </a:r>
-            <a:r>
-              <a:rPr lang="en-US" dirty="0"/>
-              <a:t>, like:</a:t>
-            </a:r>
-          </a:p>
-          <a:p>
-            <a:r>
-              <a:rPr lang="en-US" dirty="0"/>
-              <a:t>High vulnerability / declining areas </a:t>
-            </a:r>
-          </a:p>
-          <a:p>
-            <a:r>
-              <a:rPr lang="en-US" dirty="0"/>
-              <a:t>More stable / economically resilient areas </a:t>
-            </a:r>
-          </a:p>
-          <a:p>
-            <a:r>
-              <a:rPr lang="en-US" dirty="0"/>
-              <a:t>Intermediate or mixed regions</a:t>
-            </a:r>
-          </a:p>
-          <a:p>
             <a:endParaRPr lang="en-US" dirty="0"/>
           </a:p>
         </p:txBody>
@@ -5184,7 +4585,7 @@
     </p:spTree>
     <p:extLst>
       <p:ext uri="{BB962C8B-B14F-4D97-AF65-F5344CB8AC3E}">
-        <p14:creationId xmlns:p14="http://schemas.microsoft.com/office/powerpoint/2010/main" val="789598196"/>
+        <p14:creationId xmlns:p14="http://schemas.microsoft.com/office/powerpoint/2010/main" val="2989634620"/>
       </p:ext>
     </p:extLst>
   </p:cSld>
@@ -5195,292 +4596,6 @@
 </file>
 
 <file path=ppt/notesSlides/notesSlide8.xml><?xml version="1.0" encoding="utf-8"?>
-<p:notes xmlns:a="http://schemas.openxmlformats.org/drawingml/2006/main" xmlns:r="http://schemas.openxmlformats.org/officeDocument/2006/relationships" xmlns:p="http://schemas.openxmlformats.org/presentationml/2006/main">
-  <p:cSld>
-    <p:spTree>
-      <p:nvGrpSpPr>
-        <p:cNvPr id="1" name=""/>
-        <p:cNvGrpSpPr/>
-        <p:nvPr/>
-      </p:nvGrpSpPr>
-      <p:grpSpPr>
-        <a:xfrm>
-          <a:off x="0" y="0"/>
-          <a:ext cx="0" cy="0"/>
-          <a:chOff x="0" y="0"/>
-          <a:chExt cx="0" cy="0"/>
-        </a:xfrm>
-      </p:grpSpPr>
-      <p:sp>
-        <p:nvSpPr>
-          <p:cNvPr id="2" name="Slide Image Placeholder 1"/>
-          <p:cNvSpPr>
-            <a:spLocks noGrp="1" noRot="1" noChangeAspect="1"/>
-          </p:cNvSpPr>
-          <p:nvPr>
-            <p:ph type="sldImg"/>
-          </p:nvPr>
-        </p:nvSpPr>
-        <p:spPr/>
-      </p:sp>
-      <p:sp>
-        <p:nvSpPr>
-          <p:cNvPr id="3" name="Notes Placeholder 2"/>
-          <p:cNvSpPr>
-            <a:spLocks noGrp="1"/>
-          </p:cNvSpPr>
-          <p:nvPr>
-            <p:ph type="body" idx="1"/>
-          </p:nvPr>
-        </p:nvSpPr>
-        <p:spPr/>
-        <p:txBody>
-          <a:bodyPr/>
-          <a:lstStyle/>
-          <a:p>
-            <a:r>
-              <a:rPr lang="en-US" b="1" dirty="0"/>
-              <a:t>1. The "Anchor" (Historical vs. Forecast)</a:t>
-            </a:r>
-          </a:p>
-          <a:p>
-            <a:r>
-              <a:rPr lang="en-US" b="1" dirty="0"/>
-              <a:t>The Black Line (2014–2023):</a:t>
-            </a:r>
-            <a:r>
-              <a:rPr lang="en-US" dirty="0"/>
-              <a:t> This represents </a:t>
-            </a:r>
-            <a:r>
-              <a:rPr lang="en-US" b="1" dirty="0"/>
-              <a:t>Observed Data</a:t>
-            </a:r>
-            <a:r>
-              <a:rPr lang="en-US" dirty="0"/>
-              <a:t>. It establishes the baseline trend of population decline that the models are "learning" from.</a:t>
-            </a:r>
-          </a:p>
-          <a:p>
-            <a:r>
-              <a:rPr lang="en-US" b="1" dirty="0"/>
-              <a:t>The Red Dashed Line (Current: 2023):</a:t>
-            </a:r>
-            <a:r>
-              <a:rPr lang="en-US" dirty="0"/>
-              <a:t> This is the </a:t>
-            </a:r>
-            <a:r>
-              <a:rPr lang="en-US" b="1" dirty="0"/>
-              <a:t>Pivot Point</a:t>
-            </a:r>
-            <a:r>
-              <a:rPr lang="en-US" dirty="0"/>
-              <a:t>. Everything to the left is fact; everything to the right is a probabilistic projection based on Phase 6 modeling.</a:t>
-            </a:r>
-          </a:p>
-          <a:p>
-            <a:endParaRPr lang="en-US" dirty="0"/>
-          </a:p>
-          <a:p>
-            <a:r>
-              <a:rPr lang="en-US" b="1" dirty="0"/>
-              <a:t>2. The "Median" (The Expected Path)</a:t>
-            </a:r>
-          </a:p>
-          <a:p>
-            <a:r>
-              <a:rPr lang="en-US" dirty="0"/>
-              <a:t>The center line represents the </a:t>
-            </a:r>
-            <a:r>
-              <a:rPr lang="en-US" b="1" dirty="0"/>
-              <a:t>P50 (Median) Forecast</a:t>
-            </a:r>
-            <a:r>
-              <a:rPr lang="en-US" dirty="0"/>
-              <a:t>.</a:t>
-            </a:r>
-          </a:p>
-          <a:p>
-            <a:r>
-              <a:rPr lang="en-US" b="1" dirty="0"/>
-              <a:t>The Insight:</a:t>
-            </a:r>
-            <a:r>
-              <a:rPr lang="en-US" dirty="0"/>
-              <a:t> Our analysis suggests that the most likely outcome is a continued, linear decline, bringing the population toward the </a:t>
-            </a:r>
-            <a:r>
-              <a:rPr lang="en-US" b="1" dirty="0"/>
-              <a:t>3.0M mark by 2030</a:t>
-            </a:r>
-            <a:r>
-              <a:rPr lang="en-US" dirty="0"/>
-              <a:t>.</a:t>
-            </a:r>
-          </a:p>
-          <a:p>
-            <a:endParaRPr lang="en-US" dirty="0"/>
-          </a:p>
-          <a:p>
-            <a:r>
-              <a:rPr lang="en-US" b="1" dirty="0"/>
-              <a:t>3. Understanding the "Fan" (The Probability Bands)</a:t>
-            </a:r>
-          </a:p>
-          <a:p>
-            <a:r>
-              <a:rPr lang="en-US" dirty="0"/>
-              <a:t>Instead of giving a single "guess," the fan shows a range of possible futures:</a:t>
-            </a:r>
-          </a:p>
-          <a:p>
-            <a:r>
-              <a:rPr lang="en-US" b="1" dirty="0"/>
-              <a:t>The Core (Central Bands):</a:t>
-            </a:r>
-            <a:r>
-              <a:rPr lang="en-US" dirty="0"/>
-              <a:t> The green and teal areas represent the </a:t>
-            </a:r>
-            <a:r>
-              <a:rPr lang="en-US" b="1" dirty="0"/>
-              <a:t>50% probability interval</a:t>
-            </a:r>
-            <a:r>
-              <a:rPr lang="en-US" dirty="0"/>
-              <a:t>. If current structural conditions remain stable, the population will almost certainly land within this range.</a:t>
-            </a:r>
-          </a:p>
-          <a:p>
-            <a:r>
-              <a:rPr lang="en-US" b="1" dirty="0"/>
-              <a:t>The Tails (Outer Bands):</a:t>
-            </a:r>
-            <a:r>
-              <a:rPr lang="en-US" dirty="0"/>
-              <a:t> The dark purple and light orange areas represent </a:t>
-            </a:r>
-            <a:r>
-              <a:rPr lang="en-US" b="1" dirty="0"/>
-              <a:t>extreme scenarios</a:t>
-            </a:r>
-            <a:r>
-              <a:rPr lang="en-US" dirty="0"/>
-              <a:t> (Tail Risks).</a:t>
-            </a:r>
-          </a:p>
-          <a:p>
-            <a:pPr lvl="1"/>
-            <a:r>
-              <a:rPr lang="en-US" b="1" dirty="0"/>
-              <a:t>Upper Tail (Orange):</a:t>
-            </a:r>
-            <a:r>
-              <a:rPr lang="en-US" dirty="0"/>
-              <a:t> Represents a "Favorable" scenario where decline slows significantly (e.g., due to economic stabilization or migration shifts).</a:t>
-            </a:r>
-          </a:p>
-          <a:p>
-            <a:pPr lvl="1"/>
-            <a:r>
-              <a:rPr lang="en-US" b="1" dirty="0"/>
-              <a:t>Lower Tail (Dark Purple):</a:t>
-            </a:r>
-            <a:r>
-              <a:rPr lang="en-US" dirty="0"/>
-              <a:t> Represents an "Adverse" scenario where decline accelerates (e.g., due to external shocks or deepening structural vulnerability).</a:t>
-            </a:r>
-          </a:p>
-          <a:p>
-            <a:pPr lvl="1"/>
-            <a:endParaRPr lang="en-US" dirty="0"/>
-          </a:p>
-          <a:p>
-            <a:r>
-              <a:rPr lang="en-US" b="1" dirty="0"/>
-              <a:t>4. Key Takeaway for Policy</a:t>
-            </a:r>
-          </a:p>
-          <a:p>
-            <a:r>
-              <a:rPr lang="en-US" b="1" dirty="0"/>
-              <a:t>Systemic Persistence:</a:t>
-            </a:r>
-            <a:r>
-              <a:rPr lang="en-US" dirty="0"/>
-              <a:t> Even in the most "optimistic" scenario (the top of the fan), the island does not return to growth by 2030.</a:t>
-            </a:r>
-          </a:p>
-          <a:p>
-            <a:r>
-              <a:rPr lang="en-US" b="1" dirty="0"/>
-              <a:t>Widening Uncertainty:</a:t>
-            </a:r>
-            <a:r>
-              <a:rPr lang="en-US" dirty="0"/>
-              <a:t> The "width" of the fan at 2030 illustrates that while we are certain about the </a:t>
-            </a:r>
-            <a:r>
-              <a:rPr lang="en-US" i="1" dirty="0"/>
-              <a:t>direction</a:t>
-            </a:r>
-            <a:r>
-              <a:rPr lang="en-US" dirty="0"/>
-              <a:t> of the trend, the </a:t>
-            </a:r>
-            <a:r>
-              <a:rPr lang="en-US" i="1" dirty="0"/>
-              <a:t>magnitude</a:t>
-            </a:r>
-            <a:r>
-              <a:rPr lang="en-US" dirty="0"/>
-              <a:t> of the loss is subject to high volatility, requiring flexible regional planning.</a:t>
-            </a:r>
-          </a:p>
-          <a:p>
-            <a:endParaRPr lang="en-US" dirty="0"/>
-          </a:p>
-        </p:txBody>
-      </p:sp>
-      <p:sp>
-        <p:nvSpPr>
-          <p:cNvPr id="4" name="Slide Number Placeholder 3"/>
-          <p:cNvSpPr>
-            <a:spLocks noGrp="1"/>
-          </p:cNvSpPr>
-          <p:nvPr>
-            <p:ph type="sldNum" sz="quarter" idx="5"/>
-          </p:nvPr>
-        </p:nvSpPr>
-        <p:spPr/>
-        <p:txBody>
-          <a:bodyPr/>
-          <a:lstStyle/>
-          <a:p>
-            <a:fld id="{5068C1A6-6C9C-C342-8E0F-AE9AC9AFD13B}" type="slidenum">
-              <a:rPr lang="en-US" smtClean="0"/>
-              <a:t>10</a:t>
-            </a:fld>
-            <a:endParaRPr lang="en-US" dirty="0"/>
-          </a:p>
-        </p:txBody>
-      </p:sp>
-    </p:spTree>
-    <p:extLst>
-      <p:ext uri="{BB962C8B-B14F-4D97-AF65-F5344CB8AC3E}">
-        <p14:creationId xmlns:p14="http://schemas.microsoft.com/office/powerpoint/2010/main" val="2989634620"/>
-      </p:ext>
-    </p:extLst>
-  </p:cSld>
-  <p:clrMapOvr>
-    <a:masterClrMapping/>
-  </p:clrMapOvr>
-</p:notes>
-</file>
-
-<file path=ppt/notesSlides/notesSlide9.xml><?xml version="1.0" encoding="utf-8"?>
 <p:notes xmlns:a="http://schemas.openxmlformats.org/drawingml/2006/main" xmlns:r="http://schemas.openxmlformats.org/officeDocument/2006/relationships" xmlns:p="http://schemas.openxmlformats.org/presentationml/2006/main">
   <p:cSld>
     <p:spTree>
@@ -5542,208 +4657,6 @@
           <a:bodyPr/>
           <a:lstStyle/>
           <a:p>
-            <a:r>
-              <a:rPr lang="en-US" b="1" dirty="0"/>
-              <a:t>1. The "Anchor" (Historical vs. Forecast)</a:t>
-            </a:r>
-          </a:p>
-          <a:p>
-            <a:r>
-              <a:rPr lang="en-US" b="1" dirty="0"/>
-              <a:t>The Black Line (2014–2023):</a:t>
-            </a:r>
-            <a:r>
-              <a:rPr lang="en-US" dirty="0"/>
-              <a:t> This represents </a:t>
-            </a:r>
-            <a:r>
-              <a:rPr lang="en-US" b="1" dirty="0"/>
-              <a:t>Observed Data</a:t>
-            </a:r>
-            <a:r>
-              <a:rPr lang="en-US" dirty="0"/>
-              <a:t>. It establishes the baseline trend of population decline that the models are "learning" from.</a:t>
-            </a:r>
-          </a:p>
-          <a:p>
-            <a:r>
-              <a:rPr lang="en-US" b="1" dirty="0"/>
-              <a:t>The Red Dashed Line (Current: 2023):</a:t>
-            </a:r>
-            <a:r>
-              <a:rPr lang="en-US" dirty="0"/>
-              <a:t> This is the </a:t>
-            </a:r>
-            <a:r>
-              <a:rPr lang="en-US" b="1" dirty="0"/>
-              <a:t>Pivot Point</a:t>
-            </a:r>
-            <a:r>
-              <a:rPr lang="en-US" dirty="0"/>
-              <a:t>. Everything to the left is fact; everything to the right is a probabilistic projection based on Phase 6 modeling.</a:t>
-            </a:r>
-          </a:p>
-          <a:p>
-            <a:endParaRPr lang="en-US" dirty="0"/>
-          </a:p>
-          <a:p>
-            <a:r>
-              <a:rPr lang="en-US" b="1" dirty="0"/>
-              <a:t>2. The "Median" (The Expected Path)</a:t>
-            </a:r>
-          </a:p>
-          <a:p>
-            <a:r>
-              <a:rPr lang="en-US" dirty="0"/>
-              <a:t>The center line represents the </a:t>
-            </a:r>
-            <a:r>
-              <a:rPr lang="en-US" b="1" dirty="0"/>
-              <a:t>P50 (Median) Forecast</a:t>
-            </a:r>
-            <a:r>
-              <a:rPr lang="en-US" dirty="0"/>
-              <a:t>.</a:t>
-            </a:r>
-          </a:p>
-          <a:p>
-            <a:r>
-              <a:rPr lang="en-US" b="1" dirty="0"/>
-              <a:t>The Insight:</a:t>
-            </a:r>
-            <a:r>
-              <a:rPr lang="en-US" dirty="0"/>
-              <a:t> Our analysis suggests that the most likely outcome is a continued, linear decline, bringing the population toward the </a:t>
-            </a:r>
-            <a:r>
-              <a:rPr lang="en-US" b="1" dirty="0"/>
-              <a:t>3.0M mark by 2030</a:t>
-            </a:r>
-            <a:r>
-              <a:rPr lang="en-US" dirty="0"/>
-              <a:t>.</a:t>
-            </a:r>
-          </a:p>
-          <a:p>
-            <a:endParaRPr lang="en-US" dirty="0"/>
-          </a:p>
-          <a:p>
-            <a:r>
-              <a:rPr lang="en-US" b="1" dirty="0"/>
-              <a:t>3. Understanding the "Fan" (The Probability Bands)</a:t>
-            </a:r>
-          </a:p>
-          <a:p>
-            <a:r>
-              <a:rPr lang="en-US" dirty="0"/>
-              <a:t>Instead of giving a single "guess," the fan shows a range of possible futures:</a:t>
-            </a:r>
-          </a:p>
-          <a:p>
-            <a:r>
-              <a:rPr lang="en-US" b="1" dirty="0"/>
-              <a:t>The Core (Central Bands):</a:t>
-            </a:r>
-            <a:r>
-              <a:rPr lang="en-US" dirty="0"/>
-              <a:t> The green and teal areas represent the </a:t>
-            </a:r>
-            <a:r>
-              <a:rPr lang="en-US" b="1" dirty="0"/>
-              <a:t>50% probability interval</a:t>
-            </a:r>
-            <a:r>
-              <a:rPr lang="en-US" dirty="0"/>
-              <a:t>. If current structural conditions remain stable, the population will almost certainly land within this range.</a:t>
-            </a:r>
-          </a:p>
-          <a:p>
-            <a:r>
-              <a:rPr lang="en-US" b="1" dirty="0"/>
-              <a:t>The Tails (Outer Bands):</a:t>
-            </a:r>
-            <a:r>
-              <a:rPr lang="en-US" dirty="0"/>
-              <a:t> The dark purple and light orange areas represent </a:t>
-            </a:r>
-            <a:r>
-              <a:rPr lang="en-US" b="1" dirty="0"/>
-              <a:t>extreme scenarios</a:t>
-            </a:r>
-            <a:r>
-              <a:rPr lang="en-US" dirty="0"/>
-              <a:t> (Tail Risks).</a:t>
-            </a:r>
-          </a:p>
-          <a:p>
-            <a:pPr lvl="1"/>
-            <a:r>
-              <a:rPr lang="en-US" b="1" dirty="0"/>
-              <a:t>Upper Tail (Orange):</a:t>
-            </a:r>
-            <a:r>
-              <a:rPr lang="en-US" dirty="0"/>
-              <a:t> Represents a "Favorable" scenario where decline slows significantly (e.g., due to economic stabilization or migration shifts).</a:t>
-            </a:r>
-          </a:p>
-          <a:p>
-            <a:pPr lvl="1"/>
-            <a:r>
-              <a:rPr lang="en-US" b="1" dirty="0"/>
-              <a:t>Lower Tail (Dark Purple):</a:t>
-            </a:r>
-            <a:r>
-              <a:rPr lang="en-US" dirty="0"/>
-              <a:t> Represents an "Adverse" scenario where decline accelerates (e.g., due to external shocks or deepening structural vulnerability).</a:t>
-            </a:r>
-          </a:p>
-          <a:p>
-            <a:pPr lvl="1"/>
-            <a:endParaRPr lang="en-US" dirty="0"/>
-          </a:p>
-          <a:p>
-            <a:r>
-              <a:rPr lang="en-US" b="1" dirty="0"/>
-              <a:t>4. Key Takeaway for Policy</a:t>
-            </a:r>
-          </a:p>
-          <a:p>
-            <a:r>
-              <a:rPr lang="en-US" b="1" dirty="0"/>
-              <a:t>Systemic Persistence:</a:t>
-            </a:r>
-            <a:r>
-              <a:rPr lang="en-US" dirty="0"/>
-              <a:t> Even in the most "optimistic" scenario (the top of the fan), the island does not return to growth by 2030.</a:t>
-            </a:r>
-          </a:p>
-          <a:p>
-            <a:r>
-              <a:rPr lang="en-US" b="1" dirty="0"/>
-              <a:t>Widening Uncertainty:</a:t>
-            </a:r>
-            <a:r>
-              <a:rPr lang="en-US" dirty="0"/>
-              <a:t> The "width" of the fan at 2030 illustrates that while we are certain about the </a:t>
-            </a:r>
-            <a:r>
-              <a:rPr lang="en-US" i="1" dirty="0"/>
-              <a:t>direction</a:t>
-            </a:r>
-            <a:r>
-              <a:rPr lang="en-US" dirty="0"/>
-              <a:t> of the trend, the </a:t>
-            </a:r>
-            <a:r>
-              <a:rPr lang="en-US" i="1" dirty="0"/>
-              <a:t>magnitude</a:t>
-            </a:r>
-            <a:r>
-              <a:rPr lang="en-US" dirty="0"/>
-              <a:t> of the loss is subject to high volatility, requiring flexible regional planning.</a:t>
-            </a:r>
-          </a:p>
-          <a:p>
             <a:endParaRPr lang="en-US" dirty="0"/>
           </a:p>
         </p:txBody>
@@ -5771,7 +4684,7 @@
           <a:p>
             <a:fld id="{5068C1A6-6C9C-C342-8E0F-AE9AC9AFD13B}" type="slidenum">
               <a:rPr lang="en-US" smtClean="0"/>
-              <a:t>11</a:t>
+              <a:t>10</a:t>
             </a:fld>
             <a:endParaRPr lang="en-US" dirty="0"/>
           </a:p>
@@ -5781,6 +4694,114 @@
     <p:extLst>
       <p:ext uri="{BB962C8B-B14F-4D97-AF65-F5344CB8AC3E}">
         <p14:creationId xmlns:p14="http://schemas.microsoft.com/office/powerpoint/2010/main" val="1381555173"/>
+      </p:ext>
+    </p:extLst>
+  </p:cSld>
+  <p:clrMapOvr>
+    <a:masterClrMapping/>
+  </p:clrMapOvr>
+</p:notes>
+</file>
+
+<file path=ppt/notesSlides/notesSlide9.xml><?xml version="1.0" encoding="utf-8"?>
+<p:notes xmlns:a="http://schemas.openxmlformats.org/drawingml/2006/main" xmlns:r="http://schemas.openxmlformats.org/officeDocument/2006/relationships" xmlns:p="http://schemas.openxmlformats.org/presentationml/2006/main">
+  <p:cSld>
+    <p:spTree>
+      <p:nvGrpSpPr>
+        <p:cNvPr id="1" name="">
+          <a:extLst>
+            <a:ext uri="{FF2B5EF4-FFF2-40B4-BE49-F238E27FC236}">
+              <a16:creationId xmlns:a16="http://schemas.microsoft.com/office/drawing/2014/main" id="{EB376FB7-E1E1-DF26-DD42-A6914910E8E4}"/>
+            </a:ext>
+          </a:extLst>
+        </p:cNvPr>
+        <p:cNvGrpSpPr/>
+        <p:nvPr/>
+      </p:nvGrpSpPr>
+      <p:grpSpPr>
+        <a:xfrm>
+          <a:off x="0" y="0"/>
+          <a:ext cx="0" cy="0"/>
+          <a:chOff x="0" y="0"/>
+          <a:chExt cx="0" cy="0"/>
+        </a:xfrm>
+      </p:grpSpPr>
+      <p:sp>
+        <p:nvSpPr>
+          <p:cNvPr id="2" name="Slide Image Placeholder 1">
+            <a:extLst>
+              <a:ext uri="{FF2B5EF4-FFF2-40B4-BE49-F238E27FC236}">
+                <a16:creationId xmlns:a16="http://schemas.microsoft.com/office/drawing/2014/main" id="{C85697AD-0E16-C69C-3838-FDE2DCF9CA5B}"/>
+              </a:ext>
+            </a:extLst>
+          </p:cNvPr>
+          <p:cNvSpPr>
+            <a:spLocks noGrp="1" noRot="1" noChangeAspect="1"/>
+          </p:cNvSpPr>
+          <p:nvPr>
+            <p:ph type="sldImg"/>
+          </p:nvPr>
+        </p:nvSpPr>
+        <p:spPr/>
+      </p:sp>
+      <p:sp>
+        <p:nvSpPr>
+          <p:cNvPr id="3" name="Notes Placeholder 2">
+            <a:extLst>
+              <a:ext uri="{FF2B5EF4-FFF2-40B4-BE49-F238E27FC236}">
+                <a16:creationId xmlns:a16="http://schemas.microsoft.com/office/drawing/2014/main" id="{00C9A24C-0EA7-83F2-3028-7B89A1FC2C52}"/>
+              </a:ext>
+            </a:extLst>
+          </p:cNvPr>
+          <p:cNvSpPr>
+            <a:spLocks noGrp="1"/>
+          </p:cNvSpPr>
+          <p:nvPr>
+            <p:ph type="body" idx="1"/>
+          </p:nvPr>
+        </p:nvSpPr>
+        <p:spPr/>
+        <p:txBody>
+          <a:bodyPr/>
+          <a:lstStyle/>
+          <a:p>
+            <a:endParaRPr lang="en-US" dirty="0"/>
+          </a:p>
+        </p:txBody>
+      </p:sp>
+      <p:sp>
+        <p:nvSpPr>
+          <p:cNvPr id="4" name="Slide Number Placeholder 3">
+            <a:extLst>
+              <a:ext uri="{FF2B5EF4-FFF2-40B4-BE49-F238E27FC236}">
+                <a16:creationId xmlns:a16="http://schemas.microsoft.com/office/drawing/2014/main" id="{2B1F1F4F-300D-524D-88DA-F56D106F648B}"/>
+              </a:ext>
+            </a:extLst>
+          </p:cNvPr>
+          <p:cNvSpPr>
+            <a:spLocks noGrp="1"/>
+          </p:cNvSpPr>
+          <p:nvPr>
+            <p:ph type="sldNum" sz="quarter" idx="5"/>
+          </p:nvPr>
+        </p:nvSpPr>
+        <p:spPr/>
+        <p:txBody>
+          <a:bodyPr/>
+          <a:lstStyle/>
+          <a:p>
+            <a:fld id="{5068C1A6-6C9C-C342-8E0F-AE9AC9AFD13B}" type="slidenum">
+              <a:rPr lang="en-US" smtClean="0"/>
+              <a:t>11</a:t>
+            </a:fld>
+            <a:endParaRPr lang="en-US" dirty="0"/>
+          </a:p>
+        </p:txBody>
+      </p:sp>
+    </p:spTree>
+    <p:extLst>
+      <p:ext uri="{BB962C8B-B14F-4D97-AF65-F5344CB8AC3E}">
+        <p14:creationId xmlns:p14="http://schemas.microsoft.com/office/powerpoint/2010/main" val="4055531301"/>
       </p:ext>
     </p:extLst>
   </p:cSld>
@@ -9930,7 +8951,7 @@
                 <a:cs typeface="Arial" panose="020B0604020202020204" pitchFamily="34" charset="0"/>
                 <a:sym typeface="DM Sans"/>
               </a:rPr>
-              <a:t>Week 10 Progress: 3 April 2026</a:t>
+              <a:t>Week 10 Progress: 10 April 2026</a:t>
             </a:r>
             <a:endParaRPr lang="en-US" sz="1400" b="1" dirty="0">
               <a:latin typeface="+mj-lt"/>
@@ -9953,310 +8974,6 @@
 </file>
 
 <file path=ppt/slides/slide10.xml><?xml version="1.0" encoding="utf-8"?>
-<p:sld xmlns:a="http://schemas.openxmlformats.org/drawingml/2006/main" xmlns:r="http://schemas.openxmlformats.org/officeDocument/2006/relationships" xmlns:p="http://schemas.openxmlformats.org/presentationml/2006/main">
-  <p:cSld>
-    <p:spTree>
-      <p:nvGrpSpPr>
-        <p:cNvPr id="1" name="">
-          <a:extLst>
-            <a:ext uri="{FF2B5EF4-FFF2-40B4-BE49-F238E27FC236}">
-              <a16:creationId xmlns:a16="http://schemas.microsoft.com/office/drawing/2014/main" id="{7E0CB461-06C7-B3FE-2FD3-A6EAA2C2C6C6}"/>
-            </a:ext>
-          </a:extLst>
-        </p:cNvPr>
-        <p:cNvGrpSpPr/>
-        <p:nvPr/>
-      </p:nvGrpSpPr>
-      <p:grpSpPr>
-        <a:xfrm>
-          <a:off x="0" y="0"/>
-          <a:ext cx="0" cy="0"/>
-          <a:chOff x="0" y="0"/>
-          <a:chExt cx="0" cy="0"/>
-        </a:xfrm>
-      </p:grpSpPr>
-      <p:sp>
-        <p:nvSpPr>
-          <p:cNvPr id="4" name="Rectangle 3">
-            <a:extLst>
-              <a:ext uri="{FF2B5EF4-FFF2-40B4-BE49-F238E27FC236}">
-                <a16:creationId xmlns:a16="http://schemas.microsoft.com/office/drawing/2014/main" id="{46AFF467-EA34-A1E1-7D27-49257098751A}"/>
-              </a:ext>
-            </a:extLst>
-          </p:cNvPr>
-          <p:cNvSpPr/>
-          <p:nvPr/>
-        </p:nvSpPr>
-        <p:spPr>
-          <a:xfrm>
-            <a:off x="0" y="196343"/>
-            <a:ext cx="7199290" cy="1007423"/>
-          </a:xfrm>
-          <a:prstGeom prst="rect">
-            <a:avLst/>
-          </a:prstGeom>
-          <a:solidFill>
-            <a:srgbClr val="CC0033"/>
-          </a:solidFill>
-          <a:ln>
-            <a:noFill/>
-          </a:ln>
-        </p:spPr>
-        <p:style>
-          <a:lnRef idx="1">
-            <a:schemeClr val="accent1"/>
-          </a:lnRef>
-          <a:fillRef idx="3">
-            <a:schemeClr val="accent1"/>
-          </a:fillRef>
-          <a:effectRef idx="2">
-            <a:schemeClr val="accent1"/>
-          </a:effectRef>
-          <a:fontRef idx="minor">
-            <a:schemeClr val="lt1"/>
-          </a:fontRef>
-        </p:style>
-        <p:txBody>
-          <a:bodyPr rtlCol="0" anchor="ctr"/>
-          <a:lstStyle/>
-          <a:p>
-            <a:pPr algn="ctr"/>
-            <a:endParaRPr lang="en-US" dirty="0">
-              <a:solidFill>
-                <a:schemeClr val="accent1"/>
-              </a:solidFill>
-            </a:endParaRPr>
-          </a:p>
-        </p:txBody>
-      </p:sp>
-      <p:sp>
-        <p:nvSpPr>
-          <p:cNvPr id="5" name="Title 10">
-            <a:extLst>
-              <a:ext uri="{FF2B5EF4-FFF2-40B4-BE49-F238E27FC236}">
-                <a16:creationId xmlns:a16="http://schemas.microsoft.com/office/drawing/2014/main" id="{1C9245BE-7F46-5541-F240-56BA0A3CBFE3}"/>
-              </a:ext>
-            </a:extLst>
-          </p:cNvPr>
-          <p:cNvSpPr txBox="1">
-            <a:spLocks/>
-          </p:cNvSpPr>
-          <p:nvPr/>
-        </p:nvSpPr>
-        <p:spPr>
-          <a:xfrm>
-            <a:off x="459357" y="361539"/>
-            <a:ext cx="6546750" cy="719563"/>
-          </a:xfrm>
-          <a:prstGeom prst="rect">
-            <a:avLst/>
-          </a:prstGeom>
-        </p:spPr>
-        <p:txBody>
-          <a:bodyPr anchor="ctr" anchorCtr="0">
-            <a:noAutofit/>
-          </a:bodyPr>
-          <a:lstStyle>
-            <a:lvl1pPr algn="ctr" defTabSz="457200" rtl="0" eaLnBrk="1" latinLnBrk="0" hangingPunct="1">
-              <a:spcBef>
-                <a:spcPct val="0"/>
-              </a:spcBef>
-              <a:buNone/>
-              <a:defRPr sz="4400" kern="1200">
-                <a:solidFill>
-                  <a:schemeClr val="tx1"/>
-                </a:solidFill>
-                <a:latin typeface="+mj-lt"/>
-                <a:ea typeface="+mj-ea"/>
-                <a:cs typeface="+mj-cs"/>
-              </a:defRPr>
-            </a:lvl1pPr>
-          </a:lstStyle>
-          <a:p>
-            <a:pPr lvl="0"/>
-            <a:r>
-              <a:rPr lang="en-US" sz="3200" b="1" dirty="0">
-                <a:solidFill>
-                  <a:schemeClr val="bg1"/>
-                </a:solidFill>
-              </a:rPr>
-              <a:t>Structural Patterns </a:t>
-            </a:r>
-          </a:p>
-          <a:p>
-            <a:pPr lvl="0"/>
-            <a:r>
-              <a:rPr lang="en-US" sz="3200" b="1" dirty="0">
-                <a:solidFill>
-                  <a:schemeClr val="bg1"/>
-                </a:solidFill>
-              </a:rPr>
-              <a:t>(Beyond Prediction)</a:t>
-            </a:r>
-          </a:p>
-        </p:txBody>
-      </p:sp>
-      <p:sp>
-        <p:nvSpPr>
-          <p:cNvPr id="11" name="TextBox 10">
-            <a:extLst>
-              <a:ext uri="{FF2B5EF4-FFF2-40B4-BE49-F238E27FC236}">
-                <a16:creationId xmlns:a16="http://schemas.microsoft.com/office/drawing/2014/main" id="{5F60B027-7280-1B08-F112-1AB1AFF3FADD}"/>
-              </a:ext>
-            </a:extLst>
-          </p:cNvPr>
-          <p:cNvSpPr txBox="1"/>
-          <p:nvPr/>
-        </p:nvSpPr>
-        <p:spPr>
-          <a:xfrm>
-            <a:off x="139613" y="1368962"/>
-            <a:ext cx="9560053" cy="4708981"/>
-          </a:xfrm>
-          <a:prstGeom prst="rect">
-            <a:avLst/>
-          </a:prstGeom>
-          <a:noFill/>
-        </p:spPr>
-        <p:txBody>
-          <a:bodyPr wrap="square">
-            <a:spAutoFit/>
-          </a:bodyPr>
-          <a:lstStyle/>
-          <a:p>
-            <a:r>
-              <a:rPr lang="en-US" sz="2000" b="1" dirty="0"/>
-              <a:t>What emerges</a:t>
-            </a:r>
-          </a:p>
-          <a:p>
-            <a:pPr marL="285750" indent="-285750">
-              <a:buFont typeface="Arial" panose="020B0604020202020204" pitchFamily="34" charset="0"/>
-              <a:buChar char="•"/>
-            </a:pPr>
-            <a:r>
-              <a:rPr lang="en-US" sz="2000" dirty="0"/>
-              <a:t>Distinct municipal typologies</a:t>
-            </a:r>
-          </a:p>
-          <a:p>
-            <a:pPr marL="285750" indent="-285750">
-              <a:buFont typeface="Arial" panose="020B0604020202020204" pitchFamily="34" charset="0"/>
-              <a:buChar char="•"/>
-            </a:pPr>
-            <a:r>
-              <a:rPr lang="en-US" sz="2000" dirty="0"/>
-              <a:t>Clear regional clustering</a:t>
-            </a:r>
-            <a:br>
-              <a:rPr lang="en-US" sz="2000" dirty="0"/>
-            </a:br>
-            <a:endParaRPr lang="en-US" sz="2000" dirty="0"/>
-          </a:p>
-          <a:p>
-            <a:r>
-              <a:rPr lang="en-US" sz="2000" b="1" dirty="0"/>
-              <a:t>Key result</a:t>
-            </a:r>
-          </a:p>
-          <a:p>
-            <a:pPr marL="285750" indent="-285750">
-              <a:buFont typeface="Arial" panose="020B0604020202020204" pitchFamily="34" charset="0"/>
-              <a:buChar char="•"/>
-            </a:pPr>
-            <a:r>
-              <a:rPr lang="en-US" sz="2000" dirty="0"/>
-              <a:t>Patterns are stable and spatially coherent</a:t>
-            </a:r>
-          </a:p>
-          <a:p>
-            <a:pPr marL="285750" indent="-285750">
-              <a:buFont typeface="Arial" panose="020B0604020202020204" pitchFamily="34" charset="0"/>
-              <a:buChar char="•"/>
-            </a:pPr>
-            <a:r>
-              <a:rPr lang="en-US" sz="2000" dirty="0"/>
-              <a:t>Similar municipalities cluster together </a:t>
-            </a:r>
-          </a:p>
-          <a:p>
-            <a:pPr marL="285750" indent="-285750">
-              <a:buFont typeface="Arial" panose="020B0604020202020204" pitchFamily="34" charset="0"/>
-              <a:buChar char="•"/>
-            </a:pPr>
-            <a:r>
-              <a:rPr lang="en-US" sz="2000" dirty="0"/>
-              <a:t>Neighboring regions share structural characteristics </a:t>
-            </a:r>
-          </a:p>
-          <a:p>
-            <a:pPr marL="285750" indent="-285750">
-              <a:buFont typeface="Arial" panose="020B0604020202020204" pitchFamily="34" charset="0"/>
-              <a:buChar char="•"/>
-            </a:pPr>
-            <a:r>
-              <a:rPr lang="en-US" sz="2000" dirty="0"/>
-              <a:t>Results are consistent across specifications </a:t>
-            </a:r>
-          </a:p>
-          <a:p>
-            <a:br>
-              <a:rPr lang="en-US" sz="2000" dirty="0"/>
-            </a:br>
-            <a:endParaRPr lang="en-US" sz="2000" dirty="0"/>
-          </a:p>
-          <a:p>
-            <a:r>
-              <a:rPr lang="en-US" sz="2000" b="1" dirty="0"/>
-              <a:t>Interpretation</a:t>
-            </a:r>
-          </a:p>
-          <a:p>
-            <a:pPr marL="285750" indent="-285750">
-              <a:buFont typeface="Arial" panose="020B0604020202020204" pitchFamily="34" charset="0"/>
-              <a:buChar char="•"/>
-            </a:pPr>
-            <a:r>
-              <a:rPr lang="en-US" sz="2000" dirty="0"/>
-              <a:t>Population dynamics are spatially structured, not random</a:t>
-            </a:r>
-          </a:p>
-          <a:p>
-            <a:pPr marL="285750" indent="-285750">
-              <a:buFont typeface="Arial" panose="020B0604020202020204" pitchFamily="34" charset="0"/>
-              <a:buChar char="•"/>
-            </a:pPr>
-            <a:r>
-              <a:rPr lang="en-US" sz="2000" dirty="0"/>
-              <a:t>Decline is concentrated in specific regions </a:t>
-            </a:r>
-          </a:p>
-          <a:p>
-            <a:pPr marL="285750" indent="-285750">
-              <a:buFont typeface="Arial" panose="020B0604020202020204" pitchFamily="34" charset="0"/>
-              <a:buChar char="•"/>
-            </a:pPr>
-            <a:r>
-              <a:rPr lang="en-US" sz="2000" dirty="0"/>
-              <a:t>Vulnerability and economic conditions align geographically</a:t>
-            </a:r>
-          </a:p>
-        </p:txBody>
-      </p:sp>
-    </p:spTree>
-    <p:extLst>
-      <p:ext uri="{BB962C8B-B14F-4D97-AF65-F5344CB8AC3E}">
-        <p14:creationId xmlns:p14="http://schemas.microsoft.com/office/powerpoint/2010/main" val="628415208"/>
-      </p:ext>
-    </p:extLst>
-  </p:cSld>
-  <p:clrMapOvr>
-    <a:masterClrMapping/>
-  </p:clrMapOvr>
-</p:sld>
-</file>
-
-<file path=ppt/slides/slide11.xml><?xml version="1.0" encoding="utf-8"?>
 <p:sld xmlns:a="http://schemas.openxmlformats.org/drawingml/2006/main" xmlns:r="http://schemas.openxmlformats.org/officeDocument/2006/relationships" xmlns:p="http://schemas.openxmlformats.org/presentationml/2006/main">
   <p:cSld>
     <p:spTree>
@@ -10630,7 +9347,7 @@
 </p:sld>
 </file>
 
-<file path=ppt/slides/slide12.xml><?xml version="1.0" encoding="utf-8"?>
+<file path=ppt/slides/slide11.xml><?xml version="1.0" encoding="utf-8"?>
 <p:sld xmlns:a="http://schemas.openxmlformats.org/drawingml/2006/main" xmlns:r="http://schemas.openxmlformats.org/officeDocument/2006/relationships" xmlns:p="http://schemas.openxmlformats.org/presentationml/2006/main">
   <p:cSld>
     <p:spTree>
@@ -10940,7 +9657,7 @@
 </p:sld>
 </file>
 
-<file path=ppt/slides/slide13.xml><?xml version="1.0" encoding="utf-8"?>
+<file path=ppt/slides/slide12.xml><?xml version="1.0" encoding="utf-8"?>
 <p:sld xmlns:a="http://schemas.openxmlformats.org/drawingml/2006/main" xmlns:r="http://schemas.openxmlformats.org/officeDocument/2006/relationships" xmlns:p="http://schemas.openxmlformats.org/presentationml/2006/main">
   <p:cSld>
     <p:spTree>
@@ -11122,7 +9839,7 @@
 </p:sld>
 </file>
 
-<file path=ppt/slides/slide14.xml><?xml version="1.0" encoding="utf-8"?>
+<file path=ppt/slides/slide13.xml><?xml version="1.0" encoding="utf-8"?>
 <p:sld xmlns:a="http://schemas.openxmlformats.org/drawingml/2006/main" xmlns:r="http://schemas.openxmlformats.org/officeDocument/2006/relationships" xmlns:p="http://schemas.openxmlformats.org/presentationml/2006/main">
   <p:cSld>
     <p:spTree>
@@ -11304,7 +10021,7 @@
 </p:sld>
 </file>
 
-<file path=ppt/slides/slide15.xml><?xml version="1.0" encoding="utf-8"?>
+<file path=ppt/slides/slide14.xml><?xml version="1.0" encoding="utf-8"?>
 <p:sld xmlns:a="http://schemas.openxmlformats.org/drawingml/2006/main" xmlns:r="http://schemas.openxmlformats.org/officeDocument/2006/relationships" xmlns:p="http://schemas.openxmlformats.org/presentationml/2006/main">
   <p:cSld>
     <p:spTree>
@@ -11486,7 +10203,7 @@
 </p:sld>
 </file>
 
-<file path=ppt/slides/slide16.xml><?xml version="1.0" encoding="utf-8"?>
+<file path=ppt/slides/slide15.xml><?xml version="1.0" encoding="utf-8"?>
 <p:sld xmlns:a="http://schemas.openxmlformats.org/drawingml/2006/main" xmlns:r="http://schemas.openxmlformats.org/officeDocument/2006/relationships" xmlns:p="http://schemas.openxmlformats.org/presentationml/2006/main">
   <p:cSld>
     <p:spTree>
@@ -11634,7 +10351,7 @@
         <p:spPr>
           <a:xfrm>
             <a:off x="132408" y="1612030"/>
-            <a:ext cx="11673769" cy="2262158"/>
+            <a:ext cx="11673769" cy="1384995"/>
           </a:xfrm>
           <a:prstGeom prst="rect">
             <a:avLst/>
@@ -11647,10 +10364,7 @@
           </a:bodyPr>
           <a:lstStyle/>
           <a:p>
-            <a:pPr marL="285750" lvl="0" indent="-285750" eaLnBrk="0" fontAlgn="base" hangingPunct="0">
-              <a:lnSpc>
-                <a:spcPct val="150000"/>
-              </a:lnSpc>
+            <a:pPr marL="342900" lvl="0" indent="-342900" eaLnBrk="0" fontAlgn="base" hangingPunct="0">
               <a:spcBef>
                 <a:spcPct val="0"/>
               </a:spcBef>
@@ -11661,15 +10375,14 @@
               <a:buChar char="•"/>
             </a:pPr>
             <a:r>
-              <a:rPr lang="en-US" altLang="en-US" sz="2400" dirty="0"/>
-              <a:t>Adopt 3-year forward average target (reduces noise, improves signal stability) </a:t>
-            </a:r>
-          </a:p>
-          <a:p>
-            <a:pPr marL="285750" lvl="0" indent="-285750" eaLnBrk="0" fontAlgn="base" hangingPunct="0">
-              <a:lnSpc>
-                <a:spcPct val="150000"/>
-              </a:lnSpc>
+              <a:rPr lang="en-US" altLang="en-US" sz="2800" dirty="0">
+                <a:latin typeface="Arial" panose="020B0604020202020204" pitchFamily="34" charset="0"/>
+              </a:rPr>
+              <a:t>Refine disaster scenarios </a:t>
+            </a:r>
+          </a:p>
+          <a:p>
+            <a:pPr marL="342900" indent="-342900" eaLnBrk="0" fontAlgn="base" hangingPunct="0">
               <a:spcBef>
                 <a:spcPct val="0"/>
               </a:spcBef>
@@ -11680,27 +10393,29 @@
               <a:buChar char="•"/>
             </a:pPr>
             <a:r>
-              <a:rPr lang="en-US" altLang="en-US" sz="2400" dirty="0"/>
-              <a:t>Strengthen validation (time-based cross-validation + robustness checks)</a:t>
-            </a:r>
-          </a:p>
-          <a:p>
-            <a:pPr marL="285750" indent="-285750">
-              <a:lnSpc>
-                <a:spcPct val="150000"/>
-              </a:lnSpc>
+              <a:rPr lang="en-US" altLang="en-US" sz="2800" dirty="0">
+                <a:latin typeface="Arial" panose="020B0604020202020204" pitchFamily="34" charset="0"/>
+              </a:rPr>
+              <a:t>Incorporate results to my website</a:t>
+            </a:r>
+          </a:p>
+          <a:p>
+            <a:pPr marL="342900" lvl="0" indent="-342900" eaLnBrk="0" fontAlgn="base" hangingPunct="0">
+              <a:spcBef>
+                <a:spcPct val="0"/>
+              </a:spcBef>
+              <a:spcAft>
+                <a:spcPct val="0"/>
+              </a:spcAft>
               <a:buFont typeface="Arial" panose="020B0604020202020204" pitchFamily="34" charset="0"/>
               <a:buChar char="•"/>
             </a:pPr>
-            <a:endParaRPr lang="en-US" sz="2400" dirty="0"/>
-          </a:p>
-          <a:p>
-            <a:pPr>
-              <a:lnSpc>
-                <a:spcPct val="150000"/>
-              </a:lnSpc>
-            </a:pPr>
-            <a:endParaRPr lang="en-US" sz="2400" dirty="0"/>
+            <a:r>
+              <a:rPr lang="en-US" altLang="en-US" sz="2800" dirty="0">
+                <a:latin typeface="Arial" panose="020B0604020202020204" pitchFamily="34" charset="0"/>
+              </a:rPr>
+              <a:t>Refine Final Poster</a:t>
+            </a:r>
           </a:p>
         </p:txBody>
       </p:sp>
@@ -11717,7 +10432,7 @@
 </p:sld>
 </file>
 
-<file path=ppt/slides/slide17.xml><?xml version="1.0" encoding="utf-8"?>
+<file path=ppt/slides/slide16.xml><?xml version="1.0" encoding="utf-8"?>
 <p:sld xmlns:a="http://schemas.openxmlformats.org/drawingml/2006/main" xmlns:r="http://schemas.openxmlformats.org/officeDocument/2006/relationships" xmlns:p="http://schemas.openxmlformats.org/presentationml/2006/main">
   <p:cSld>
     <p:spTree>
@@ -11998,7 +10713,7 @@
 </p:sld>
 </file>
 
-<file path=ppt/slides/slide18.xml><?xml version="1.0" encoding="utf-8"?>
+<file path=ppt/slides/slide17.xml><?xml version="1.0" encoding="utf-8"?>
 <p:sld xmlns:a="http://schemas.openxmlformats.org/drawingml/2006/main" xmlns:r="http://schemas.openxmlformats.org/officeDocument/2006/relationships" xmlns:p="http://schemas.openxmlformats.org/presentationml/2006/main">
   <p:cSld>
     <p:spTree>
@@ -12138,7 +10853,7 @@
 </p:sld>
 </file>
 
-<file path=ppt/slides/slide19.xml><?xml version="1.0" encoding="utf-8"?>
+<file path=ppt/slides/slide18.xml><?xml version="1.0" encoding="utf-8"?>
 <p:sld xmlns:a="http://schemas.openxmlformats.org/drawingml/2006/main" xmlns:r="http://schemas.openxmlformats.org/officeDocument/2006/relationships" xmlns:p="http://schemas.openxmlformats.org/presentationml/2006/main">
   <p:cSld>
     <p:spTree>
@@ -12584,470 +11299,7 @@
 </p:sld>
 </file>
 
-<file path=ppt/slides/slide2.xml><?xml version="1.0" encoding="utf-8"?>
-<p:sld xmlns:a="http://schemas.openxmlformats.org/drawingml/2006/main" xmlns:r="http://schemas.openxmlformats.org/officeDocument/2006/relationships" xmlns:p="http://schemas.openxmlformats.org/presentationml/2006/main">
-  <p:cSld>
-    <p:spTree>
-      <p:nvGrpSpPr>
-        <p:cNvPr id="1" name=""/>
-        <p:cNvGrpSpPr/>
-        <p:nvPr/>
-      </p:nvGrpSpPr>
-      <p:grpSpPr>
-        <a:xfrm>
-          <a:off x="0" y="0"/>
-          <a:ext cx="0" cy="0"/>
-          <a:chOff x="0" y="0"/>
-          <a:chExt cx="0" cy="0"/>
-        </a:xfrm>
-      </p:grpSpPr>
-      <p:sp>
-        <p:nvSpPr>
-          <p:cNvPr id="4" name="Rectangle 3">
-            <a:extLst>
-              <a:ext uri="{FF2B5EF4-FFF2-40B4-BE49-F238E27FC236}">
-                <a16:creationId xmlns:a16="http://schemas.microsoft.com/office/drawing/2014/main" id="{BDECE9DE-5569-FB3D-9F3D-4B7D21E06AB8}"/>
-              </a:ext>
-            </a:extLst>
-          </p:cNvPr>
-          <p:cNvSpPr/>
-          <p:nvPr/>
-        </p:nvSpPr>
-        <p:spPr>
-          <a:xfrm>
-            <a:off x="0" y="196343"/>
-            <a:ext cx="7199290" cy="1007423"/>
-          </a:xfrm>
-          <a:prstGeom prst="rect">
-            <a:avLst/>
-          </a:prstGeom>
-          <a:solidFill>
-            <a:srgbClr val="CC0033"/>
-          </a:solidFill>
-          <a:ln>
-            <a:noFill/>
-          </a:ln>
-        </p:spPr>
-        <p:style>
-          <a:lnRef idx="1">
-            <a:schemeClr val="accent1"/>
-          </a:lnRef>
-          <a:fillRef idx="3">
-            <a:schemeClr val="accent1"/>
-          </a:fillRef>
-          <a:effectRef idx="2">
-            <a:schemeClr val="accent1"/>
-          </a:effectRef>
-          <a:fontRef idx="minor">
-            <a:schemeClr val="lt1"/>
-          </a:fontRef>
-        </p:style>
-        <p:txBody>
-          <a:bodyPr rtlCol="0" anchor="ctr"/>
-          <a:lstStyle/>
-          <a:p>
-            <a:pPr algn="ctr"/>
-            <a:endParaRPr lang="en-US" dirty="0">
-              <a:solidFill>
-                <a:schemeClr val="accent1"/>
-              </a:solidFill>
-            </a:endParaRPr>
-          </a:p>
-        </p:txBody>
-      </p:sp>
-      <p:sp>
-        <p:nvSpPr>
-          <p:cNvPr id="5" name="Title 10">
-            <a:extLst>
-              <a:ext uri="{FF2B5EF4-FFF2-40B4-BE49-F238E27FC236}">
-                <a16:creationId xmlns:a16="http://schemas.microsoft.com/office/drawing/2014/main" id="{F782AEBD-D968-67B5-44E1-E37D027F75E9}"/>
-              </a:ext>
-            </a:extLst>
-          </p:cNvPr>
-          <p:cNvSpPr txBox="1">
-            <a:spLocks/>
-          </p:cNvSpPr>
-          <p:nvPr/>
-        </p:nvSpPr>
-        <p:spPr>
-          <a:xfrm>
-            <a:off x="459357" y="361539"/>
-            <a:ext cx="6546750" cy="719563"/>
-          </a:xfrm>
-          <a:prstGeom prst="rect">
-            <a:avLst/>
-          </a:prstGeom>
-        </p:spPr>
-        <p:txBody>
-          <a:bodyPr anchor="ctr" anchorCtr="0">
-            <a:noAutofit/>
-          </a:bodyPr>
-          <a:lstStyle>
-            <a:lvl1pPr algn="ctr" defTabSz="457200" rtl="0" eaLnBrk="1" latinLnBrk="0" hangingPunct="1">
-              <a:spcBef>
-                <a:spcPct val="0"/>
-              </a:spcBef>
-              <a:buNone/>
-              <a:defRPr sz="4400" kern="1200">
-                <a:solidFill>
-                  <a:schemeClr val="tx1"/>
-                </a:solidFill>
-                <a:latin typeface="+mj-lt"/>
-                <a:ea typeface="+mj-ea"/>
-                <a:cs typeface="+mj-cs"/>
-              </a:defRPr>
-            </a:lvl1pPr>
-          </a:lstStyle>
-          <a:p>
-            <a:pPr lvl="0"/>
-            <a:r>
-              <a:rPr lang="en-US" b="1" dirty="0">
-                <a:solidFill>
-                  <a:schemeClr val="bg1"/>
-                </a:solidFill>
-              </a:rPr>
-              <a:t>Problem &amp; Objective </a:t>
-            </a:r>
-          </a:p>
-        </p:txBody>
-      </p:sp>
-      <p:sp>
-        <p:nvSpPr>
-          <p:cNvPr id="11" name="TextBox 10">
-            <a:extLst>
-              <a:ext uri="{FF2B5EF4-FFF2-40B4-BE49-F238E27FC236}">
-                <a16:creationId xmlns:a16="http://schemas.microsoft.com/office/drawing/2014/main" id="{39E0F022-DCC0-E84E-EDEB-7B39259B385C}"/>
-              </a:ext>
-            </a:extLst>
-          </p:cNvPr>
-          <p:cNvSpPr txBox="1"/>
-          <p:nvPr/>
-        </p:nvSpPr>
-        <p:spPr>
-          <a:xfrm>
-            <a:off x="139613" y="1368962"/>
-            <a:ext cx="11484828" cy="5247590"/>
-          </a:xfrm>
-          <a:prstGeom prst="rect">
-            <a:avLst/>
-          </a:prstGeom>
-          <a:noFill/>
-        </p:spPr>
-        <p:txBody>
-          <a:bodyPr wrap="square">
-            <a:spAutoFit/>
-          </a:bodyPr>
-          <a:lstStyle/>
-          <a:p>
-            <a:pPr marL="285750" indent="-285750" fontAlgn="base">
-              <a:lnSpc>
-                <a:spcPct val="150000"/>
-              </a:lnSpc>
-              <a:buFont typeface="Arial" panose="020B0604020202020204" pitchFamily="34" charset="0"/>
-              <a:buChar char="•"/>
-            </a:pPr>
-            <a:r>
-              <a:rPr lang="en-US" sz="1400" b="1" dirty="0">
-                <a:latin typeface="Merriweather" pitchFamily="2" charset="77"/>
-              </a:rPr>
-              <a:t>Research Problem: </a:t>
-            </a:r>
-            <a:r>
-              <a:rPr lang="en-US" sz="1400" dirty="0">
-                <a:latin typeface="Merriweather" pitchFamily="2" charset="77"/>
-              </a:rPr>
-              <a:t>Puerto Rico has experienced </a:t>
-            </a:r>
-            <a:r>
-              <a:rPr lang="en-US" sz="1400" i="1" dirty="0">
-                <a:latin typeface="Merriweather" pitchFamily="2" charset="77"/>
-              </a:rPr>
-              <a:t>significant population decline and regional vulnerability </a:t>
-            </a:r>
-            <a:r>
-              <a:rPr lang="en-US" sz="1400" dirty="0">
-                <a:latin typeface="Merriweather" pitchFamily="2" charset="77"/>
-              </a:rPr>
-              <a:t>driven by economic conditions, natural disasters, and social factors</a:t>
-            </a:r>
-          </a:p>
-          <a:p>
-            <a:pPr marL="285750" indent="-285750" fontAlgn="base">
-              <a:lnSpc>
-                <a:spcPct val="150000"/>
-              </a:lnSpc>
-              <a:buFont typeface="Arial" panose="020B0604020202020204" pitchFamily="34" charset="0"/>
-              <a:buChar char="•"/>
-            </a:pPr>
-            <a:endParaRPr lang="en-US" sz="1400" dirty="0">
-              <a:latin typeface="Merriweather" pitchFamily="2" charset="77"/>
-            </a:endParaRPr>
-          </a:p>
-          <a:p>
-            <a:pPr marL="285750" indent="-285750" fontAlgn="base">
-              <a:lnSpc>
-                <a:spcPct val="150000"/>
-              </a:lnSpc>
-              <a:buFont typeface="Arial" panose="020B0604020202020204" pitchFamily="34" charset="0"/>
-              <a:buChar char="•"/>
-            </a:pPr>
-            <a:r>
-              <a:rPr lang="en-US" sz="1400" b="1" dirty="0">
-                <a:latin typeface="Merriweather" pitchFamily="2" charset="77"/>
-              </a:rPr>
-              <a:t>Objective: </a:t>
-            </a:r>
-            <a:r>
-              <a:rPr lang="en-US" sz="1400" dirty="0">
-                <a:latin typeface="Merriweather" pitchFamily="2" charset="77"/>
-              </a:rPr>
-              <a:t>Develop a </a:t>
-            </a:r>
-            <a:r>
-              <a:rPr lang="en-US" sz="1400" b="1" i="1" dirty="0">
-                <a:latin typeface="Merriweather" pitchFamily="2" charset="77"/>
-              </a:rPr>
-              <a:t>data-driven framework</a:t>
-            </a:r>
-            <a:r>
-              <a:rPr lang="en-US" sz="1400" i="1" dirty="0">
-                <a:latin typeface="Merriweather" pitchFamily="2" charset="77"/>
-              </a:rPr>
-              <a:t> </a:t>
-            </a:r>
-            <a:r>
-              <a:rPr lang="en-US" sz="1400" dirty="0">
-                <a:latin typeface="Merriweather" pitchFamily="2" charset="77"/>
-              </a:rPr>
-              <a:t>to:</a:t>
-            </a:r>
-          </a:p>
-          <a:p>
-            <a:pPr marL="742950" lvl="1" indent="-285750" fontAlgn="base">
-              <a:lnSpc>
-                <a:spcPct val="150000"/>
-              </a:lnSpc>
-              <a:buFont typeface="Arial" panose="020B0604020202020204" pitchFamily="34" charset="0"/>
-              <a:buChar char="•"/>
-            </a:pPr>
-            <a:r>
-              <a:rPr lang="en-US" sz="1400" dirty="0">
-                <a:latin typeface="Merriweather" pitchFamily="2" charset="77"/>
-              </a:rPr>
-              <a:t>Model municipal and regional population change</a:t>
-            </a:r>
-          </a:p>
-          <a:p>
-            <a:pPr marL="742950" lvl="1" indent="-285750" fontAlgn="base">
-              <a:lnSpc>
-                <a:spcPct val="150000"/>
-              </a:lnSpc>
-              <a:buFont typeface="Arial" panose="020B0604020202020204" pitchFamily="34" charset="0"/>
-              <a:buChar char="•"/>
-            </a:pPr>
-            <a:r>
-              <a:rPr lang="en-US" sz="1400" dirty="0">
-                <a:latin typeface="Merriweather" pitchFamily="2" charset="77"/>
-              </a:rPr>
-              <a:t>Identify drivers of demographic decline</a:t>
-            </a:r>
-          </a:p>
-          <a:p>
-            <a:pPr marL="742950" lvl="1" indent="-285750" fontAlgn="base">
-              <a:lnSpc>
-                <a:spcPct val="150000"/>
-              </a:lnSpc>
-              <a:buFont typeface="Arial" panose="020B0604020202020204" pitchFamily="34" charset="0"/>
-              <a:buChar char="•"/>
-            </a:pPr>
-            <a:r>
-              <a:rPr lang="en-US" sz="1400" dirty="0">
-                <a:latin typeface="Merriweather" pitchFamily="2" charset="77"/>
-              </a:rPr>
-              <a:t>Detect structural municipal vulnerability patterns</a:t>
-            </a:r>
-          </a:p>
-          <a:p>
-            <a:pPr marL="742950" lvl="1" indent="-285750" fontAlgn="base">
-              <a:lnSpc>
-                <a:spcPct val="150000"/>
-              </a:lnSpc>
-              <a:buFont typeface="Arial" panose="020B0604020202020204" pitchFamily="34" charset="0"/>
-              <a:buChar char="•"/>
-            </a:pPr>
-            <a:r>
-              <a:rPr lang="en-US" sz="1400" dirty="0">
-                <a:latin typeface="Merriweather" pitchFamily="2" charset="77"/>
-              </a:rPr>
-              <a:t>Produce population forecasts and typologies</a:t>
-            </a:r>
-          </a:p>
-          <a:p>
-            <a:pPr marL="742950" lvl="1" indent="-285750" fontAlgn="base">
-              <a:lnSpc>
-                <a:spcPct val="150000"/>
-              </a:lnSpc>
-              <a:buFont typeface="Arial" panose="020B0604020202020204" pitchFamily="34" charset="0"/>
-              <a:buChar char="•"/>
-            </a:pPr>
-            <a:endParaRPr lang="en-US" sz="1400" dirty="0">
-              <a:latin typeface="Merriweather" pitchFamily="2" charset="77"/>
-            </a:endParaRPr>
-          </a:p>
-          <a:p>
-            <a:pPr marL="285750" indent="-285750" fontAlgn="base">
-              <a:lnSpc>
-                <a:spcPct val="150000"/>
-              </a:lnSpc>
-              <a:buFont typeface="Arial" panose="020B0604020202020204" pitchFamily="34" charset="0"/>
-              <a:buChar char="•"/>
-            </a:pPr>
-            <a:r>
-              <a:rPr lang="en-US" sz="1400" b="1" dirty="0">
-                <a:latin typeface="Merriweather" pitchFamily="2" charset="77"/>
-              </a:rPr>
-              <a:t>Success Criteria</a:t>
-            </a:r>
-          </a:p>
-          <a:p>
-            <a:pPr marL="742950" lvl="1" indent="-285750" fontAlgn="base">
-              <a:lnSpc>
-                <a:spcPct val="150000"/>
-              </a:lnSpc>
-              <a:buFont typeface="Arial" panose="020B0604020202020204" pitchFamily="34" charset="0"/>
-              <a:buChar char="•"/>
-            </a:pPr>
-            <a:r>
-              <a:rPr lang="en-US" sz="1400" dirty="0">
-                <a:latin typeface="Merriweather" pitchFamily="2" charset="77"/>
-              </a:rPr>
-              <a:t>Predict population change with reasonable accuracy</a:t>
-            </a:r>
-          </a:p>
-          <a:p>
-            <a:pPr marL="742950" lvl="1" indent="-285750" fontAlgn="base">
-              <a:lnSpc>
-                <a:spcPct val="150000"/>
-              </a:lnSpc>
-              <a:buFont typeface="Arial" panose="020B0604020202020204" pitchFamily="34" charset="0"/>
-              <a:buChar char="•"/>
-            </a:pPr>
-            <a:r>
-              <a:rPr lang="en-US" sz="1400" dirty="0">
-                <a:latin typeface="Merriweather" pitchFamily="2" charset="77"/>
-              </a:rPr>
-              <a:t>Identify key drivers </a:t>
-            </a:r>
-          </a:p>
-          <a:p>
-            <a:pPr marL="742950" lvl="1" indent="-285750" fontAlgn="base">
-              <a:lnSpc>
-                <a:spcPct val="150000"/>
-              </a:lnSpc>
-              <a:buFont typeface="Arial" panose="020B0604020202020204" pitchFamily="34" charset="0"/>
-              <a:buChar char="•"/>
-            </a:pPr>
-            <a:r>
-              <a:rPr lang="en-US" sz="1400" dirty="0">
-                <a:latin typeface="Merriweather" pitchFamily="2" charset="77"/>
-              </a:rPr>
-              <a:t>Detect clusters/regions with similar vulnerability profiles</a:t>
-            </a:r>
-          </a:p>
-          <a:p>
-            <a:pPr marL="742950" lvl="1" indent="-285750" fontAlgn="base">
-              <a:lnSpc>
-                <a:spcPct val="150000"/>
-              </a:lnSpc>
-              <a:buFont typeface="Arial" panose="020B0604020202020204" pitchFamily="34" charset="0"/>
-              <a:buChar char="•"/>
-            </a:pPr>
-            <a:endParaRPr lang="en-US" sz="1400" dirty="0">
-              <a:latin typeface="Merriweather" pitchFamily="2" charset="77"/>
-            </a:endParaRPr>
-          </a:p>
-          <a:p>
-            <a:pPr marL="285750" indent="-285750" fontAlgn="base">
-              <a:lnSpc>
-                <a:spcPct val="150000"/>
-              </a:lnSpc>
-              <a:buFont typeface="Arial" panose="020B0604020202020204" pitchFamily="34" charset="0"/>
-              <a:buChar char="•"/>
-            </a:pPr>
-            <a:r>
-              <a:rPr lang="en-US" sz="1400" b="1" dirty="0">
-                <a:latin typeface="Merriweather" pitchFamily="2" charset="77"/>
-              </a:rPr>
-              <a:t>This week, I worked on extend modeling to scenario-based forecasting under disasters</a:t>
-            </a:r>
-          </a:p>
-          <a:p>
-            <a:pPr marL="285750" indent="-285750" fontAlgn="base">
-              <a:buFont typeface="Arial" panose="020B0604020202020204" pitchFamily="34" charset="0"/>
-              <a:buChar char="•"/>
-            </a:pPr>
-            <a:endParaRPr lang="en-US" sz="1400" dirty="0">
-              <a:solidFill>
-                <a:srgbClr val="000000"/>
-              </a:solidFill>
-              <a:latin typeface="Merriweather" pitchFamily="2" charset="77"/>
-              <a:ea typeface="Arial"/>
-              <a:cs typeface="Arial"/>
-              <a:sym typeface="Arial"/>
-            </a:endParaRPr>
-          </a:p>
-        </p:txBody>
-      </p:sp>
-      <p:pic>
-        <p:nvPicPr>
-          <p:cNvPr id="9" name="Picture 8" descr="A map of puerto rico with a graph and a chart&#10;&#10;AI-generated content may be incorrect.">
-            <a:extLst>
-              <a:ext uri="{FF2B5EF4-FFF2-40B4-BE49-F238E27FC236}">
-                <a16:creationId xmlns:a16="http://schemas.microsoft.com/office/drawing/2014/main" id="{127A0D1B-B23D-7AB3-2172-9CE8952C180B}"/>
-              </a:ext>
-            </a:extLst>
-          </p:cNvPr>
-          <p:cNvPicPr>
-            <a:picLocks noChangeAspect="1"/>
-          </p:cNvPicPr>
-          <p:nvPr/>
-        </p:nvPicPr>
-        <p:blipFill>
-          <a:blip r:embed="rId2">
-            <a:extLst>
-              <a:ext uri="{28A0092B-C50C-407E-A947-70E740481C1C}">
-                <a14:useLocalDpi xmlns:a14="http://schemas.microsoft.com/office/drawing/2010/main" val="0"/>
-              </a:ext>
-            </a:extLst>
-          </a:blip>
-          <a:stretch>
-            <a:fillRect/>
-          </a:stretch>
-        </p:blipFill>
-        <p:spPr>
-          <a:xfrm>
-            <a:off x="6888987" y="2052133"/>
-            <a:ext cx="4517551" cy="3316132"/>
-          </a:xfrm>
-          <a:prstGeom prst="rect">
-            <a:avLst/>
-          </a:prstGeom>
-        </p:spPr>
-      </p:pic>
-    </p:spTree>
-    <p:extLst>
-      <p:ext uri="{BB962C8B-B14F-4D97-AF65-F5344CB8AC3E}">
-        <p14:creationId xmlns:p14="http://schemas.microsoft.com/office/powerpoint/2010/main" val="356348516"/>
-      </p:ext>
-    </p:extLst>
-  </p:cSld>
-  <p:clrMapOvr>
-    <a:masterClrMapping/>
-  </p:clrMapOvr>
-</p:sld>
-</file>
-
-<file path=ppt/slides/slide20.xml><?xml version="1.0" encoding="utf-8"?>
+<file path=ppt/slides/slide19.xml><?xml version="1.0" encoding="utf-8"?>
 <p:sld xmlns:a="http://schemas.openxmlformats.org/drawingml/2006/main" xmlns:r="http://schemas.openxmlformats.org/officeDocument/2006/relationships" xmlns:p="http://schemas.openxmlformats.org/presentationml/2006/main">
   <p:cSld>
     <p:spTree>
@@ -13810,7 +12062,470 @@
 </p:sld>
 </file>
 
-<file path=ppt/slides/slide21.xml><?xml version="1.0" encoding="utf-8"?>
+<file path=ppt/slides/slide2.xml><?xml version="1.0" encoding="utf-8"?>
+<p:sld xmlns:a="http://schemas.openxmlformats.org/drawingml/2006/main" xmlns:r="http://schemas.openxmlformats.org/officeDocument/2006/relationships" xmlns:p="http://schemas.openxmlformats.org/presentationml/2006/main">
+  <p:cSld>
+    <p:spTree>
+      <p:nvGrpSpPr>
+        <p:cNvPr id="1" name=""/>
+        <p:cNvGrpSpPr/>
+        <p:nvPr/>
+      </p:nvGrpSpPr>
+      <p:grpSpPr>
+        <a:xfrm>
+          <a:off x="0" y="0"/>
+          <a:ext cx="0" cy="0"/>
+          <a:chOff x="0" y="0"/>
+          <a:chExt cx="0" cy="0"/>
+        </a:xfrm>
+      </p:grpSpPr>
+      <p:sp>
+        <p:nvSpPr>
+          <p:cNvPr id="4" name="Rectangle 3">
+            <a:extLst>
+              <a:ext uri="{FF2B5EF4-FFF2-40B4-BE49-F238E27FC236}">
+                <a16:creationId xmlns:a16="http://schemas.microsoft.com/office/drawing/2014/main" id="{BDECE9DE-5569-FB3D-9F3D-4B7D21E06AB8}"/>
+              </a:ext>
+            </a:extLst>
+          </p:cNvPr>
+          <p:cNvSpPr/>
+          <p:nvPr/>
+        </p:nvSpPr>
+        <p:spPr>
+          <a:xfrm>
+            <a:off x="0" y="196343"/>
+            <a:ext cx="7199290" cy="1007423"/>
+          </a:xfrm>
+          <a:prstGeom prst="rect">
+            <a:avLst/>
+          </a:prstGeom>
+          <a:solidFill>
+            <a:srgbClr val="CC0033"/>
+          </a:solidFill>
+          <a:ln>
+            <a:noFill/>
+          </a:ln>
+        </p:spPr>
+        <p:style>
+          <a:lnRef idx="1">
+            <a:schemeClr val="accent1"/>
+          </a:lnRef>
+          <a:fillRef idx="3">
+            <a:schemeClr val="accent1"/>
+          </a:fillRef>
+          <a:effectRef idx="2">
+            <a:schemeClr val="accent1"/>
+          </a:effectRef>
+          <a:fontRef idx="minor">
+            <a:schemeClr val="lt1"/>
+          </a:fontRef>
+        </p:style>
+        <p:txBody>
+          <a:bodyPr rtlCol="0" anchor="ctr"/>
+          <a:lstStyle/>
+          <a:p>
+            <a:pPr algn="ctr"/>
+            <a:endParaRPr lang="en-US" dirty="0">
+              <a:solidFill>
+                <a:schemeClr val="accent1"/>
+              </a:solidFill>
+            </a:endParaRPr>
+          </a:p>
+        </p:txBody>
+      </p:sp>
+      <p:sp>
+        <p:nvSpPr>
+          <p:cNvPr id="5" name="Title 10">
+            <a:extLst>
+              <a:ext uri="{FF2B5EF4-FFF2-40B4-BE49-F238E27FC236}">
+                <a16:creationId xmlns:a16="http://schemas.microsoft.com/office/drawing/2014/main" id="{F782AEBD-D968-67B5-44E1-E37D027F75E9}"/>
+              </a:ext>
+            </a:extLst>
+          </p:cNvPr>
+          <p:cNvSpPr txBox="1">
+            <a:spLocks/>
+          </p:cNvSpPr>
+          <p:nvPr/>
+        </p:nvSpPr>
+        <p:spPr>
+          <a:xfrm>
+            <a:off x="459357" y="361539"/>
+            <a:ext cx="6546750" cy="719563"/>
+          </a:xfrm>
+          <a:prstGeom prst="rect">
+            <a:avLst/>
+          </a:prstGeom>
+        </p:spPr>
+        <p:txBody>
+          <a:bodyPr anchor="ctr" anchorCtr="0">
+            <a:noAutofit/>
+          </a:bodyPr>
+          <a:lstStyle>
+            <a:lvl1pPr algn="ctr" defTabSz="457200" rtl="0" eaLnBrk="1" latinLnBrk="0" hangingPunct="1">
+              <a:spcBef>
+                <a:spcPct val="0"/>
+              </a:spcBef>
+              <a:buNone/>
+              <a:defRPr sz="4400" kern="1200">
+                <a:solidFill>
+                  <a:schemeClr val="tx1"/>
+                </a:solidFill>
+                <a:latin typeface="+mj-lt"/>
+                <a:ea typeface="+mj-ea"/>
+                <a:cs typeface="+mj-cs"/>
+              </a:defRPr>
+            </a:lvl1pPr>
+          </a:lstStyle>
+          <a:p>
+            <a:pPr lvl="0"/>
+            <a:r>
+              <a:rPr lang="en-US" b="1" dirty="0">
+                <a:solidFill>
+                  <a:schemeClr val="bg1"/>
+                </a:solidFill>
+              </a:rPr>
+              <a:t>Problem &amp; Objective </a:t>
+            </a:r>
+          </a:p>
+        </p:txBody>
+      </p:sp>
+      <p:sp>
+        <p:nvSpPr>
+          <p:cNvPr id="11" name="TextBox 10">
+            <a:extLst>
+              <a:ext uri="{FF2B5EF4-FFF2-40B4-BE49-F238E27FC236}">
+                <a16:creationId xmlns:a16="http://schemas.microsoft.com/office/drawing/2014/main" id="{39E0F022-DCC0-E84E-EDEB-7B39259B385C}"/>
+              </a:ext>
+            </a:extLst>
+          </p:cNvPr>
+          <p:cNvSpPr txBox="1"/>
+          <p:nvPr/>
+        </p:nvSpPr>
+        <p:spPr>
+          <a:xfrm>
+            <a:off x="139613" y="1368962"/>
+            <a:ext cx="11484828" cy="5247590"/>
+          </a:xfrm>
+          <a:prstGeom prst="rect">
+            <a:avLst/>
+          </a:prstGeom>
+          <a:noFill/>
+        </p:spPr>
+        <p:txBody>
+          <a:bodyPr wrap="square">
+            <a:spAutoFit/>
+          </a:bodyPr>
+          <a:lstStyle/>
+          <a:p>
+            <a:pPr marL="285750" indent="-285750" fontAlgn="base">
+              <a:lnSpc>
+                <a:spcPct val="150000"/>
+              </a:lnSpc>
+              <a:buFont typeface="Arial" panose="020B0604020202020204" pitchFamily="34" charset="0"/>
+              <a:buChar char="•"/>
+            </a:pPr>
+            <a:r>
+              <a:rPr lang="en-US" sz="1400" b="1" dirty="0">
+                <a:latin typeface="Merriweather" pitchFamily="2" charset="77"/>
+              </a:rPr>
+              <a:t>Research Problem: </a:t>
+            </a:r>
+            <a:r>
+              <a:rPr lang="en-US" sz="1400" dirty="0">
+                <a:latin typeface="Merriweather" pitchFamily="2" charset="77"/>
+              </a:rPr>
+              <a:t>Puerto Rico has experienced </a:t>
+            </a:r>
+            <a:r>
+              <a:rPr lang="en-US" sz="1400" i="1" dirty="0">
+                <a:latin typeface="Merriweather" pitchFamily="2" charset="77"/>
+              </a:rPr>
+              <a:t>significant population decline and regional vulnerability </a:t>
+            </a:r>
+            <a:r>
+              <a:rPr lang="en-US" sz="1400" dirty="0">
+                <a:latin typeface="Merriweather" pitchFamily="2" charset="77"/>
+              </a:rPr>
+              <a:t>driven by economic conditions, natural disasters, and social factors</a:t>
+            </a:r>
+          </a:p>
+          <a:p>
+            <a:pPr marL="285750" indent="-285750" fontAlgn="base">
+              <a:lnSpc>
+                <a:spcPct val="150000"/>
+              </a:lnSpc>
+              <a:buFont typeface="Arial" panose="020B0604020202020204" pitchFamily="34" charset="0"/>
+              <a:buChar char="•"/>
+            </a:pPr>
+            <a:endParaRPr lang="en-US" sz="1400" dirty="0">
+              <a:latin typeface="Merriweather" pitchFamily="2" charset="77"/>
+            </a:endParaRPr>
+          </a:p>
+          <a:p>
+            <a:pPr marL="285750" indent="-285750" fontAlgn="base">
+              <a:lnSpc>
+                <a:spcPct val="150000"/>
+              </a:lnSpc>
+              <a:buFont typeface="Arial" panose="020B0604020202020204" pitchFamily="34" charset="0"/>
+              <a:buChar char="•"/>
+            </a:pPr>
+            <a:r>
+              <a:rPr lang="en-US" sz="1400" b="1" dirty="0">
+                <a:latin typeface="Merriweather" pitchFamily="2" charset="77"/>
+              </a:rPr>
+              <a:t>Objective: </a:t>
+            </a:r>
+            <a:r>
+              <a:rPr lang="en-US" sz="1400" dirty="0">
+                <a:latin typeface="Merriweather" pitchFamily="2" charset="77"/>
+              </a:rPr>
+              <a:t>Develop a </a:t>
+            </a:r>
+            <a:r>
+              <a:rPr lang="en-US" sz="1400" b="1" i="1" dirty="0">
+                <a:latin typeface="Merriweather" pitchFamily="2" charset="77"/>
+              </a:rPr>
+              <a:t>data-driven framework</a:t>
+            </a:r>
+            <a:r>
+              <a:rPr lang="en-US" sz="1400" i="1" dirty="0">
+                <a:latin typeface="Merriweather" pitchFamily="2" charset="77"/>
+              </a:rPr>
+              <a:t> </a:t>
+            </a:r>
+            <a:r>
+              <a:rPr lang="en-US" sz="1400" dirty="0">
+                <a:latin typeface="Merriweather" pitchFamily="2" charset="77"/>
+              </a:rPr>
+              <a:t>to:</a:t>
+            </a:r>
+          </a:p>
+          <a:p>
+            <a:pPr marL="742950" lvl="1" indent="-285750" fontAlgn="base">
+              <a:lnSpc>
+                <a:spcPct val="150000"/>
+              </a:lnSpc>
+              <a:buFont typeface="Arial" panose="020B0604020202020204" pitchFamily="34" charset="0"/>
+              <a:buChar char="•"/>
+            </a:pPr>
+            <a:r>
+              <a:rPr lang="en-US" sz="1400" dirty="0">
+                <a:latin typeface="Merriweather" pitchFamily="2" charset="77"/>
+              </a:rPr>
+              <a:t>Model municipal and regional population change</a:t>
+            </a:r>
+          </a:p>
+          <a:p>
+            <a:pPr marL="742950" lvl="1" indent="-285750" fontAlgn="base">
+              <a:lnSpc>
+                <a:spcPct val="150000"/>
+              </a:lnSpc>
+              <a:buFont typeface="Arial" panose="020B0604020202020204" pitchFamily="34" charset="0"/>
+              <a:buChar char="•"/>
+            </a:pPr>
+            <a:r>
+              <a:rPr lang="en-US" sz="1400" dirty="0">
+                <a:latin typeface="Merriweather" pitchFamily="2" charset="77"/>
+              </a:rPr>
+              <a:t>Identify drivers of demographic decline</a:t>
+            </a:r>
+          </a:p>
+          <a:p>
+            <a:pPr marL="742950" lvl="1" indent="-285750" fontAlgn="base">
+              <a:lnSpc>
+                <a:spcPct val="150000"/>
+              </a:lnSpc>
+              <a:buFont typeface="Arial" panose="020B0604020202020204" pitchFamily="34" charset="0"/>
+              <a:buChar char="•"/>
+            </a:pPr>
+            <a:r>
+              <a:rPr lang="en-US" sz="1400" dirty="0">
+                <a:latin typeface="Merriweather" pitchFamily="2" charset="77"/>
+              </a:rPr>
+              <a:t>Detect structural municipal vulnerability patterns</a:t>
+            </a:r>
+          </a:p>
+          <a:p>
+            <a:pPr marL="742950" lvl="1" indent="-285750" fontAlgn="base">
+              <a:lnSpc>
+                <a:spcPct val="150000"/>
+              </a:lnSpc>
+              <a:buFont typeface="Arial" panose="020B0604020202020204" pitchFamily="34" charset="0"/>
+              <a:buChar char="•"/>
+            </a:pPr>
+            <a:r>
+              <a:rPr lang="en-US" sz="1400" dirty="0">
+                <a:latin typeface="Merriweather" pitchFamily="2" charset="77"/>
+              </a:rPr>
+              <a:t>Produce population forecasts and typologies</a:t>
+            </a:r>
+          </a:p>
+          <a:p>
+            <a:pPr marL="742950" lvl="1" indent="-285750" fontAlgn="base">
+              <a:lnSpc>
+                <a:spcPct val="150000"/>
+              </a:lnSpc>
+              <a:buFont typeface="Arial" panose="020B0604020202020204" pitchFamily="34" charset="0"/>
+              <a:buChar char="•"/>
+            </a:pPr>
+            <a:endParaRPr lang="en-US" sz="1400" dirty="0">
+              <a:latin typeface="Merriweather" pitchFamily="2" charset="77"/>
+            </a:endParaRPr>
+          </a:p>
+          <a:p>
+            <a:pPr marL="285750" indent="-285750" fontAlgn="base">
+              <a:lnSpc>
+                <a:spcPct val="150000"/>
+              </a:lnSpc>
+              <a:buFont typeface="Arial" panose="020B0604020202020204" pitchFamily="34" charset="0"/>
+              <a:buChar char="•"/>
+            </a:pPr>
+            <a:r>
+              <a:rPr lang="en-US" sz="1400" b="1" dirty="0">
+                <a:latin typeface="Merriweather" pitchFamily="2" charset="77"/>
+              </a:rPr>
+              <a:t>Success Criteria</a:t>
+            </a:r>
+          </a:p>
+          <a:p>
+            <a:pPr marL="742950" lvl="1" indent="-285750" fontAlgn="base">
+              <a:lnSpc>
+                <a:spcPct val="150000"/>
+              </a:lnSpc>
+              <a:buFont typeface="Arial" panose="020B0604020202020204" pitchFamily="34" charset="0"/>
+              <a:buChar char="•"/>
+            </a:pPr>
+            <a:r>
+              <a:rPr lang="en-US" sz="1400" dirty="0">
+                <a:latin typeface="Merriweather" pitchFamily="2" charset="77"/>
+              </a:rPr>
+              <a:t>Predict population change with reasonable accuracy</a:t>
+            </a:r>
+          </a:p>
+          <a:p>
+            <a:pPr marL="742950" lvl="1" indent="-285750" fontAlgn="base">
+              <a:lnSpc>
+                <a:spcPct val="150000"/>
+              </a:lnSpc>
+              <a:buFont typeface="Arial" panose="020B0604020202020204" pitchFamily="34" charset="0"/>
+              <a:buChar char="•"/>
+            </a:pPr>
+            <a:r>
+              <a:rPr lang="en-US" sz="1400" dirty="0">
+                <a:latin typeface="Merriweather" pitchFamily="2" charset="77"/>
+              </a:rPr>
+              <a:t>Identify key drivers </a:t>
+            </a:r>
+          </a:p>
+          <a:p>
+            <a:pPr marL="742950" lvl="1" indent="-285750" fontAlgn="base">
+              <a:lnSpc>
+                <a:spcPct val="150000"/>
+              </a:lnSpc>
+              <a:buFont typeface="Arial" panose="020B0604020202020204" pitchFamily="34" charset="0"/>
+              <a:buChar char="•"/>
+            </a:pPr>
+            <a:r>
+              <a:rPr lang="en-US" sz="1400" dirty="0">
+                <a:latin typeface="Merriweather" pitchFamily="2" charset="77"/>
+              </a:rPr>
+              <a:t>Detect clusters/regions with similar vulnerability profiles</a:t>
+            </a:r>
+          </a:p>
+          <a:p>
+            <a:pPr marL="742950" lvl="1" indent="-285750" fontAlgn="base">
+              <a:lnSpc>
+                <a:spcPct val="150000"/>
+              </a:lnSpc>
+              <a:buFont typeface="Arial" panose="020B0604020202020204" pitchFamily="34" charset="0"/>
+              <a:buChar char="•"/>
+            </a:pPr>
+            <a:endParaRPr lang="en-US" sz="1400" dirty="0">
+              <a:latin typeface="Merriweather" pitchFamily="2" charset="77"/>
+            </a:endParaRPr>
+          </a:p>
+          <a:p>
+            <a:pPr marL="285750" indent="-285750" fontAlgn="base">
+              <a:lnSpc>
+                <a:spcPct val="150000"/>
+              </a:lnSpc>
+              <a:buFont typeface="Arial" panose="020B0604020202020204" pitchFamily="34" charset="0"/>
+              <a:buChar char="•"/>
+            </a:pPr>
+            <a:r>
+              <a:rPr lang="en-US" sz="1400" b="1" dirty="0">
+                <a:latin typeface="Merriweather" pitchFamily="2" charset="77"/>
+              </a:rPr>
+              <a:t>This week, I worked on extend modeling to scenario-based forecasting under disasters</a:t>
+            </a:r>
+          </a:p>
+          <a:p>
+            <a:pPr marL="285750" indent="-285750" fontAlgn="base">
+              <a:buFont typeface="Arial" panose="020B0604020202020204" pitchFamily="34" charset="0"/>
+              <a:buChar char="•"/>
+            </a:pPr>
+            <a:endParaRPr lang="en-US" sz="1400" dirty="0">
+              <a:solidFill>
+                <a:srgbClr val="000000"/>
+              </a:solidFill>
+              <a:latin typeface="Merriweather" pitchFamily="2" charset="77"/>
+              <a:ea typeface="Arial"/>
+              <a:cs typeface="Arial"/>
+              <a:sym typeface="Arial"/>
+            </a:endParaRPr>
+          </a:p>
+        </p:txBody>
+      </p:sp>
+      <p:pic>
+        <p:nvPicPr>
+          <p:cNvPr id="9" name="Picture 8" descr="A map of puerto rico with a graph and a chart&#10;&#10;AI-generated content may be incorrect.">
+            <a:extLst>
+              <a:ext uri="{FF2B5EF4-FFF2-40B4-BE49-F238E27FC236}">
+                <a16:creationId xmlns:a16="http://schemas.microsoft.com/office/drawing/2014/main" id="{127A0D1B-B23D-7AB3-2172-9CE8952C180B}"/>
+              </a:ext>
+            </a:extLst>
+          </p:cNvPr>
+          <p:cNvPicPr>
+            <a:picLocks noChangeAspect="1"/>
+          </p:cNvPicPr>
+          <p:nvPr/>
+        </p:nvPicPr>
+        <p:blipFill>
+          <a:blip r:embed="rId2">
+            <a:extLst>
+              <a:ext uri="{28A0092B-C50C-407E-A947-70E740481C1C}">
+                <a14:useLocalDpi xmlns:a14="http://schemas.microsoft.com/office/drawing/2010/main" val="0"/>
+              </a:ext>
+            </a:extLst>
+          </a:blip>
+          <a:stretch>
+            <a:fillRect/>
+          </a:stretch>
+        </p:blipFill>
+        <p:spPr>
+          <a:xfrm>
+            <a:off x="6888987" y="2052133"/>
+            <a:ext cx="4517551" cy="3316132"/>
+          </a:xfrm>
+          <a:prstGeom prst="rect">
+            <a:avLst/>
+          </a:prstGeom>
+        </p:spPr>
+      </p:pic>
+    </p:spTree>
+    <p:extLst>
+      <p:ext uri="{BB962C8B-B14F-4D97-AF65-F5344CB8AC3E}">
+        <p14:creationId xmlns:p14="http://schemas.microsoft.com/office/powerpoint/2010/main" val="356348516"/>
+      </p:ext>
+    </p:extLst>
+  </p:cSld>
+  <p:clrMapOvr>
+    <a:masterClrMapping/>
+  </p:clrMapOvr>
+</p:sld>
+</file>
+
+<file path=ppt/slides/slide20.xml><?xml version="1.0" encoding="utf-8"?>
 <p:sld xmlns:a="http://schemas.openxmlformats.org/drawingml/2006/main" xmlns:r="http://schemas.openxmlformats.org/officeDocument/2006/relationships" xmlns:p="http://schemas.openxmlformats.org/presentationml/2006/main">
   <p:cSld>
     <p:spTree>
@@ -15240,7 +13955,7 @@
 </p:sld>
 </file>
 
-<file path=ppt/slides/slide22.xml><?xml version="1.0" encoding="utf-8"?>
+<file path=ppt/slides/slide21.xml><?xml version="1.0" encoding="utf-8"?>
 <p:sld xmlns:a="http://schemas.openxmlformats.org/drawingml/2006/main" xmlns:r="http://schemas.openxmlformats.org/officeDocument/2006/relationships" xmlns:p="http://schemas.openxmlformats.org/presentationml/2006/main">
   <p:cSld>
     <p:spTree>
@@ -16215,7 +14930,7 @@
 </p:sld>
 </file>
 
-<file path=ppt/slides/slide23.xml><?xml version="1.0" encoding="utf-8"?>
+<file path=ppt/slides/slide22.xml><?xml version="1.0" encoding="utf-8"?>
 <p:sld xmlns:a="http://schemas.openxmlformats.org/drawingml/2006/main" xmlns:r="http://schemas.openxmlformats.org/officeDocument/2006/relationships" xmlns:p="http://schemas.openxmlformats.org/presentationml/2006/main">
   <p:cSld>
     <p:spTree>
@@ -17273,7 +15988,7 @@
 </p:sld>
 </file>
 
-<file path=ppt/slides/slide24.xml><?xml version="1.0" encoding="utf-8"?>
+<file path=ppt/slides/slide23.xml><?xml version="1.0" encoding="utf-8"?>
 <p:sld xmlns:a="http://schemas.openxmlformats.org/drawingml/2006/main" xmlns:r="http://schemas.openxmlformats.org/officeDocument/2006/relationships" xmlns:p="http://schemas.openxmlformats.org/presentationml/2006/main">
   <p:cSld>
     <p:spTree>
@@ -18060,7 +16775,7 @@
 </p:sld>
 </file>
 
-<file path=ppt/slides/slide25.xml><?xml version="1.0" encoding="utf-8"?>
+<file path=ppt/slides/slide24.xml><?xml version="1.0" encoding="utf-8"?>
 <p:sld xmlns:a="http://schemas.openxmlformats.org/drawingml/2006/main" xmlns:r="http://schemas.openxmlformats.org/officeDocument/2006/relationships" xmlns:p="http://schemas.openxmlformats.org/presentationml/2006/main">
   <p:cSld>
     <p:spTree>
@@ -21605,7 +20320,7 @@
         <p:spPr>
           <a:xfrm>
             <a:off x="139613" y="1368962"/>
-            <a:ext cx="8603554" cy="4524315"/>
+            <a:ext cx="8603554" cy="4801314"/>
           </a:xfrm>
           <a:prstGeom prst="rect">
             <a:avLst/>
@@ -21692,17 +20407,23 @@
             <a:endParaRPr lang="en-US" b="1" dirty="0"/>
           </a:p>
           <a:p>
-            <a:pPr marL="742950" lvl="1" indent="-285750">
-              <a:buFont typeface="Arial" panose="020B0604020202020204" pitchFamily="34" charset="0"/>
-              <a:buChar char="•"/>
-            </a:pPr>
+            <a:pPr lvl="1"/>
             <a:endParaRPr lang="en-US" b="1" dirty="0"/>
           </a:p>
           <a:p>
-            <a:pPr marL="742950" lvl="1" indent="-285750">
-              <a:buFont typeface="Arial" panose="020B0604020202020204" pitchFamily="34" charset="0"/>
-              <a:buChar char="•"/>
-            </a:pPr>
+            <a:pPr lvl="1"/>
+            <a:endParaRPr lang="en-US" b="1" dirty="0"/>
+          </a:p>
+          <a:p>
+            <a:pPr lvl="1"/>
+            <a:endParaRPr lang="en-US" b="1" dirty="0"/>
+          </a:p>
+          <a:p>
+            <a:pPr lvl="1"/>
+            <a:endParaRPr lang="en-US" b="1" dirty="0"/>
+          </a:p>
+          <a:p>
+            <a:pPr lvl="1"/>
             <a:endParaRPr lang="en-US" b="1" dirty="0"/>
           </a:p>
           <a:p>
@@ -21732,31 +20453,21 @@
             </a:pPr>
             <a:r>
               <a:rPr lang="en-US" b="1" dirty="0"/>
-              <a:t>Key Result: </a:t>
-            </a:r>
-          </a:p>
-          <a:p>
-            <a:pPr lvl="1"/>
-            <a:r>
-              <a:rPr lang="en-US" dirty="0"/>
-              <a:t>Validation R² ≈ 0.38–0.40 </a:t>
-            </a:r>
-          </a:p>
-          <a:p>
-            <a:pPr lvl="1"/>
-            <a:r>
-              <a:rPr lang="en-US" dirty="0"/>
-              <a:t>Test R² ≈ 0.17 (Phase 2 best)</a:t>
+              <a:t>Key Result:  </a:t>
+            </a:r>
+            <a:r>
+              <a:rPr lang="en-US" dirty="0"/>
+              <a:t>Test R² ≈ 0.23</a:t>
             </a:r>
           </a:p>
         </p:txBody>
       </p:sp>
       <p:pic>
         <p:nvPicPr>
-          <p:cNvPr id="3" name="Picture 2">
+          <p:cNvPr id="2" name="Picture 1">
             <a:extLst>
               <a:ext uri="{FF2B5EF4-FFF2-40B4-BE49-F238E27FC236}">
-                <a16:creationId xmlns:a16="http://schemas.microsoft.com/office/drawing/2014/main" id="{6B467B2F-43BA-7A05-CDE2-9A8DBAC02090}"/>
+                <a16:creationId xmlns:a16="http://schemas.microsoft.com/office/drawing/2014/main" id="{6EB52DF2-EA38-43F1-211A-5C2C6307FD58}"/>
               </a:ext>
             </a:extLst>
           </p:cNvPr>
@@ -21773,14 +20484,15 @@
               </a:ext>
             </a:extLst>
           </a:blip>
+          <a:srcRect t="8824"/>
           <a:stretch>
             <a:fillRect/>
           </a:stretch>
         </p:blipFill>
         <p:spPr>
           <a:xfrm>
-            <a:off x="975971" y="2301596"/>
-            <a:ext cx="5120029" cy="2092762"/>
+            <a:off x="741252" y="2588519"/>
+            <a:ext cx="5354748" cy="2362200"/>
           </a:xfrm>
           <a:prstGeom prst="rect">
             <a:avLst/>
@@ -21801,349 +20513,6 @@
 </file>
 
 <file path=ppt/slides/slide5.xml><?xml version="1.0" encoding="utf-8"?>
-<p:sld xmlns:a="http://schemas.openxmlformats.org/drawingml/2006/main" xmlns:r="http://schemas.openxmlformats.org/officeDocument/2006/relationships" xmlns:p="http://schemas.openxmlformats.org/presentationml/2006/main">
-  <p:cSld>
-    <p:spTree>
-      <p:nvGrpSpPr>
-        <p:cNvPr id="1" name="">
-          <a:extLst>
-            <a:ext uri="{FF2B5EF4-FFF2-40B4-BE49-F238E27FC236}">
-              <a16:creationId xmlns:a16="http://schemas.microsoft.com/office/drawing/2014/main" id="{6335524C-4EE8-27EA-289A-D157B2608BAB}"/>
-            </a:ext>
-          </a:extLst>
-        </p:cNvPr>
-        <p:cNvGrpSpPr/>
-        <p:nvPr/>
-      </p:nvGrpSpPr>
-      <p:grpSpPr>
-        <a:xfrm>
-          <a:off x="0" y="0"/>
-          <a:ext cx="0" cy="0"/>
-          <a:chOff x="0" y="0"/>
-          <a:chExt cx="0" cy="0"/>
-        </a:xfrm>
-      </p:grpSpPr>
-      <p:sp>
-        <p:nvSpPr>
-          <p:cNvPr id="4" name="Rectangle 3">
-            <a:extLst>
-              <a:ext uri="{FF2B5EF4-FFF2-40B4-BE49-F238E27FC236}">
-                <a16:creationId xmlns:a16="http://schemas.microsoft.com/office/drawing/2014/main" id="{05E57585-C0F5-C9DB-18FA-5FC92375805D}"/>
-              </a:ext>
-            </a:extLst>
-          </p:cNvPr>
-          <p:cNvSpPr/>
-          <p:nvPr/>
-        </p:nvSpPr>
-        <p:spPr>
-          <a:xfrm>
-            <a:off x="0" y="196343"/>
-            <a:ext cx="7199290" cy="1007423"/>
-          </a:xfrm>
-          <a:prstGeom prst="rect">
-            <a:avLst/>
-          </a:prstGeom>
-          <a:solidFill>
-            <a:srgbClr val="CC0033"/>
-          </a:solidFill>
-          <a:ln>
-            <a:noFill/>
-          </a:ln>
-        </p:spPr>
-        <p:style>
-          <a:lnRef idx="1">
-            <a:schemeClr val="accent1"/>
-          </a:lnRef>
-          <a:fillRef idx="3">
-            <a:schemeClr val="accent1"/>
-          </a:fillRef>
-          <a:effectRef idx="2">
-            <a:schemeClr val="accent1"/>
-          </a:effectRef>
-          <a:fontRef idx="minor">
-            <a:schemeClr val="lt1"/>
-          </a:fontRef>
-        </p:style>
-        <p:txBody>
-          <a:bodyPr rtlCol="0" anchor="ctr"/>
-          <a:lstStyle/>
-          <a:p>
-            <a:pPr algn="ctr"/>
-            <a:endParaRPr lang="en-US" dirty="0">
-              <a:solidFill>
-                <a:schemeClr val="accent1"/>
-              </a:solidFill>
-            </a:endParaRPr>
-          </a:p>
-        </p:txBody>
-      </p:sp>
-      <p:sp>
-        <p:nvSpPr>
-          <p:cNvPr id="5" name="Title 10">
-            <a:extLst>
-              <a:ext uri="{FF2B5EF4-FFF2-40B4-BE49-F238E27FC236}">
-                <a16:creationId xmlns:a16="http://schemas.microsoft.com/office/drawing/2014/main" id="{A527685F-7BA4-384E-9C53-B8C017774E1B}"/>
-              </a:ext>
-            </a:extLst>
-          </p:cNvPr>
-          <p:cNvSpPr txBox="1">
-            <a:spLocks/>
-          </p:cNvSpPr>
-          <p:nvPr/>
-        </p:nvSpPr>
-        <p:spPr>
-          <a:xfrm>
-            <a:off x="459357" y="361539"/>
-            <a:ext cx="6546750" cy="719563"/>
-          </a:xfrm>
-          <a:prstGeom prst="rect">
-            <a:avLst/>
-          </a:prstGeom>
-        </p:spPr>
-        <p:txBody>
-          <a:bodyPr anchor="ctr" anchorCtr="0">
-            <a:noAutofit/>
-          </a:bodyPr>
-          <a:lstStyle>
-            <a:lvl1pPr algn="ctr" defTabSz="457200" rtl="0" eaLnBrk="1" latinLnBrk="0" hangingPunct="1">
-              <a:spcBef>
-                <a:spcPct val="0"/>
-              </a:spcBef>
-              <a:buNone/>
-              <a:defRPr sz="4400" kern="1200">
-                <a:solidFill>
-                  <a:schemeClr val="tx1"/>
-                </a:solidFill>
-                <a:latin typeface="+mj-lt"/>
-                <a:ea typeface="+mj-ea"/>
-                <a:cs typeface="+mj-cs"/>
-              </a:defRPr>
-            </a:lvl1pPr>
-          </a:lstStyle>
-          <a:p>
-            <a:pPr lvl="0"/>
-            <a:r>
-              <a:rPr lang="en-US" b="1" dirty="0">
-                <a:solidFill>
-                  <a:schemeClr val="bg1"/>
-                </a:solidFill>
-              </a:rPr>
-              <a:t>Model Performance</a:t>
-            </a:r>
-          </a:p>
-        </p:txBody>
-      </p:sp>
-      <p:sp>
-        <p:nvSpPr>
-          <p:cNvPr id="11" name="TextBox 10">
-            <a:extLst>
-              <a:ext uri="{FF2B5EF4-FFF2-40B4-BE49-F238E27FC236}">
-                <a16:creationId xmlns:a16="http://schemas.microsoft.com/office/drawing/2014/main" id="{744CA0D0-60FE-16D8-81D1-545FDC0FA658}"/>
-              </a:ext>
-            </a:extLst>
-          </p:cNvPr>
-          <p:cNvSpPr txBox="1"/>
-          <p:nvPr/>
-        </p:nvSpPr>
-        <p:spPr>
-          <a:xfrm>
-            <a:off x="139613" y="1368962"/>
-            <a:ext cx="10165922" cy="4247317"/>
-          </a:xfrm>
-          <a:prstGeom prst="rect">
-            <a:avLst/>
-          </a:prstGeom>
-          <a:noFill/>
-        </p:spPr>
-        <p:txBody>
-          <a:bodyPr wrap="square">
-            <a:spAutoFit/>
-          </a:bodyPr>
-          <a:lstStyle/>
-          <a:p>
-            <a:r>
-              <a:rPr lang="en-US" b="1" dirty="0"/>
-              <a:t>Results</a:t>
-            </a:r>
-            <a:endParaRPr lang="en-US" dirty="0"/>
-          </a:p>
-          <a:p>
-            <a:pPr marL="285750" indent="-285750">
-              <a:buFont typeface="Arial" panose="020B0604020202020204" pitchFamily="34" charset="0"/>
-              <a:buChar char="•"/>
-            </a:pPr>
-            <a:r>
-              <a:rPr lang="en-US" dirty="0"/>
-              <a:t>Initial linear models exhibited negative out-of-sample R² </a:t>
-            </a:r>
-          </a:p>
-          <a:p>
-            <a:pPr marL="285750" indent="-285750">
-              <a:buFont typeface="Arial" panose="020B0604020202020204" pitchFamily="34" charset="0"/>
-              <a:buChar char="•"/>
-            </a:pPr>
-            <a:r>
-              <a:rPr lang="en-US" dirty="0"/>
-              <a:t>Transition to nonlinear models significantly improved performance </a:t>
-            </a:r>
-          </a:p>
-          <a:p>
-            <a:pPr marL="285750" indent="-285750">
-              <a:buFont typeface="Arial" panose="020B0604020202020204" pitchFamily="34" charset="0"/>
-              <a:buChar char="•"/>
-            </a:pPr>
-            <a:r>
-              <a:rPr lang="en-US" dirty="0"/>
-              <a:t>Extra Trees achieved stable and improved predictive power </a:t>
-            </a:r>
-          </a:p>
-          <a:p>
-            <a:pPr marL="285750" indent="-285750">
-              <a:buFont typeface="Arial" panose="020B0604020202020204" pitchFamily="34" charset="0"/>
-              <a:buChar char="•"/>
-            </a:pPr>
-            <a:r>
-              <a:rPr lang="en-US" dirty="0"/>
-              <a:t>Phase 3 improved Test R² from ~0.17 → ~0.74</a:t>
-            </a:r>
-          </a:p>
-          <a:p>
-            <a:pPr marL="285750" indent="-285750">
-              <a:buFont typeface="Arial" panose="020B0604020202020204" pitchFamily="34" charset="0"/>
-              <a:buChar char="•"/>
-            </a:pPr>
-            <a:r>
-              <a:rPr lang="en-US" dirty="0"/>
-              <a:t>Phase 3 improves predictive performance and validates the forecasting backbone (Test R² ≈ 0.74)</a:t>
-            </a:r>
-          </a:p>
-          <a:p>
-            <a:pPr marL="285750" indent="-285750">
-              <a:buFont typeface="Arial" panose="020B0604020202020204" pitchFamily="34" charset="0"/>
-              <a:buChar char="•"/>
-            </a:pPr>
-            <a:r>
-              <a:rPr lang="en-US" dirty="0"/>
-              <a:t>3-year forward target remains critical for stability </a:t>
-            </a:r>
-          </a:p>
-          <a:p>
-            <a:br>
-              <a:rPr lang="en-US" dirty="0"/>
-            </a:br>
-            <a:endParaRPr lang="en-US" dirty="0"/>
-          </a:p>
-          <a:p>
-            <a:r>
-              <a:rPr lang="en-US" b="1" dirty="0"/>
-              <a:t>Interpretation</a:t>
-            </a:r>
-            <a:endParaRPr lang="en-US" dirty="0"/>
-          </a:p>
-          <a:p>
-            <a:pPr marL="285750" indent="-285750">
-              <a:buFont typeface="Arial" panose="020B0604020202020204" pitchFamily="34" charset="0"/>
-              <a:buChar char="•"/>
-            </a:pPr>
-            <a:r>
-              <a:rPr lang="en-US" dirty="0"/>
-              <a:t>Population change is a high-noise but structured outcome </a:t>
-            </a:r>
-          </a:p>
-          <a:p>
-            <a:pPr marL="285750" indent="-285750">
-              <a:buFont typeface="Arial" panose="020B0604020202020204" pitchFamily="34" charset="0"/>
-              <a:buChar char="•"/>
-            </a:pPr>
-            <a:r>
-              <a:rPr lang="en-US" dirty="0"/>
-              <a:t>Nonlinear models capture hidden structure </a:t>
-            </a:r>
-          </a:p>
-          <a:p>
-            <a:pPr marL="285750" indent="-285750">
-              <a:buFont typeface="Arial" panose="020B0604020202020204" pitchFamily="34" charset="0"/>
-              <a:buChar char="•"/>
-            </a:pPr>
-            <a:r>
-              <a:rPr lang="en-US" dirty="0"/>
-              <a:t>Structural + disaster features provide meaningful signal </a:t>
-            </a:r>
-          </a:p>
-          <a:p>
-            <a:pPr marL="285750" indent="-285750">
-              <a:buFont typeface="Arial" panose="020B0604020202020204" pitchFamily="34" charset="0"/>
-              <a:buChar char="•"/>
-            </a:pPr>
-            <a:r>
-              <a:rPr lang="en-US" dirty="0"/>
-              <a:t>Model performance is now stable and validated across phases </a:t>
-            </a:r>
-          </a:p>
-          <a:p>
-            <a:pPr marL="285750" indent="-285750">
-              <a:buFont typeface="Arial" panose="020B0604020202020204" pitchFamily="34" charset="0"/>
-              <a:buChar char="•"/>
-            </a:pPr>
-            <a:endParaRPr lang="en-US" dirty="0"/>
-          </a:p>
-        </p:txBody>
-      </p:sp>
-      <p:pic>
-        <p:nvPicPr>
-          <p:cNvPr id="3" name="Picture 2">
-            <a:extLst>
-              <a:ext uri="{FF2B5EF4-FFF2-40B4-BE49-F238E27FC236}">
-                <a16:creationId xmlns:a16="http://schemas.microsoft.com/office/drawing/2014/main" id="{7952A3C0-276D-663C-7A79-F564C77004A4}"/>
-              </a:ext>
-            </a:extLst>
-          </p:cNvPr>
-          <p:cNvPicPr>
-            <a:picLocks noChangeAspect="1"/>
-          </p:cNvPicPr>
-          <p:nvPr/>
-        </p:nvPicPr>
-        <p:blipFill>
-          <a:blip r:embed="rId3">
-            <a:extLst>
-              <a:ext uri="{28A0092B-C50C-407E-A947-70E740481C1C}">
-                <a14:useLocalDpi xmlns:a14="http://schemas.microsoft.com/office/drawing/2010/main" val="0"/>
-              </a:ext>
-            </a:extLst>
-          </a:blip>
-          <a:stretch>
-            <a:fillRect/>
-          </a:stretch>
-        </p:blipFill>
-        <p:spPr>
-          <a:xfrm>
-            <a:off x="6899361" y="3429000"/>
-            <a:ext cx="5304996" cy="2599938"/>
-          </a:xfrm>
-          <a:prstGeom prst="rect">
-            <a:avLst/>
-          </a:prstGeom>
-          <a:ln>
-            <a:solidFill>
-              <a:schemeClr val="tx1"/>
-            </a:solidFill>
-          </a:ln>
-        </p:spPr>
-      </p:pic>
-    </p:spTree>
-    <p:extLst>
-      <p:ext uri="{BB962C8B-B14F-4D97-AF65-F5344CB8AC3E}">
-        <p14:creationId xmlns:p14="http://schemas.microsoft.com/office/powerpoint/2010/main" val="4209282604"/>
-      </p:ext>
-    </p:extLst>
-  </p:cSld>
-  <p:clrMapOvr>
-    <a:masterClrMapping/>
-  </p:clrMapOvr>
-</p:sld>
-</file>
-
-<file path=ppt/slides/slide6.xml><?xml version="1.0" encoding="utf-8"?>
 <p:sld xmlns:a="http://schemas.openxmlformats.org/drawingml/2006/main" xmlns:r="http://schemas.openxmlformats.org/officeDocument/2006/relationships" xmlns:p="http://schemas.openxmlformats.org/presentationml/2006/main">
   <p:cSld>
     <p:spTree>
@@ -22535,7 +20904,7 @@
         </p:blipFill>
         <p:spPr>
           <a:xfrm>
-            <a:off x="13265905" y="1206500"/>
+            <a:off x="13752025" y="1005424"/>
             <a:ext cx="7213600" cy="5651500"/>
           </a:xfrm>
           <a:prstGeom prst="rect">
@@ -22628,7 +20997,7 @@
 </p:sld>
 </file>
 
-<file path=ppt/slides/slide7.xml><?xml version="1.0" encoding="utf-8"?>
+<file path=ppt/slides/slide6.xml><?xml version="1.0" encoding="utf-8"?>
 <p:sld xmlns:a="http://schemas.openxmlformats.org/drawingml/2006/main" xmlns:r="http://schemas.openxmlformats.org/officeDocument/2006/relationships" xmlns:p="http://schemas.openxmlformats.org/presentationml/2006/main">
   <p:cSld>
     <p:spTree>
@@ -22972,7 +21341,7 @@
 </p:sld>
 </file>
 
-<file path=ppt/slides/slide8.xml><?xml version="1.0" encoding="utf-8"?>
+<file path=ppt/slides/slide7.xml><?xml version="1.0" encoding="utf-8"?>
 <p:sld xmlns:a="http://schemas.openxmlformats.org/drawingml/2006/main" xmlns:r="http://schemas.openxmlformats.org/officeDocument/2006/relationships" xmlns:p="http://schemas.openxmlformats.org/presentationml/2006/main">
   <p:cSld>
     <p:spTree>
@@ -23299,7 +21668,7 @@
 </p:sld>
 </file>
 
-<file path=ppt/slides/slide9.xml><?xml version="1.0" encoding="utf-8"?>
+<file path=ppt/slides/slide8.xml><?xml version="1.0" encoding="utf-8"?>
 <p:sld xmlns:a="http://schemas.openxmlformats.org/drawingml/2006/main" xmlns:r="http://schemas.openxmlformats.org/officeDocument/2006/relationships" xmlns:p="http://schemas.openxmlformats.org/presentationml/2006/main">
   <p:cSld>
     <p:spTree>
@@ -23599,6 +21968,310 @@
     <p:extLst>
       <p:ext uri="{BB962C8B-B14F-4D97-AF65-F5344CB8AC3E}">
         <p14:creationId xmlns:p14="http://schemas.microsoft.com/office/powerpoint/2010/main" val="2050642800"/>
+      </p:ext>
+    </p:extLst>
+  </p:cSld>
+  <p:clrMapOvr>
+    <a:masterClrMapping/>
+  </p:clrMapOvr>
+</p:sld>
+</file>
+
+<file path=ppt/slides/slide9.xml><?xml version="1.0" encoding="utf-8"?>
+<p:sld xmlns:a="http://schemas.openxmlformats.org/drawingml/2006/main" xmlns:r="http://schemas.openxmlformats.org/officeDocument/2006/relationships" xmlns:p="http://schemas.openxmlformats.org/presentationml/2006/main">
+  <p:cSld>
+    <p:spTree>
+      <p:nvGrpSpPr>
+        <p:cNvPr id="1" name="">
+          <a:extLst>
+            <a:ext uri="{FF2B5EF4-FFF2-40B4-BE49-F238E27FC236}">
+              <a16:creationId xmlns:a16="http://schemas.microsoft.com/office/drawing/2014/main" id="{7E0CB461-06C7-B3FE-2FD3-A6EAA2C2C6C6}"/>
+            </a:ext>
+          </a:extLst>
+        </p:cNvPr>
+        <p:cNvGrpSpPr/>
+        <p:nvPr/>
+      </p:nvGrpSpPr>
+      <p:grpSpPr>
+        <a:xfrm>
+          <a:off x="0" y="0"/>
+          <a:ext cx="0" cy="0"/>
+          <a:chOff x="0" y="0"/>
+          <a:chExt cx="0" cy="0"/>
+        </a:xfrm>
+      </p:grpSpPr>
+      <p:sp>
+        <p:nvSpPr>
+          <p:cNvPr id="4" name="Rectangle 3">
+            <a:extLst>
+              <a:ext uri="{FF2B5EF4-FFF2-40B4-BE49-F238E27FC236}">
+                <a16:creationId xmlns:a16="http://schemas.microsoft.com/office/drawing/2014/main" id="{46AFF467-EA34-A1E1-7D27-49257098751A}"/>
+              </a:ext>
+            </a:extLst>
+          </p:cNvPr>
+          <p:cNvSpPr/>
+          <p:nvPr/>
+        </p:nvSpPr>
+        <p:spPr>
+          <a:xfrm>
+            <a:off x="0" y="196343"/>
+            <a:ext cx="7199290" cy="1007423"/>
+          </a:xfrm>
+          <a:prstGeom prst="rect">
+            <a:avLst/>
+          </a:prstGeom>
+          <a:solidFill>
+            <a:srgbClr val="CC0033"/>
+          </a:solidFill>
+          <a:ln>
+            <a:noFill/>
+          </a:ln>
+        </p:spPr>
+        <p:style>
+          <a:lnRef idx="1">
+            <a:schemeClr val="accent1"/>
+          </a:lnRef>
+          <a:fillRef idx="3">
+            <a:schemeClr val="accent1"/>
+          </a:fillRef>
+          <a:effectRef idx="2">
+            <a:schemeClr val="accent1"/>
+          </a:effectRef>
+          <a:fontRef idx="minor">
+            <a:schemeClr val="lt1"/>
+          </a:fontRef>
+        </p:style>
+        <p:txBody>
+          <a:bodyPr rtlCol="0" anchor="ctr"/>
+          <a:lstStyle/>
+          <a:p>
+            <a:pPr algn="ctr"/>
+            <a:endParaRPr lang="en-US" dirty="0">
+              <a:solidFill>
+                <a:schemeClr val="accent1"/>
+              </a:solidFill>
+            </a:endParaRPr>
+          </a:p>
+        </p:txBody>
+      </p:sp>
+      <p:sp>
+        <p:nvSpPr>
+          <p:cNvPr id="5" name="Title 10">
+            <a:extLst>
+              <a:ext uri="{FF2B5EF4-FFF2-40B4-BE49-F238E27FC236}">
+                <a16:creationId xmlns:a16="http://schemas.microsoft.com/office/drawing/2014/main" id="{1C9245BE-7F46-5541-F240-56BA0A3CBFE3}"/>
+              </a:ext>
+            </a:extLst>
+          </p:cNvPr>
+          <p:cNvSpPr txBox="1">
+            <a:spLocks/>
+          </p:cNvSpPr>
+          <p:nvPr/>
+        </p:nvSpPr>
+        <p:spPr>
+          <a:xfrm>
+            <a:off x="459357" y="361539"/>
+            <a:ext cx="6546750" cy="719563"/>
+          </a:xfrm>
+          <a:prstGeom prst="rect">
+            <a:avLst/>
+          </a:prstGeom>
+        </p:spPr>
+        <p:txBody>
+          <a:bodyPr anchor="ctr" anchorCtr="0">
+            <a:noAutofit/>
+          </a:bodyPr>
+          <a:lstStyle>
+            <a:lvl1pPr algn="ctr" defTabSz="457200" rtl="0" eaLnBrk="1" latinLnBrk="0" hangingPunct="1">
+              <a:spcBef>
+                <a:spcPct val="0"/>
+              </a:spcBef>
+              <a:buNone/>
+              <a:defRPr sz="4400" kern="1200">
+                <a:solidFill>
+                  <a:schemeClr val="tx1"/>
+                </a:solidFill>
+                <a:latin typeface="+mj-lt"/>
+                <a:ea typeface="+mj-ea"/>
+                <a:cs typeface="+mj-cs"/>
+              </a:defRPr>
+            </a:lvl1pPr>
+          </a:lstStyle>
+          <a:p>
+            <a:pPr lvl="0"/>
+            <a:r>
+              <a:rPr lang="en-US" sz="3200" b="1" dirty="0">
+                <a:solidFill>
+                  <a:schemeClr val="bg1"/>
+                </a:solidFill>
+              </a:rPr>
+              <a:t>Structural Patterns </a:t>
+            </a:r>
+          </a:p>
+          <a:p>
+            <a:pPr lvl="0"/>
+            <a:r>
+              <a:rPr lang="en-US" sz="3200" b="1" dirty="0">
+                <a:solidFill>
+                  <a:schemeClr val="bg1"/>
+                </a:solidFill>
+              </a:rPr>
+              <a:t>(Beyond Prediction)</a:t>
+            </a:r>
+          </a:p>
+        </p:txBody>
+      </p:sp>
+      <p:sp>
+        <p:nvSpPr>
+          <p:cNvPr id="11" name="TextBox 10">
+            <a:extLst>
+              <a:ext uri="{FF2B5EF4-FFF2-40B4-BE49-F238E27FC236}">
+                <a16:creationId xmlns:a16="http://schemas.microsoft.com/office/drawing/2014/main" id="{5F60B027-7280-1B08-F112-1AB1AFF3FADD}"/>
+              </a:ext>
+            </a:extLst>
+          </p:cNvPr>
+          <p:cNvSpPr txBox="1"/>
+          <p:nvPr/>
+        </p:nvSpPr>
+        <p:spPr>
+          <a:xfrm>
+            <a:off x="139613" y="1368962"/>
+            <a:ext cx="9560053" cy="4708981"/>
+          </a:xfrm>
+          <a:prstGeom prst="rect">
+            <a:avLst/>
+          </a:prstGeom>
+          <a:noFill/>
+        </p:spPr>
+        <p:txBody>
+          <a:bodyPr wrap="square">
+            <a:spAutoFit/>
+          </a:bodyPr>
+          <a:lstStyle/>
+          <a:p>
+            <a:r>
+              <a:rPr lang="en-US" sz="2000" b="1" dirty="0"/>
+              <a:t>What emerges</a:t>
+            </a:r>
+          </a:p>
+          <a:p>
+            <a:pPr marL="285750" indent="-285750">
+              <a:buFont typeface="Arial" panose="020B0604020202020204" pitchFamily="34" charset="0"/>
+              <a:buChar char="•"/>
+            </a:pPr>
+            <a:r>
+              <a:rPr lang="en-US" sz="2000" dirty="0"/>
+              <a:t>Distinct municipal typologies</a:t>
+            </a:r>
+          </a:p>
+          <a:p>
+            <a:pPr marL="285750" indent="-285750">
+              <a:buFont typeface="Arial" panose="020B0604020202020204" pitchFamily="34" charset="0"/>
+              <a:buChar char="•"/>
+            </a:pPr>
+            <a:r>
+              <a:rPr lang="en-US" sz="2000" dirty="0"/>
+              <a:t>Clear regional clustering</a:t>
+            </a:r>
+            <a:br>
+              <a:rPr lang="en-US" sz="2000" dirty="0"/>
+            </a:br>
+            <a:endParaRPr lang="en-US" sz="2000" dirty="0"/>
+          </a:p>
+          <a:p>
+            <a:r>
+              <a:rPr lang="en-US" sz="2000" b="1" dirty="0"/>
+              <a:t>Key result</a:t>
+            </a:r>
+          </a:p>
+          <a:p>
+            <a:pPr marL="285750" indent="-285750">
+              <a:buFont typeface="Arial" panose="020B0604020202020204" pitchFamily="34" charset="0"/>
+              <a:buChar char="•"/>
+            </a:pPr>
+            <a:r>
+              <a:rPr lang="en-US" sz="2000" dirty="0"/>
+              <a:t>Patterns are stable and spatially coherent</a:t>
+            </a:r>
+          </a:p>
+          <a:p>
+            <a:pPr marL="285750" indent="-285750">
+              <a:buFont typeface="Arial" panose="020B0604020202020204" pitchFamily="34" charset="0"/>
+              <a:buChar char="•"/>
+            </a:pPr>
+            <a:r>
+              <a:rPr lang="en-US" sz="2000" dirty="0"/>
+              <a:t>Similar municipalities cluster together </a:t>
+            </a:r>
+          </a:p>
+          <a:p>
+            <a:pPr marL="285750" indent="-285750">
+              <a:buFont typeface="Arial" panose="020B0604020202020204" pitchFamily="34" charset="0"/>
+              <a:buChar char="•"/>
+            </a:pPr>
+            <a:r>
+              <a:rPr lang="en-US" sz="2000" dirty="0"/>
+              <a:t>Neighboring regions share structural characteristics </a:t>
+            </a:r>
+          </a:p>
+          <a:p>
+            <a:pPr marL="285750" indent="-285750">
+              <a:buFont typeface="Arial" panose="020B0604020202020204" pitchFamily="34" charset="0"/>
+              <a:buChar char="•"/>
+            </a:pPr>
+            <a:r>
+              <a:rPr lang="en-US" sz="2000" dirty="0"/>
+              <a:t>Results are consistent across specifications </a:t>
+            </a:r>
+          </a:p>
+          <a:p>
+            <a:br>
+              <a:rPr lang="en-US" sz="2000" dirty="0"/>
+            </a:br>
+            <a:endParaRPr lang="en-US" sz="2000" dirty="0"/>
+          </a:p>
+          <a:p>
+            <a:r>
+              <a:rPr lang="en-US" sz="2000" b="1" dirty="0"/>
+              <a:t>Interpretation</a:t>
+            </a:r>
+          </a:p>
+          <a:p>
+            <a:pPr marL="285750" indent="-285750">
+              <a:buFont typeface="Arial" panose="020B0604020202020204" pitchFamily="34" charset="0"/>
+              <a:buChar char="•"/>
+            </a:pPr>
+            <a:r>
+              <a:rPr lang="en-US" sz="2000" dirty="0"/>
+              <a:t>Population dynamics are spatially structured, not random</a:t>
+            </a:r>
+          </a:p>
+          <a:p>
+            <a:pPr marL="285750" indent="-285750">
+              <a:buFont typeface="Arial" panose="020B0604020202020204" pitchFamily="34" charset="0"/>
+              <a:buChar char="•"/>
+            </a:pPr>
+            <a:r>
+              <a:rPr lang="en-US" sz="2000" dirty="0"/>
+              <a:t>Decline is concentrated in specific regions </a:t>
+            </a:r>
+          </a:p>
+          <a:p>
+            <a:pPr marL="285750" indent="-285750">
+              <a:buFont typeface="Arial" panose="020B0604020202020204" pitchFamily="34" charset="0"/>
+              <a:buChar char="•"/>
+            </a:pPr>
+            <a:r>
+              <a:rPr lang="en-US" sz="2000" dirty="0"/>
+              <a:t>Vulnerability and economic conditions align geographically</a:t>
+            </a:r>
+          </a:p>
+        </p:txBody>
+      </p:sp>
+    </p:spTree>
+    <p:extLst>
+      <p:ext uri="{BB962C8B-B14F-4D97-AF65-F5344CB8AC3E}">
+        <p14:creationId xmlns:p14="http://schemas.microsoft.com/office/powerpoint/2010/main" val="628415208"/>
       </p:ext>
     </p:extLst>
   </p:cSld>
@@ -24400,15 +23073,6 @@
 </file>
 
 <file path=customXml/item1.xml><?xml version="1.0" encoding="utf-8"?>
-<?mso-contentType ?>
-<FormTemplates xmlns="http://schemas.microsoft.com/sharepoint/v3/contenttype/forms">
-  <Display>DocumentLibraryForm</Display>
-  <Edit>DocumentLibraryForm</Edit>
-  <New>DocumentLibraryForm</New>
-</FormTemplates>
-</file>
-
-<file path=customXml/item2.xml><?xml version="1.0" encoding="utf-8"?>
 <p:properties xmlns:p="http://schemas.microsoft.com/office/2006/metadata/properties" xmlns:xsi="http://www.w3.org/2001/XMLSchema-instance" xmlns:pc="http://schemas.microsoft.com/office/infopath/2007/PartnerControls">
   <documentManagement>
     <_activity xmlns="11e45801-bee2-4eee-abb6-7fc01a896634" xsi:nil="true"/>
@@ -24416,7 +23080,7 @@
 </p:properties>
 </file>
 
-<file path=customXml/item3.xml><?xml version="1.0" encoding="utf-8"?>
+<file path=customXml/item2.xml><?xml version="1.0" encoding="utf-8"?>
 <ct:contentTypeSchema xmlns:ct="http://schemas.microsoft.com/office/2006/metadata/contentType" xmlns:ma="http://schemas.microsoft.com/office/2006/metadata/properties/metaAttributes" ct:_="" ma:_="" ma:contentTypeName="Document" ma:contentTypeID="0x01010015021A5DC4BEF54E90B3A7E0D30B82FD" ma:contentTypeVersion="5" ma:contentTypeDescription="Create a new document." ma:contentTypeScope="" ma:versionID="0b09cb170d6a15113edb6f479f6ecd10">
   <xsd:schema xmlns:xsd="http://www.w3.org/2001/XMLSchema" xmlns:xs="http://www.w3.org/2001/XMLSchema" xmlns:p="http://schemas.microsoft.com/office/2006/metadata/properties" xmlns:ns3="11e45801-bee2-4eee-abb6-7fc01a896634" targetNamespace="http://schemas.microsoft.com/office/2006/metadata/properties" ma:root="true" ma:fieldsID="c9b1b393770a16940206f9bb69539431" ns3:_="">
     <xsd:import namespace="11e45801-bee2-4eee-abb6-7fc01a896634"/>
@@ -24566,15 +23230,16 @@
 </ct:contentTypeSchema>
 </file>
 
-<file path=customXml/itemProps1.xml><?xml version="1.0" encoding="utf-8"?>
-<ds:datastoreItem xmlns:ds="http://schemas.openxmlformats.org/officeDocument/2006/customXml" ds:itemID="{B94EBF72-05B3-4092-B058-100DE54983B2}">
-  <ds:schemaRefs>
-    <ds:schemaRef ds:uri="http://schemas.microsoft.com/sharepoint/v3/contenttype/forms"/>
-  </ds:schemaRefs>
-</ds:datastoreItem>
+<file path=customXml/item3.xml><?xml version="1.0" encoding="utf-8"?>
+<?mso-contentType ?>
+<FormTemplates xmlns="http://schemas.microsoft.com/sharepoint/v3/contenttype/forms">
+  <Display>DocumentLibraryForm</Display>
+  <Edit>DocumentLibraryForm</Edit>
+  <New>DocumentLibraryForm</New>
+</FormTemplates>
 </file>
 
-<file path=customXml/itemProps2.xml><?xml version="1.0" encoding="utf-8"?>
+<file path=customXml/itemProps1.xml><?xml version="1.0" encoding="utf-8"?>
 <ds:datastoreItem xmlns:ds="http://schemas.openxmlformats.org/officeDocument/2006/customXml" ds:itemID="{1EFFF01E-6DF4-4530-B663-FF4BD91444A6}">
   <ds:schemaRefs>
     <ds:schemaRef ds:uri="11e45801-bee2-4eee-abb6-7fc01a896634"/>
@@ -24590,7 +23255,7 @@
 </ds:datastoreItem>
 </file>
 
-<file path=customXml/itemProps3.xml><?xml version="1.0" encoding="utf-8"?>
+<file path=customXml/itemProps2.xml><?xml version="1.0" encoding="utf-8"?>
 <ds:datastoreItem xmlns:ds="http://schemas.openxmlformats.org/officeDocument/2006/customXml" ds:itemID="{CB7AAD6B-2CD1-4FD9-A228-72630DF2E75E}">
   <ds:schemaRefs>
     <ds:schemaRef ds:uri="http://schemas.microsoft.com/office/2006/metadata/contentType"/>
@@ -24606,4 +23271,12 @@
     <ds:schemaRef ds:uri="http://schemas.microsoft.com/internal/obd"/>
   </ds:schemaRefs>
 </ds:datastoreItem>
+</file>
+
+<file path=customXml/itemProps3.xml><?xml version="1.0" encoding="utf-8"?>
+<ds:datastoreItem xmlns:ds="http://schemas.openxmlformats.org/officeDocument/2006/customXml" ds:itemID="{B94EBF72-05B3-4092-B058-100DE54983B2}">
+  <ds:schemaRefs>
+    <ds:schemaRef ds:uri="http://schemas.microsoft.com/sharepoint/v3/contenttype/forms"/>
+  </ds:schemaRefs>
+</ds:datastoreItem>
 </file>